--- a/LabBook_30.pptx
+++ b/LabBook_30.pptx
@@ -236,7 +236,7 @@
           <a:p>
             <a:fld id="{8438F8DC-35B0-48E6-A86E-42F1F08DD00F}" type="datetimeFigureOut">
               <a:rPr lang="es-ES" smtClean="0"/>
-              <a:t>03/05/2026</a:t>
+              <a:t>26/05/2026</a:t>
             </a:fld>
             <a:endParaRPr lang="es-ES"/>
           </a:p>
@@ -314,7 +314,7 @@
           <a:p>
             <a:fld id="{4116A549-763A-4A89-A454-A94BAF51395E}" type="slidenum">
               <a:rPr lang="es-ES" smtClean="0"/>
-              <a:t>‹Nº›</a:t>
+              <a:t>‹N›</a:t>
             </a:fld>
             <a:endParaRPr lang="es-ES"/>
           </a:p>
@@ -413,7 +413,7 @@
           <a:p>
             <a:fld id="{FACBDC12-F39B-4B97-8F4D-6734F9D366FF}" type="datetimeFigureOut">
               <a:rPr lang="es-ES" smtClean="0"/>
-              <a:t>03/05/2026</a:t>
+              <a:t>26/05/2026</a:t>
             </a:fld>
             <a:endParaRPr lang="es-ES"/>
           </a:p>
@@ -571,7 +571,7 @@
           <a:p>
             <a:fld id="{676223B9-C868-4436-87D9-1A3152E1157A}" type="slidenum">
               <a:rPr lang="es-ES" smtClean="0"/>
-              <a:t>‹Nº›</a:t>
+              <a:t>‹N›</a:t>
             </a:fld>
             <a:endParaRPr lang="es-ES"/>
           </a:p>
@@ -1051,7 +1051,7 @@
           </a:lstStyle>
           <a:p>
             <a:fld id="{B6F15528-21DE-4FAA-801E-634DDDAF4B2B}" type="slidenum">
-              <a:t>‹Nº›</a:t>
+              <a:t>‹N›</a:t>
             </a:fld>
             <a:endParaRPr/>
           </a:p>
@@ -1218,7 +1218,7 @@
           </a:lstStyle>
           <a:p>
             <a:fld id="{B6F15528-21DE-4FAA-801E-634DDDAF4B2B}" type="slidenum">
-              <a:t>‹Nº›</a:t>
+              <a:t>‹N›</a:t>
             </a:fld>
             <a:endParaRPr/>
           </a:p>
@@ -1440,7 +1440,7 @@
           </a:lstStyle>
           <a:p>
             <a:fld id="{B6F15528-21DE-4FAA-801E-634DDDAF4B2B}" type="slidenum">
-              <a:t>‹Nº›</a:t>
+              <a:t>‹N›</a:t>
             </a:fld>
             <a:endParaRPr/>
           </a:p>
@@ -1647,7 +1647,7 @@
           </a:lstStyle>
           <a:p>
             <a:fld id="{B6F15528-21DE-4FAA-801E-634DDDAF4B2B}" type="slidenum">
-              <a:t>‹Nº›</a:t>
+              <a:t>‹N›</a:t>
             </a:fld>
             <a:endParaRPr/>
           </a:p>
@@ -1668,10 +1668,10 @@
           <p:nvPr userDrawn="1"/>
         </p:nvPicPr>
         <p:blipFill>
-          <a:blip>
+          <a:blip r:embed="rId3">
             <a:extLst>
               <a:ext uri="{96DAC541-7B7A-43D3-8B79-37D633B846F1}">
-                <asvg:svgBlip xmlns:asvg="http://schemas.microsoft.com/office/drawing/2016/SVG/main" r:embed="rId3"/>
+                <asvg:svgBlip xmlns:asvg="http://schemas.microsoft.com/office/drawing/2016/SVG/main" r:embed="rId4"/>
               </a:ext>
             </a:extLst>
           </a:blip>
@@ -1811,7 +1811,7 @@
           </a:lstStyle>
           <a:p>
             <a:fld id="{B6F15528-21DE-4FAA-801E-634DDDAF4B2B}" type="slidenum">
-              <a:t>‹Nº›</a:t>
+              <a:t>‹N›</a:t>
             </a:fld>
             <a:endParaRPr/>
           </a:p>
@@ -1832,10 +1832,10 @@
           <p:nvPr userDrawn="1"/>
         </p:nvPicPr>
         <p:blipFill>
-          <a:blip>
+          <a:blip r:embed="rId3">
             <a:extLst>
               <a:ext uri="{96DAC541-7B7A-43D3-8B79-37D633B846F1}">
-                <asvg:svgBlip xmlns:asvg="http://schemas.microsoft.com/office/drawing/2016/SVG/main" r:embed="rId3"/>
+                <asvg:svgBlip xmlns:asvg="http://schemas.microsoft.com/office/drawing/2016/SVG/main" r:embed="rId4"/>
               </a:ext>
             </a:extLst>
           </a:blip>
@@ -2214,7 +2214,7 @@
             <a:fld id="{C2F52289-4012-4053-9770-FE82CEB9514F}" type="slidenum">
               <a:rPr lang="en-US" smtClean="0"/>
               <a:pPr/>
-              <a:t>‹Nº›</a:t>
+              <a:t>‹N›</a:t>
             </a:fld>
             <a:endParaRPr lang="en-US" dirty="0"/>
           </a:p>
@@ -2501,7 +2501,7 @@
           </a:lstStyle>
           <a:p>
             <a:fld id="{B6F15528-21DE-4FAA-801E-634DDDAF4B2B}" type="slidenum">
-              <a:t>‹Nº›</a:t>
+              <a:t>‹N›</a:t>
             </a:fld>
             <a:endParaRPr/>
           </a:p>
@@ -2865,34 +2865,6 @@
       </p:grpSpPr>
       <p:sp>
         <p:nvSpPr>
-          <p:cNvPr id="5" name="Marcador de pie de página 4">
-            <a:extLst>
-              <a:ext uri="{FF2B5EF4-FFF2-40B4-BE49-F238E27FC236}">
-                <a16:creationId xmlns:a16="http://schemas.microsoft.com/office/drawing/2014/main" id="{F929251A-3DC4-36B2-3FB3-341378364BED}"/>
-              </a:ext>
-            </a:extLst>
-          </p:cNvPr>
-          <p:cNvSpPr>
-            <a:spLocks noGrp="1"/>
-          </p:cNvSpPr>
-          <p:nvPr>
-            <p:ph type="ftr" sz="quarter" idx="5"/>
-          </p:nvPr>
-        </p:nvSpPr>
-        <p:spPr/>
-        <p:txBody>
-          <a:bodyPr/>
-          <a:lstStyle/>
-          <a:p>
-            <a:r>
-              <a:rPr lang="en-US"/>
-              <a:t>LAB 3.0. CIRCUITS &amp; COMPACT MODELS</a:t>
-            </a:r>
-          </a:p>
-        </p:txBody>
-      </p:sp>
-      <p:sp>
-        <p:nvSpPr>
           <p:cNvPr id="6" name="Marcador de número de diapositiva 5">
             <a:extLst>
               <a:ext uri="{FF2B5EF4-FFF2-40B4-BE49-F238E27FC236}">
@@ -2918,603 +2890,6 @@
               <a:t>10</a:t>
             </a:fld>
             <a:endParaRPr lang="en-US" dirty="0"/>
-          </a:p>
-        </p:txBody>
-      </p:sp>
-      <p:sp>
-        <p:nvSpPr>
-          <p:cNvPr id="8" name="CuadroTexto 7">
-            <a:extLst>
-              <a:ext uri="{FF2B5EF4-FFF2-40B4-BE49-F238E27FC236}">
-                <a16:creationId xmlns:a16="http://schemas.microsoft.com/office/drawing/2014/main" id="{D9601617-351E-AE1A-1F4D-693F2EA59361}"/>
-              </a:ext>
-            </a:extLst>
-          </p:cNvPr>
-          <p:cNvSpPr txBox="1"/>
-          <p:nvPr/>
-        </p:nvSpPr>
-        <p:spPr>
-          <a:xfrm>
-            <a:off x="611029" y="4860335"/>
-            <a:ext cx="11199530" cy="830997"/>
-          </a:xfrm>
-          <a:prstGeom prst="rect">
-            <a:avLst/>
-          </a:prstGeom>
-          <a:solidFill>
-            <a:schemeClr val="bg1">
-              <a:lumMod val="95000"/>
-            </a:schemeClr>
-          </a:solidFill>
-          <a:ln w="28575">
-            <a:solidFill>
-              <a:srgbClr val="E0700D"/>
-            </a:solidFill>
-          </a:ln>
-        </p:spPr>
-        <p:txBody>
-          <a:bodyPr wrap="square" rtlCol="0">
-            <a:spAutoFit/>
-          </a:bodyPr>
-          <a:lstStyle/>
-          <a:p>
-            <a:pPr algn="just"/>
-            <a:r>
-              <a:rPr lang="en-US" sz="1200" dirty="0">
-                <a:latin typeface="Arial" panose="020B0604020202020204" pitchFamily="34" charset="0"/>
-                <a:cs typeface="Arial" panose="020B0604020202020204" pitchFamily="34" charset="0"/>
-              </a:rPr>
-              <a:t>Comment results. Try to classify the resonances, in which case are you close to critical coupling? Why?</a:t>
-            </a:r>
-          </a:p>
-          <a:p>
-            <a:pPr algn="just"/>
-            <a:endParaRPr lang="en-US" sz="1200" dirty="0">
-              <a:latin typeface="Arial" panose="020B0604020202020204" pitchFamily="34" charset="0"/>
-              <a:cs typeface="Arial" panose="020B0604020202020204" pitchFamily="34" charset="0"/>
-            </a:endParaRPr>
-          </a:p>
-          <a:p>
-            <a:pPr algn="just"/>
-            <a:endParaRPr lang="en-US" sz="1200" dirty="0">
-              <a:latin typeface="Arial" panose="020B0604020202020204" pitchFamily="34" charset="0"/>
-              <a:cs typeface="Arial" panose="020B0604020202020204" pitchFamily="34" charset="0"/>
-            </a:endParaRPr>
-          </a:p>
-          <a:p>
-            <a:pPr algn="just"/>
-            <a:endParaRPr lang="en-US" sz="1200" dirty="0">
-              <a:latin typeface="Arial" panose="020B0604020202020204" pitchFamily="34" charset="0"/>
-              <a:cs typeface="Arial" panose="020B0604020202020204" pitchFamily="34" charset="0"/>
-            </a:endParaRPr>
-          </a:p>
-        </p:txBody>
-      </p:sp>
-      <p:sp>
-        <p:nvSpPr>
-          <p:cNvPr id="11" name="Rectángulo 10">
-            <a:extLst>
-              <a:ext uri="{FF2B5EF4-FFF2-40B4-BE49-F238E27FC236}">
-                <a16:creationId xmlns:a16="http://schemas.microsoft.com/office/drawing/2014/main" id="{B811A5F9-C0B5-716C-70FB-9472E1BC2CD3}"/>
-              </a:ext>
-            </a:extLst>
-          </p:cNvPr>
-          <p:cNvSpPr/>
-          <p:nvPr/>
-        </p:nvSpPr>
-        <p:spPr>
-          <a:xfrm>
-            <a:off x="611030" y="1418373"/>
-            <a:ext cx="2538552" cy="3306028"/>
-          </a:xfrm>
-          <a:prstGeom prst="rect">
-            <a:avLst/>
-          </a:prstGeom>
-          <a:noFill/>
-          <a:ln w="28575">
-            <a:solidFill>
-              <a:srgbClr val="E0700D"/>
-            </a:solidFill>
-          </a:ln>
-        </p:spPr>
-        <p:style>
-          <a:lnRef idx="2">
-            <a:schemeClr val="accent1">
-              <a:shade val="15000"/>
-            </a:schemeClr>
-          </a:lnRef>
-          <a:fillRef idx="1">
-            <a:schemeClr val="accent1"/>
-          </a:fillRef>
-          <a:effectRef idx="0">
-            <a:schemeClr val="accent1"/>
-          </a:effectRef>
-          <a:fontRef idx="minor">
-            <a:schemeClr val="lt1"/>
-          </a:fontRef>
-        </p:style>
-        <p:txBody>
-          <a:bodyPr rtlCol="0" anchor="ctr"/>
-          <a:lstStyle/>
-          <a:p>
-            <a:pPr algn="ctr"/>
-            <a:endParaRPr lang="en-US"/>
-          </a:p>
-        </p:txBody>
-      </p:sp>
-      <p:sp>
-        <p:nvSpPr>
-          <p:cNvPr id="14" name="Rectángulo 13">
-            <a:extLst>
-              <a:ext uri="{FF2B5EF4-FFF2-40B4-BE49-F238E27FC236}">
-                <a16:creationId xmlns:a16="http://schemas.microsoft.com/office/drawing/2014/main" id="{6AA857E7-5C39-DCE1-10B5-40300FCF4B26}"/>
-              </a:ext>
-            </a:extLst>
-          </p:cNvPr>
-          <p:cNvSpPr/>
-          <p:nvPr/>
-        </p:nvSpPr>
-        <p:spPr>
-          <a:xfrm>
-            <a:off x="3277315" y="1419036"/>
-            <a:ext cx="2538552" cy="3306028"/>
-          </a:xfrm>
-          <a:prstGeom prst="rect">
-            <a:avLst/>
-          </a:prstGeom>
-          <a:noFill/>
-          <a:ln w="28575">
-            <a:solidFill>
-              <a:srgbClr val="E0700D"/>
-            </a:solidFill>
-          </a:ln>
-        </p:spPr>
-        <p:style>
-          <a:lnRef idx="2">
-            <a:schemeClr val="accent1">
-              <a:shade val="15000"/>
-            </a:schemeClr>
-          </a:lnRef>
-          <a:fillRef idx="1">
-            <a:schemeClr val="accent1"/>
-          </a:fillRef>
-          <a:effectRef idx="0">
-            <a:schemeClr val="accent1"/>
-          </a:effectRef>
-          <a:fontRef idx="minor">
-            <a:schemeClr val="lt1"/>
-          </a:fontRef>
-        </p:style>
-        <p:txBody>
-          <a:bodyPr rtlCol="0" anchor="ctr"/>
-          <a:lstStyle/>
-          <a:p>
-            <a:pPr algn="ctr"/>
-            <a:endParaRPr lang="en-US"/>
-          </a:p>
-        </p:txBody>
-      </p:sp>
-      <p:sp>
-        <p:nvSpPr>
-          <p:cNvPr id="15" name="CuadroTexto 14">
-            <a:extLst>
-              <a:ext uri="{FF2B5EF4-FFF2-40B4-BE49-F238E27FC236}">
-                <a16:creationId xmlns:a16="http://schemas.microsoft.com/office/drawing/2014/main" id="{54CF28B4-1346-F41D-2CD8-EA104ABBFB98}"/>
-              </a:ext>
-            </a:extLst>
-          </p:cNvPr>
-          <p:cNvSpPr txBox="1"/>
-          <p:nvPr/>
-        </p:nvSpPr>
-        <p:spPr>
-          <a:xfrm>
-            <a:off x="863650" y="2101891"/>
-            <a:ext cx="2033313" cy="1938992"/>
-          </a:xfrm>
-          <a:prstGeom prst="rect">
-            <a:avLst/>
-          </a:prstGeom>
-          <a:noFill/>
-        </p:spPr>
-        <p:txBody>
-          <a:bodyPr wrap="none" rtlCol="0">
-            <a:spAutoFit/>
-          </a:bodyPr>
-          <a:lstStyle/>
-          <a:p>
-            <a:pPr algn="ctr"/>
-            <a:r>
-              <a:rPr lang="es-ES" sz="2000" dirty="0"/>
-              <a:t>Single ring</a:t>
-            </a:r>
-          </a:p>
-          <a:p>
-            <a:pPr algn="ctr"/>
-            <a:r>
-              <a:rPr lang="es-ES" sz="2000" dirty="0"/>
-              <a:t>transfer </a:t>
-            </a:r>
-            <a:r>
-              <a:rPr lang="es-ES" sz="2000" dirty="0" err="1"/>
-              <a:t>functions</a:t>
-            </a:r>
-            <a:endParaRPr lang="es-ES" sz="2000" dirty="0"/>
-          </a:p>
-          <a:p>
-            <a:pPr algn="ctr"/>
-            <a:endParaRPr lang="es-ES" sz="2000" dirty="0"/>
-          </a:p>
-          <a:p>
-            <a:pPr algn="ctr"/>
-            <a:r>
-              <a:rPr lang="es-ES" sz="2000" dirty="0"/>
-              <a:t>Linear </a:t>
-            </a:r>
-            <a:r>
-              <a:rPr lang="es-ES" sz="2000" dirty="0" err="1"/>
-              <a:t>units</a:t>
-            </a:r>
-            <a:endParaRPr lang="es-ES" sz="2000" dirty="0"/>
-          </a:p>
-          <a:p>
-            <a:pPr algn="ctr"/>
-            <a:endParaRPr lang="es-ES" sz="2000" dirty="0"/>
-          </a:p>
-          <a:p>
-            <a:pPr algn="ctr"/>
-            <a:r>
-              <a:rPr lang="es-ES" sz="2000" dirty="0" err="1"/>
-              <a:t>alpha</a:t>
-            </a:r>
-            <a:r>
-              <a:rPr lang="es-ES" sz="2000" dirty="0"/>
-              <a:t>=0 dB/cm</a:t>
-            </a:r>
-            <a:endParaRPr lang="en-US" sz="2000" dirty="0"/>
-          </a:p>
-        </p:txBody>
-      </p:sp>
-      <p:sp>
-        <p:nvSpPr>
-          <p:cNvPr id="9" name="Rectángulo 8">
-            <a:extLst>
-              <a:ext uri="{FF2B5EF4-FFF2-40B4-BE49-F238E27FC236}">
-                <a16:creationId xmlns:a16="http://schemas.microsoft.com/office/drawing/2014/main" id="{11F0F5FC-B571-59FC-7890-3105A6A843BB}"/>
-              </a:ext>
-            </a:extLst>
-          </p:cNvPr>
-          <p:cNvSpPr/>
-          <p:nvPr/>
-        </p:nvSpPr>
-        <p:spPr>
-          <a:xfrm>
-            <a:off x="5943600" y="1418373"/>
-            <a:ext cx="2538552" cy="3306028"/>
-          </a:xfrm>
-          <a:prstGeom prst="rect">
-            <a:avLst/>
-          </a:prstGeom>
-          <a:noFill/>
-          <a:ln w="28575">
-            <a:solidFill>
-              <a:srgbClr val="E0700D"/>
-            </a:solidFill>
-          </a:ln>
-        </p:spPr>
-        <p:style>
-          <a:lnRef idx="2">
-            <a:schemeClr val="accent1">
-              <a:shade val="15000"/>
-            </a:schemeClr>
-          </a:lnRef>
-          <a:fillRef idx="1">
-            <a:schemeClr val="accent1"/>
-          </a:fillRef>
-          <a:effectRef idx="0">
-            <a:schemeClr val="accent1"/>
-          </a:effectRef>
-          <a:fontRef idx="minor">
-            <a:schemeClr val="lt1"/>
-          </a:fontRef>
-        </p:style>
-        <p:txBody>
-          <a:bodyPr rtlCol="0" anchor="ctr"/>
-          <a:lstStyle/>
-          <a:p>
-            <a:pPr algn="ctr"/>
-            <a:endParaRPr lang="en-US"/>
-          </a:p>
-        </p:txBody>
-      </p:sp>
-      <p:sp>
-        <p:nvSpPr>
-          <p:cNvPr id="10" name="CuadroTexto 9">
-            <a:extLst>
-              <a:ext uri="{FF2B5EF4-FFF2-40B4-BE49-F238E27FC236}">
-                <a16:creationId xmlns:a16="http://schemas.microsoft.com/office/drawing/2014/main" id="{3146642F-220B-8F6A-59A8-2D128DDF3BEB}"/>
-              </a:ext>
-            </a:extLst>
-          </p:cNvPr>
-          <p:cNvSpPr txBox="1"/>
-          <p:nvPr/>
-        </p:nvSpPr>
-        <p:spPr>
-          <a:xfrm>
-            <a:off x="3529935" y="2104638"/>
-            <a:ext cx="2033313" cy="1938992"/>
-          </a:xfrm>
-          <a:prstGeom prst="rect">
-            <a:avLst/>
-          </a:prstGeom>
-          <a:noFill/>
-        </p:spPr>
-        <p:txBody>
-          <a:bodyPr wrap="none" rtlCol="0">
-            <a:spAutoFit/>
-          </a:bodyPr>
-          <a:lstStyle/>
-          <a:p>
-            <a:pPr algn="ctr"/>
-            <a:r>
-              <a:rPr lang="es-ES" sz="2000" dirty="0"/>
-              <a:t>Single ring</a:t>
-            </a:r>
-          </a:p>
-          <a:p>
-            <a:pPr algn="ctr"/>
-            <a:r>
-              <a:rPr lang="es-ES" sz="2000" dirty="0"/>
-              <a:t>transfer </a:t>
-            </a:r>
-            <a:r>
-              <a:rPr lang="es-ES" sz="2000" dirty="0" err="1"/>
-              <a:t>functions</a:t>
-            </a:r>
-            <a:endParaRPr lang="es-ES" sz="2000" dirty="0"/>
-          </a:p>
-          <a:p>
-            <a:pPr algn="ctr"/>
-            <a:endParaRPr lang="es-ES" sz="2000" dirty="0"/>
-          </a:p>
-          <a:p>
-            <a:pPr algn="ctr"/>
-            <a:r>
-              <a:rPr lang="es-ES" sz="2000" dirty="0"/>
-              <a:t>Linear </a:t>
-            </a:r>
-            <a:r>
-              <a:rPr lang="es-ES" sz="2000" dirty="0" err="1"/>
-              <a:t>units</a:t>
-            </a:r>
-            <a:endParaRPr lang="es-ES" sz="2000" dirty="0"/>
-          </a:p>
-          <a:p>
-            <a:pPr algn="ctr"/>
-            <a:endParaRPr lang="es-ES" sz="2000" dirty="0"/>
-          </a:p>
-          <a:p>
-            <a:pPr algn="ctr"/>
-            <a:r>
-              <a:rPr lang="es-ES" sz="2000" dirty="0" err="1"/>
-              <a:t>alpha</a:t>
-            </a:r>
-            <a:r>
-              <a:rPr lang="es-ES" sz="2000" dirty="0"/>
-              <a:t>=1 dB/cm</a:t>
-            </a:r>
-            <a:endParaRPr lang="en-US" sz="2000" dirty="0"/>
-          </a:p>
-        </p:txBody>
-      </p:sp>
-      <p:sp>
-        <p:nvSpPr>
-          <p:cNvPr id="13" name="CuadroTexto 12">
-            <a:extLst>
-              <a:ext uri="{FF2B5EF4-FFF2-40B4-BE49-F238E27FC236}">
-                <a16:creationId xmlns:a16="http://schemas.microsoft.com/office/drawing/2014/main" id="{057C499E-829F-FB11-9128-843C937CB822}"/>
-              </a:ext>
-            </a:extLst>
-          </p:cNvPr>
-          <p:cNvSpPr txBox="1"/>
-          <p:nvPr/>
-        </p:nvSpPr>
-        <p:spPr>
-          <a:xfrm>
-            <a:off x="6195187" y="2101891"/>
-            <a:ext cx="2033313" cy="1938992"/>
-          </a:xfrm>
-          <a:prstGeom prst="rect">
-            <a:avLst/>
-          </a:prstGeom>
-          <a:noFill/>
-        </p:spPr>
-        <p:txBody>
-          <a:bodyPr wrap="none" rtlCol="0">
-            <a:spAutoFit/>
-          </a:bodyPr>
-          <a:lstStyle/>
-          <a:p>
-            <a:pPr algn="ctr"/>
-            <a:r>
-              <a:rPr lang="es-ES" sz="2000" dirty="0"/>
-              <a:t>Single ring</a:t>
-            </a:r>
-          </a:p>
-          <a:p>
-            <a:pPr algn="ctr"/>
-            <a:r>
-              <a:rPr lang="es-ES" sz="2000" dirty="0"/>
-              <a:t>transfer </a:t>
-            </a:r>
-            <a:r>
-              <a:rPr lang="es-ES" sz="2000" dirty="0" err="1"/>
-              <a:t>functions</a:t>
-            </a:r>
-            <a:endParaRPr lang="es-ES" sz="2000" dirty="0"/>
-          </a:p>
-          <a:p>
-            <a:pPr algn="ctr"/>
-            <a:endParaRPr lang="es-ES" sz="2000" dirty="0"/>
-          </a:p>
-          <a:p>
-            <a:pPr algn="ctr"/>
-            <a:r>
-              <a:rPr lang="es-ES" sz="2000" dirty="0"/>
-              <a:t>Linear </a:t>
-            </a:r>
-            <a:r>
-              <a:rPr lang="es-ES" sz="2000" dirty="0" err="1"/>
-              <a:t>units</a:t>
-            </a:r>
-            <a:endParaRPr lang="es-ES" sz="2000" dirty="0"/>
-          </a:p>
-          <a:p>
-            <a:pPr algn="ctr"/>
-            <a:endParaRPr lang="es-ES" sz="2000" dirty="0"/>
-          </a:p>
-          <a:p>
-            <a:pPr algn="ctr"/>
-            <a:r>
-              <a:rPr lang="es-ES" sz="2000" dirty="0" err="1"/>
-              <a:t>alpha</a:t>
-            </a:r>
-            <a:r>
-              <a:rPr lang="es-ES" sz="2000" dirty="0"/>
-              <a:t>=2 dB/cm</a:t>
-            </a:r>
-            <a:endParaRPr lang="en-US" sz="2000" dirty="0"/>
-          </a:p>
-        </p:txBody>
-      </p:sp>
-      <p:sp>
-        <p:nvSpPr>
-          <p:cNvPr id="12" name="Rectángulo 11">
-            <a:extLst>
-              <a:ext uri="{FF2B5EF4-FFF2-40B4-BE49-F238E27FC236}">
-                <a16:creationId xmlns:a16="http://schemas.microsoft.com/office/drawing/2014/main" id="{D9D5941A-D9F5-22E7-7E85-0D04C2B214EC}"/>
-              </a:ext>
-            </a:extLst>
-          </p:cNvPr>
-          <p:cNvSpPr/>
-          <p:nvPr/>
-        </p:nvSpPr>
-        <p:spPr>
-          <a:xfrm>
-            <a:off x="8609885" y="1418373"/>
-            <a:ext cx="2538552" cy="3306028"/>
-          </a:xfrm>
-          <a:prstGeom prst="rect">
-            <a:avLst/>
-          </a:prstGeom>
-          <a:noFill/>
-          <a:ln w="28575">
-            <a:solidFill>
-              <a:srgbClr val="E0700D"/>
-            </a:solidFill>
-          </a:ln>
-        </p:spPr>
-        <p:style>
-          <a:lnRef idx="2">
-            <a:schemeClr val="accent1">
-              <a:shade val="15000"/>
-            </a:schemeClr>
-          </a:lnRef>
-          <a:fillRef idx="1">
-            <a:schemeClr val="accent1"/>
-          </a:fillRef>
-          <a:effectRef idx="0">
-            <a:schemeClr val="accent1"/>
-          </a:effectRef>
-          <a:fontRef idx="minor">
-            <a:schemeClr val="lt1"/>
-          </a:fontRef>
-        </p:style>
-        <p:txBody>
-          <a:bodyPr rtlCol="0" anchor="ctr"/>
-          <a:lstStyle/>
-          <a:p>
-            <a:pPr algn="ctr"/>
-            <a:endParaRPr lang="en-US"/>
-          </a:p>
-        </p:txBody>
-      </p:sp>
-      <p:sp>
-        <p:nvSpPr>
-          <p:cNvPr id="16" name="CuadroTexto 15">
-            <a:extLst>
-              <a:ext uri="{FF2B5EF4-FFF2-40B4-BE49-F238E27FC236}">
-                <a16:creationId xmlns:a16="http://schemas.microsoft.com/office/drawing/2014/main" id="{4A6C8490-F65B-32C9-44E8-9A1A1A1B1769}"/>
-              </a:ext>
-            </a:extLst>
-          </p:cNvPr>
-          <p:cNvSpPr txBox="1"/>
-          <p:nvPr/>
-        </p:nvSpPr>
-        <p:spPr>
-          <a:xfrm>
-            <a:off x="8861472" y="2101891"/>
-            <a:ext cx="2033313" cy="1938992"/>
-          </a:xfrm>
-          <a:prstGeom prst="rect">
-            <a:avLst/>
-          </a:prstGeom>
-          <a:noFill/>
-        </p:spPr>
-        <p:txBody>
-          <a:bodyPr wrap="none" rtlCol="0">
-            <a:spAutoFit/>
-          </a:bodyPr>
-          <a:lstStyle/>
-          <a:p>
-            <a:pPr algn="ctr"/>
-            <a:r>
-              <a:rPr lang="es-ES" sz="2000" dirty="0"/>
-              <a:t>Single ring</a:t>
-            </a:r>
-          </a:p>
-          <a:p>
-            <a:pPr algn="ctr"/>
-            <a:r>
-              <a:rPr lang="es-ES" sz="2000" dirty="0"/>
-              <a:t>transfer </a:t>
-            </a:r>
-            <a:r>
-              <a:rPr lang="es-ES" sz="2000" dirty="0" err="1"/>
-              <a:t>functions</a:t>
-            </a:r>
-            <a:endParaRPr lang="es-ES" sz="2000" dirty="0"/>
-          </a:p>
-          <a:p>
-            <a:pPr algn="ctr"/>
-            <a:endParaRPr lang="es-ES" sz="2000" dirty="0"/>
-          </a:p>
-          <a:p>
-            <a:pPr algn="ctr"/>
-            <a:r>
-              <a:rPr lang="es-ES" sz="2000" dirty="0"/>
-              <a:t>Linear </a:t>
-            </a:r>
-            <a:r>
-              <a:rPr lang="es-ES" sz="2000" dirty="0" err="1"/>
-              <a:t>units</a:t>
-            </a:r>
-            <a:endParaRPr lang="es-ES" sz="2000" dirty="0"/>
-          </a:p>
-          <a:p>
-            <a:pPr algn="ctr"/>
-            <a:endParaRPr lang="es-ES" sz="2000" dirty="0"/>
-          </a:p>
-          <a:p>
-            <a:pPr algn="ctr"/>
-            <a:r>
-              <a:rPr lang="es-ES" sz="2000" dirty="0" err="1"/>
-              <a:t>alpha</a:t>
-            </a:r>
-            <a:r>
-              <a:rPr lang="es-ES" sz="2000" dirty="0"/>
-              <a:t>=2 dB/cm</a:t>
-            </a:r>
-            <a:endParaRPr lang="en-US" sz="2000" dirty="0"/>
           </a:p>
         </p:txBody>
       </p:sp>
@@ -3533,10 +2908,10 @@
           <p:nvPr/>
         </p:nvPicPr>
         <p:blipFill>
-          <a:blip>
+          <a:blip r:embed="rId2">
             <a:extLst>
               <a:ext uri="{96DAC541-7B7A-43D3-8B79-37D633B846F1}">
-                <asvg:svgBlip xmlns:asvg="http://schemas.microsoft.com/office/drawing/2016/SVG/main" r:embed="rId2"/>
+                <asvg:svgBlip xmlns:asvg="http://schemas.microsoft.com/office/drawing/2016/SVG/main" r:embed="rId3"/>
               </a:ext>
             </a:extLst>
           </a:blip>
@@ -3570,7 +2945,7 @@
         </p:nvSpPr>
         <p:spPr>
           <a:xfrm>
-            <a:off x="685800" y="408883"/>
+            <a:off x="228600" y="28575"/>
             <a:ext cx="10994410" cy="718145"/>
           </a:xfrm>
           <a:prstGeom prst="rect">
@@ -3616,14 +2991,14 @@
               </a:spcBef>
             </a:pPr>
             <a:r>
-              <a:rPr lang="en-US" b="0" kern="0" spc="-5" dirty="0">
+              <a:rPr lang="en-US" sz="1400" b="0" kern="0" spc="-5" dirty="0">
                 <a:latin typeface="+mj-lt"/>
                 <a:cs typeface="Lucida Sans"/>
               </a:rPr>
               <a:t>Change losses value between 0 and 8 </a:t>
             </a:r>
             <a:r>
-              <a:rPr lang="en-US" b="0" kern="0" spc="-5" dirty="0">
+              <a:rPr lang="en-US" sz="1400" b="0" kern="0" spc="-5" dirty="0">
                 <a:solidFill>
                   <a:srgbClr val="FF0000"/>
                 </a:solidFill>
@@ -3633,15 +3008,87 @@
               <a:t>dB/cm </a:t>
             </a:r>
             <a:r>
+              <a:rPr lang="en-US" sz="1400" b="0" kern="0" spc="-5" dirty="0">
+                <a:latin typeface="+mj-lt"/>
+                <a:cs typeface="Lucida Sans"/>
+              </a:rPr>
+              <a:t>in steps of </a:t>
+            </a:r>
+            <a:r>
               <a:rPr lang="en-US" b="0" kern="0" spc="-5" dirty="0">
                 <a:latin typeface="+mj-lt"/>
                 <a:cs typeface="Lucida Sans"/>
               </a:rPr>
-              <a:t>in steps of 1</a:t>
-            </a:r>
-          </a:p>
-        </p:txBody>
-      </p:sp>
+              <a:t>1</a:t>
+            </a:r>
+          </a:p>
+        </p:txBody>
+      </p:sp>
+      <p:sp>
+        <p:nvSpPr>
+          <p:cNvPr id="2" name="CasellaDiTesto 1">
+            <a:extLst>
+              <a:ext uri="{FF2B5EF4-FFF2-40B4-BE49-F238E27FC236}">
+                <a16:creationId xmlns:a16="http://schemas.microsoft.com/office/drawing/2014/main" id="{99E81F8C-070F-58B1-D462-83659682BFB0}"/>
+              </a:ext>
+            </a:extLst>
+          </p:cNvPr>
+          <p:cNvSpPr txBox="1"/>
+          <p:nvPr/>
+        </p:nvSpPr>
+        <p:spPr>
+          <a:xfrm>
+            <a:off x="1546180" y="1841118"/>
+            <a:ext cx="9099640" cy="1323439"/>
+          </a:xfrm>
+          <a:prstGeom prst="rect">
+            <a:avLst/>
+          </a:prstGeom>
+          <a:noFill/>
+        </p:spPr>
+        <p:txBody>
+          <a:bodyPr wrap="square" rtlCol="0">
+            <a:spAutoFit/>
+          </a:bodyPr>
+          <a:lstStyle/>
+          <a:p>
+            <a:r>
+              <a:rPr lang="en-US" sz="2000" u="sng" dirty="0"/>
+              <a:t>With K fixed at 0.04 and increasing loss from 4 to 8 dB per cm the dips get progressively deeper. This happens because higher loss pushes the critical coupling condition closer to the K value we are using. All cases are still over coupled but 8 dB per cm is the closest to critical coupling since its dip goes the lowest.</a:t>
+            </a:r>
+          </a:p>
+        </p:txBody>
+      </p:sp>
+      <p:pic>
+        <p:nvPicPr>
+          <p:cNvPr id="5" name="Immagine 4">
+            <a:extLst>
+              <a:ext uri="{FF2B5EF4-FFF2-40B4-BE49-F238E27FC236}">
+                <a16:creationId xmlns:a16="http://schemas.microsoft.com/office/drawing/2014/main" id="{CE38B15C-6A32-859B-F80E-F215A125200B}"/>
+              </a:ext>
+            </a:extLst>
+          </p:cNvPr>
+          <p:cNvPicPr>
+            <a:picLocks noChangeAspect="1"/>
+          </p:cNvPicPr>
+          <p:nvPr/>
+        </p:nvPicPr>
+        <p:blipFill>
+          <a:blip r:embed="rId4"/>
+          <a:stretch>
+            <a:fillRect/>
+          </a:stretch>
+        </p:blipFill>
+        <p:spPr>
+          <a:xfrm>
+            <a:off x="0" y="3693443"/>
+            <a:ext cx="12115800" cy="2101700"/>
+          </a:xfrm>
+          <a:prstGeom prst="rect">
+            <a:avLst/>
+          </a:prstGeom>
+        </p:spPr>
+      </p:pic>
     </p:spTree>
     <p:extLst>
       <p:ext uri="{BB962C8B-B14F-4D97-AF65-F5344CB8AC3E}">
@@ -3912,10 +3359,10 @@
           <p:nvPr/>
         </p:nvPicPr>
         <p:blipFill>
-          <a:blip>
+          <a:blip r:embed="rId2">
             <a:extLst>
               <a:ext uri="{96DAC541-7B7A-43D3-8B79-37D633B846F1}">
-                <asvg:svgBlip xmlns:asvg="http://schemas.microsoft.com/office/drawing/2016/SVG/main" r:embed="rId2"/>
+                <asvg:svgBlip xmlns:asvg="http://schemas.microsoft.com/office/drawing/2016/SVG/main" r:embed="rId3"/>
               </a:ext>
             </a:extLst>
           </a:blip>
@@ -4339,7 +3786,7 @@
           <p:nvPr/>
         </p:nvPicPr>
         <p:blipFill>
-          <a:blip r:embed="rId3" cstate="print">
+          <a:blip r:embed="rId4" cstate="print">
             <a:extLst>
               <a:ext uri="{28A0092B-C50C-407E-A947-70E740481C1C}">
                 <a14:useLocalDpi xmlns:a14="http://schemas.microsoft.com/office/drawing/2010/main" val="0"/>
@@ -4375,7 +3822,7 @@
           <p:nvPr/>
         </p:nvPicPr>
         <p:blipFill>
-          <a:blip r:embed="rId4" cstate="print">
+          <a:blip r:embed="rId5" cstate="print">
             <a:extLst>
               <a:ext uri="{28A0092B-C50C-407E-A947-70E740481C1C}">
                 <a14:useLocalDpi xmlns:a14="http://schemas.microsoft.com/office/drawing/2010/main" val="0"/>
@@ -4412,7 +3859,7 @@
           <p:nvPr/>
         </p:nvPicPr>
         <p:blipFill>
-          <a:blip r:embed="rId4" cstate="print">
+          <a:blip r:embed="rId5" cstate="print">
             <a:extLst>
               <a:ext uri="{28A0092B-C50C-407E-A947-70E740481C1C}">
                 <a14:useLocalDpi xmlns:a14="http://schemas.microsoft.com/office/drawing/2010/main" val="0"/>
@@ -4484,7 +3931,7 @@
         </p:nvSpPr>
         <p:spPr>
           <a:xfrm>
-            <a:off x="6476400" y="1418373"/>
+            <a:off x="6577605" y="1067653"/>
             <a:ext cx="5332571" cy="3306028"/>
           </a:xfrm>
           <a:prstGeom prst="rect">
@@ -4603,7 +4050,7 @@
         </p:nvSpPr>
         <p:spPr>
           <a:xfrm>
-            <a:off x="685800" y="408883"/>
+            <a:off x="685800" y="436935"/>
             <a:ext cx="10994410" cy="782265"/>
           </a:xfrm>
           <a:prstGeom prst="rect">
@@ -4656,10 +4103,10 @@
           <p:nvPr/>
         </p:nvPicPr>
         <p:blipFill>
-          <a:blip>
+          <a:blip r:embed="rId3">
             <a:extLst>
               <a:ext uri="{96DAC541-7B7A-43D3-8B79-37D633B846F1}">
-                <asvg:svgBlip xmlns:asvg="http://schemas.microsoft.com/office/drawing/2016/SVG/main" r:embed="rId3"/>
+                <asvg:svgBlip xmlns:asvg="http://schemas.microsoft.com/office/drawing/2016/SVG/main" r:embed="rId4"/>
               </a:ext>
             </a:extLst>
           </a:blip>
@@ -4756,7 +4203,7 @@
         </p:nvSpPr>
         <p:spPr>
           <a:xfrm>
-            <a:off x="6629399" y="1556991"/>
+            <a:off x="6631837" y="1307638"/>
             <a:ext cx="5050811" cy="2895600"/>
           </a:xfrm>
           <a:prstGeom prst="rect">
@@ -4974,7 +4421,7 @@
         <p:spPr>
           <a:xfrm>
             <a:off x="609441" y="4860334"/>
-            <a:ext cx="11199971" cy="1200329"/>
+            <a:ext cx="11199971" cy="1323439"/>
           </a:xfrm>
           <a:prstGeom prst="rect">
             <a:avLst/>
@@ -4998,11 +4445,25 @@
           <a:p>
             <a:pPr algn="just"/>
             <a:r>
-              <a:rPr lang="en-US" sz="1200" dirty="0">
+              <a:rPr lang="en-US" sz="1600" dirty="0">
                 <a:latin typeface="Arial" panose="020B0604020202020204" pitchFamily="34" charset="0"/>
                 <a:cs typeface="Arial" panose="020B0604020202020204" pitchFamily="34" charset="0"/>
               </a:rPr>
-              <a:t>Document and comment your results</a:t>
+              <a:t>if dL = 0 we have perfect destructive interference at the  output, due to the couplers being both symmetrical and introducing both a pi/2 phase shift. The resulting </a:t>
+            </a:r>
+            <a:r>
+              <a:rPr lang="en-US" sz="1600" dirty="0" err="1">
+                <a:latin typeface="Arial" panose="020B0604020202020204" pitchFamily="34" charset="0"/>
+                <a:cs typeface="Arial" panose="020B0604020202020204" pitchFamily="34" charset="0"/>
+              </a:rPr>
+              <a:t>overlapsing</a:t>
+            </a:r>
+            <a:r>
+              <a:rPr lang="en-US" sz="1600" dirty="0">
+                <a:latin typeface="Arial" panose="020B0604020202020204" pitchFamily="34" charset="0"/>
+                <a:cs typeface="Arial" panose="020B0604020202020204" pitchFamily="34" charset="0"/>
+              </a:rPr>
+              <a:t> signals are identical and out of phase</a:t>
             </a:r>
           </a:p>
           <a:p>
@@ -5032,65 +4493,6 @@
               <a:latin typeface="Arial" panose="020B0604020202020204" pitchFamily="34" charset="0"/>
               <a:cs typeface="Arial" panose="020B0604020202020204" pitchFamily="34" charset="0"/>
             </a:endParaRPr>
-          </a:p>
-          <a:p>
-            <a:pPr algn="just"/>
-            <a:endParaRPr lang="en-US" sz="1200" dirty="0">
-              <a:latin typeface="Arial" panose="020B0604020202020204" pitchFamily="34" charset="0"/>
-              <a:cs typeface="Arial" panose="020B0604020202020204" pitchFamily="34" charset="0"/>
-            </a:endParaRPr>
-          </a:p>
-        </p:txBody>
-      </p:sp>
-      <p:sp>
-        <p:nvSpPr>
-          <p:cNvPr id="6" name="Rectángulo 5">
-            <a:extLst>
-              <a:ext uri="{FF2B5EF4-FFF2-40B4-BE49-F238E27FC236}">
-                <a16:creationId xmlns:a16="http://schemas.microsoft.com/office/drawing/2014/main" id="{82AE4A84-532D-D50D-F368-79FF1C11E97A}"/>
-              </a:ext>
-            </a:extLst>
-          </p:cNvPr>
-          <p:cNvSpPr/>
-          <p:nvPr/>
-        </p:nvSpPr>
-        <p:spPr>
-          <a:xfrm>
-            <a:off x="609441" y="1418373"/>
-            <a:ext cx="5332571" cy="3306028"/>
-          </a:xfrm>
-          <a:prstGeom prst="rect">
-            <a:avLst/>
-          </a:prstGeom>
-          <a:noFill/>
-          <a:ln w="28575">
-            <a:solidFill>
-              <a:srgbClr val="E0700D"/>
-            </a:solidFill>
-          </a:ln>
-        </p:spPr>
-        <p:style>
-          <a:lnRef idx="2">
-            <a:schemeClr val="accent1">
-              <a:shade val="15000"/>
-            </a:schemeClr>
-          </a:lnRef>
-          <a:fillRef idx="1">
-            <a:schemeClr val="accent1"/>
-          </a:fillRef>
-          <a:effectRef idx="0">
-            <a:schemeClr val="accent1"/>
-          </a:effectRef>
-          <a:fontRef idx="minor">
-            <a:schemeClr val="lt1"/>
-          </a:fontRef>
-        </p:style>
-        <p:txBody>
-          <a:bodyPr rtlCol="0" anchor="ctr"/>
-          <a:lstStyle/>
-          <a:p>
-            <a:pPr algn="ctr"/>
-            <a:endParaRPr lang="en-US"/>
           </a:p>
         </p:txBody>
       </p:sp>
@@ -5146,6 +4548,36 @@
           </a:p>
         </p:txBody>
       </p:sp>
+      <p:pic>
+        <p:nvPicPr>
+          <p:cNvPr id="8" name="Immagine 7">
+            <a:extLst>
+              <a:ext uri="{FF2B5EF4-FFF2-40B4-BE49-F238E27FC236}">
+                <a16:creationId xmlns:a16="http://schemas.microsoft.com/office/drawing/2014/main" id="{6C4745E3-83EB-F6BC-35AE-91569C6161DB}"/>
+              </a:ext>
+            </a:extLst>
+          </p:cNvPr>
+          <p:cNvPicPr>
+            <a:picLocks noChangeAspect="1"/>
+          </p:cNvPicPr>
+          <p:nvPr/>
+        </p:nvPicPr>
+        <p:blipFill>
+          <a:blip r:embed="rId5"/>
+          <a:stretch>
+            <a:fillRect/>
+          </a:stretch>
+        </p:blipFill>
+        <p:spPr>
+          <a:xfrm>
+            <a:off x="519137" y="1108876"/>
+            <a:ext cx="5690289" cy="3188333"/>
+          </a:xfrm>
+          <a:prstGeom prst="rect">
+            <a:avLst/>
+          </a:prstGeom>
+        </p:spPr>
+      </p:pic>
     </p:spTree>
     <p:extLst>
       <p:ext uri="{BB962C8B-B14F-4D97-AF65-F5344CB8AC3E}">
@@ -5184,121 +4616,6 @@
       </p:grpSpPr>
       <p:sp>
         <p:nvSpPr>
-          <p:cNvPr id="5" name="Rectángulo 4">
-            <a:extLst>
-              <a:ext uri="{FF2B5EF4-FFF2-40B4-BE49-F238E27FC236}">
-                <a16:creationId xmlns:a16="http://schemas.microsoft.com/office/drawing/2014/main" id="{DA69D816-535A-F5EE-E106-BA148A1B2DF6}"/>
-              </a:ext>
-            </a:extLst>
-          </p:cNvPr>
-          <p:cNvSpPr/>
-          <p:nvPr/>
-        </p:nvSpPr>
-        <p:spPr>
-          <a:xfrm>
-            <a:off x="6476400" y="1418373"/>
-            <a:ext cx="5332571" cy="3306028"/>
-          </a:xfrm>
-          <a:prstGeom prst="rect">
-            <a:avLst/>
-          </a:prstGeom>
-          <a:solidFill>
-            <a:schemeClr val="bg1">
-              <a:lumMod val="95000"/>
-            </a:schemeClr>
-          </a:solidFill>
-          <a:ln w="28575">
-            <a:solidFill>
-              <a:srgbClr val="E0700D"/>
-            </a:solidFill>
-          </a:ln>
-        </p:spPr>
-        <p:style>
-          <a:lnRef idx="2">
-            <a:schemeClr val="accent1">
-              <a:shade val="15000"/>
-            </a:schemeClr>
-          </a:lnRef>
-          <a:fillRef idx="1">
-            <a:schemeClr val="accent1"/>
-          </a:fillRef>
-          <a:effectRef idx="0">
-            <a:schemeClr val="accent1"/>
-          </a:effectRef>
-          <a:fontRef idx="minor">
-            <a:schemeClr val="lt1"/>
-          </a:fontRef>
-        </p:style>
-        <p:txBody>
-          <a:bodyPr rtlCol="0" anchor="t" anchorCtr="0"/>
-          <a:lstStyle/>
-          <a:p>
-            <a:pPr algn="just"/>
-            <a:endParaRPr lang="en-US" sz="1600" dirty="0">
-              <a:solidFill>
-                <a:schemeClr val="tx1"/>
-              </a:solidFill>
-              <a:latin typeface="Arial" panose="020B0604020202020204" pitchFamily="34" charset="0"/>
-              <a:cs typeface="Arial" panose="020B0604020202020204" pitchFamily="34" charset="0"/>
-              <a:sym typeface="Wingdings" pitchFamily="2" charset="2"/>
-            </a:endParaRPr>
-          </a:p>
-          <a:p>
-            <a:pPr algn="just"/>
-            <a:endParaRPr lang="en-US" sz="1600" dirty="0">
-              <a:solidFill>
-                <a:schemeClr val="tx1"/>
-              </a:solidFill>
-              <a:latin typeface="Arial" panose="020B0604020202020204" pitchFamily="34" charset="0"/>
-              <a:cs typeface="Arial" panose="020B0604020202020204" pitchFamily="34" charset="0"/>
-              <a:sym typeface="Wingdings" pitchFamily="2" charset="2"/>
-            </a:endParaRPr>
-          </a:p>
-          <a:p>
-            <a:pPr algn="just"/>
-            <a:endParaRPr lang="en-US" sz="1600" dirty="0">
-              <a:solidFill>
-                <a:schemeClr val="tx1"/>
-              </a:solidFill>
-              <a:latin typeface="Arial" panose="020B0604020202020204" pitchFamily="34" charset="0"/>
-              <a:cs typeface="Arial" panose="020B0604020202020204" pitchFamily="34" charset="0"/>
-              <a:sym typeface="Wingdings" pitchFamily="2" charset="2"/>
-            </a:endParaRPr>
-          </a:p>
-          <a:p>
-            <a:pPr algn="just"/>
-            <a:endParaRPr lang="en-US" sz="1600" dirty="0">
-              <a:solidFill>
-                <a:schemeClr val="tx1"/>
-              </a:solidFill>
-              <a:latin typeface="Arial" panose="020B0604020202020204" pitchFamily="34" charset="0"/>
-              <a:cs typeface="Arial" panose="020B0604020202020204" pitchFamily="34" charset="0"/>
-            </a:endParaRPr>
-          </a:p>
-          <a:p>
-            <a:pPr algn="just"/>
-            <a:endParaRPr lang="en-US" sz="1600" dirty="0">
-              <a:solidFill>
-                <a:schemeClr val="tx1"/>
-              </a:solidFill>
-              <a:latin typeface="Arial" panose="020B0604020202020204" pitchFamily="34" charset="0"/>
-              <a:cs typeface="Arial" panose="020B0604020202020204" pitchFamily="34" charset="0"/>
-            </a:endParaRPr>
-          </a:p>
-          <a:p>
-            <a:pPr algn="just"/>
-            <a:endParaRPr lang="en-US" sz="1600" dirty="0">
-              <a:solidFill>
-                <a:schemeClr val="tx1"/>
-              </a:solidFill>
-              <a:latin typeface="Arial" panose="020B0604020202020204" pitchFamily="34" charset="0"/>
-              <a:cs typeface="Arial" panose="020B0604020202020204" pitchFamily="34" charset="0"/>
-            </a:endParaRPr>
-          </a:p>
-        </p:txBody>
-      </p:sp>
-      <p:sp>
-        <p:nvSpPr>
           <p:cNvPr id="16" name="object 16">
             <a:extLst>
               <a:ext uri="{FF2B5EF4-FFF2-40B4-BE49-F238E27FC236}">
@@ -5368,10 +4685,10 @@
           <p:nvPr/>
         </p:nvPicPr>
         <p:blipFill>
-          <a:blip>
+          <a:blip r:embed="rId3">
             <a:extLst>
               <a:ext uri="{96DAC541-7B7A-43D3-8B79-37D633B846F1}">
-                <asvg:svgBlip xmlns:asvg="http://schemas.microsoft.com/office/drawing/2016/SVG/main" r:embed="rId3"/>
+                <asvg:svgBlip xmlns:asvg="http://schemas.microsoft.com/office/drawing/2016/SVG/main" r:embed="rId4"/>
               </a:ext>
             </a:extLst>
           </a:blip>
@@ -5454,172 +4771,10 @@
       </p:sp>
       <p:sp>
         <p:nvSpPr>
-          <p:cNvPr id="4" name="Marcador de texto 2">
+          <p:cNvPr id="23" name="CasellaDiTesto 22">
             <a:extLst>
               <a:ext uri="{FF2B5EF4-FFF2-40B4-BE49-F238E27FC236}">
-                <a16:creationId xmlns:a16="http://schemas.microsoft.com/office/drawing/2014/main" id="{0E86A2CB-D14B-54A7-9376-DAE1E4FF0284}"/>
-              </a:ext>
-            </a:extLst>
-          </p:cNvPr>
-          <p:cNvSpPr txBox="1">
-            <a:spLocks/>
-          </p:cNvSpPr>
-          <p:nvPr/>
-        </p:nvSpPr>
-        <p:spPr>
-          <a:xfrm>
-            <a:off x="6629399" y="1556991"/>
-            <a:ext cx="5050811" cy="2895600"/>
-          </a:xfrm>
-          <a:prstGeom prst="rect">
-            <a:avLst/>
-          </a:prstGeom>
-        </p:spPr>
-        <p:txBody>
-          <a:bodyPr>
-            <a:normAutofit/>
-          </a:bodyPr>
-          <a:lstStyle>
-            <a:lvl1pPr marL="0">
-              <a:defRPr>
-                <a:latin typeface="+mn-lt"/>
-                <a:ea typeface="+mn-ea"/>
-                <a:cs typeface="+mn-cs"/>
-              </a:defRPr>
-            </a:lvl1pPr>
-            <a:lvl2pPr marL="457200">
-              <a:defRPr>
-                <a:latin typeface="+mn-lt"/>
-                <a:ea typeface="+mn-ea"/>
-                <a:cs typeface="+mn-cs"/>
-              </a:defRPr>
-            </a:lvl2pPr>
-            <a:lvl3pPr marL="914400">
-              <a:defRPr>
-                <a:latin typeface="+mn-lt"/>
-                <a:ea typeface="+mn-ea"/>
-                <a:cs typeface="+mn-cs"/>
-              </a:defRPr>
-            </a:lvl3pPr>
-            <a:lvl4pPr marL="1371600">
-              <a:defRPr>
-                <a:latin typeface="+mn-lt"/>
-                <a:ea typeface="+mn-ea"/>
-                <a:cs typeface="+mn-cs"/>
-              </a:defRPr>
-            </a:lvl4pPr>
-            <a:lvl5pPr marL="1828800">
-              <a:defRPr>
-                <a:latin typeface="+mn-lt"/>
-                <a:ea typeface="+mn-ea"/>
-                <a:cs typeface="+mn-cs"/>
-              </a:defRPr>
-            </a:lvl5pPr>
-            <a:lvl6pPr marL="2286000">
-              <a:defRPr>
-                <a:latin typeface="+mn-lt"/>
-                <a:ea typeface="+mn-ea"/>
-                <a:cs typeface="+mn-cs"/>
-              </a:defRPr>
-            </a:lvl6pPr>
-            <a:lvl7pPr marL="2743200">
-              <a:defRPr>
-                <a:latin typeface="+mn-lt"/>
-                <a:ea typeface="+mn-ea"/>
-                <a:cs typeface="+mn-cs"/>
-              </a:defRPr>
-            </a:lvl7pPr>
-            <a:lvl8pPr marL="3200400">
-              <a:defRPr>
-                <a:latin typeface="+mn-lt"/>
-                <a:ea typeface="+mn-ea"/>
-                <a:cs typeface="+mn-cs"/>
-              </a:defRPr>
-            </a:lvl8pPr>
-            <a:lvl9pPr marL="3657600">
-              <a:defRPr>
-                <a:latin typeface="+mn-lt"/>
-                <a:ea typeface="+mn-ea"/>
-                <a:cs typeface="+mn-cs"/>
-              </a:defRPr>
-            </a:lvl9pPr>
-          </a:lstStyle>
-          <a:p>
-            <a:pPr marL="0" indent="0">
-              <a:buNone/>
-            </a:pPr>
-            <a:r>
-              <a:rPr lang="es-ES" b="1" dirty="0"/>
-              <a:t>HINTS</a:t>
-            </a:r>
-            <a:r>
-              <a:rPr lang="en-US" b="1" dirty="0"/>
-              <a:t>: </a:t>
-            </a:r>
-          </a:p>
-          <a:p>
-            <a:pPr marL="0" indent="0" algn="just">
-              <a:buNone/>
-            </a:pPr>
-            <a:r>
-              <a:rPr lang="en-US" dirty="0" err="1"/>
-              <a:t>wvl</a:t>
-            </a:r>
-            <a:r>
-              <a:rPr lang="en-US" dirty="0"/>
-              <a:t> [1500-1600] step 0.001</a:t>
-            </a:r>
-          </a:p>
-          <a:p>
-            <a:pPr algn="just"/>
-            <a:r>
-              <a:rPr lang="en-US" dirty="0"/>
-              <a:t>dL = </a:t>
-            </a:r>
-            <a:r>
-              <a:rPr lang="en-US" dirty="0">
-                <a:latin typeface="Arial" panose="020B0604020202020204" pitchFamily="34" charset="0"/>
-                <a:cs typeface="Arial" panose="020B0604020202020204" pitchFamily="34" charset="0"/>
-                <a:sym typeface="Wingdings" pitchFamily="2" charset="2"/>
-              </a:rPr>
-              <a:t>100 µm</a:t>
-            </a:r>
-            <a:endParaRPr lang="en-US" dirty="0"/>
-          </a:p>
-          <a:p>
-            <a:pPr marL="0" indent="0" algn="just">
-              <a:buNone/>
-            </a:pPr>
-            <a:r>
-              <a:rPr lang="en-US" dirty="0"/>
-              <a:t>Kin = Kout = 0.5 for all </a:t>
-            </a:r>
-            <a:r>
-              <a:rPr lang="en-US" dirty="0" err="1"/>
-              <a:t>wvl</a:t>
-            </a:r>
-            <a:endParaRPr lang="en-US" dirty="0"/>
-          </a:p>
-          <a:p>
-            <a:pPr algn="just"/>
-            <a:endParaRPr lang="en-US" sz="2000" b="1" i="1" dirty="0"/>
-          </a:p>
-          <a:p>
-            <a:pPr algn="just"/>
-            <a:endParaRPr lang="en-US" sz="2000" kern="0" dirty="0">
-              <a:solidFill>
-                <a:sysClr val="windowText" lastClr="000000"/>
-              </a:solidFill>
-            </a:endParaRPr>
-          </a:p>
-        </p:txBody>
-      </p:sp>
-      <p:sp>
-        <p:nvSpPr>
-          <p:cNvPr id="2" name="CuadroTexto 1">
-            <a:extLst>
-              <a:ext uri="{FF2B5EF4-FFF2-40B4-BE49-F238E27FC236}">
-                <a16:creationId xmlns:a16="http://schemas.microsoft.com/office/drawing/2014/main" id="{50C41089-061E-9B39-3904-6F31AFE073B8}"/>
+                <a16:creationId xmlns:a16="http://schemas.microsoft.com/office/drawing/2014/main" id="{576235AD-7E79-59C6-C06F-2046D6D36D13}"/>
               </a:ext>
             </a:extLst>
           </p:cNvPr>
@@ -5628,22 +4783,13 @@
         </p:nvSpPr>
         <p:spPr>
           <a:xfrm>
-            <a:off x="609441" y="4860334"/>
-            <a:ext cx="11199971" cy="1200329"/>
+            <a:off x="8077200" y="838201"/>
+            <a:ext cx="3810000" cy="2308324"/>
           </a:xfrm>
           <a:prstGeom prst="rect">
             <a:avLst/>
           </a:prstGeom>
-          <a:solidFill>
-            <a:schemeClr val="bg1">
-              <a:lumMod val="95000"/>
-            </a:schemeClr>
-          </a:solidFill>
-          <a:ln w="28575">
-            <a:solidFill>
-              <a:srgbClr val="E0700D"/>
-            </a:solidFill>
-          </a:ln>
+          <a:noFill/>
         </p:spPr>
         <p:txBody>
           <a:bodyPr wrap="square" rtlCol="0">
@@ -5651,113 +4797,50 @@
           </a:bodyPr>
           <a:lstStyle/>
           <a:p>
-            <a:pPr algn="just"/>
-            <a:r>
-              <a:rPr lang="en-US" sz="1200" dirty="0">
-                <a:latin typeface="Arial" panose="020B0604020202020204" pitchFamily="34" charset="0"/>
-                <a:cs typeface="Arial" panose="020B0604020202020204" pitchFamily="34" charset="0"/>
-              </a:rPr>
-              <a:t>Comment results: describe the transfer function, which is the FSR? How is it related to the length difference among arms? </a:t>
-            </a:r>
-          </a:p>
-          <a:p>
-            <a:pPr algn="just"/>
-            <a:endParaRPr lang="en-US" sz="1200" dirty="0">
-              <a:latin typeface="Arial" panose="020B0604020202020204" pitchFamily="34" charset="0"/>
-              <a:cs typeface="Arial" panose="020B0604020202020204" pitchFamily="34" charset="0"/>
-            </a:endParaRPr>
-          </a:p>
-          <a:p>
-            <a:pPr algn="just"/>
-            <a:endParaRPr lang="en-US" sz="1200" dirty="0">
-              <a:latin typeface="Arial" panose="020B0604020202020204" pitchFamily="34" charset="0"/>
-              <a:cs typeface="Arial" panose="020B0604020202020204" pitchFamily="34" charset="0"/>
-            </a:endParaRPr>
-          </a:p>
-          <a:p>
-            <a:pPr algn="just"/>
-            <a:r>
-              <a:rPr lang="en-US" sz="1200" dirty="0">
-                <a:latin typeface="Arial" panose="020B0604020202020204" pitchFamily="34" charset="0"/>
-                <a:cs typeface="Arial" panose="020B0604020202020204" pitchFamily="34" charset="0"/>
-              </a:rPr>
-              <a:t>Show a numeric calculation of the FSR and length difference matching the results in the graph,</a:t>
-            </a:r>
-          </a:p>
-          <a:p>
-            <a:pPr algn="just"/>
-            <a:endParaRPr lang="en-US" sz="1200" dirty="0">
-              <a:latin typeface="Arial" panose="020B0604020202020204" pitchFamily="34" charset="0"/>
-              <a:cs typeface="Arial" panose="020B0604020202020204" pitchFamily="34" charset="0"/>
-            </a:endParaRPr>
-          </a:p>
-          <a:p>
-            <a:pPr algn="just"/>
-            <a:endParaRPr lang="en-US" sz="1200" dirty="0">
-              <a:latin typeface="Arial" panose="020B0604020202020204" pitchFamily="34" charset="0"/>
-              <a:cs typeface="Arial" panose="020B0604020202020204" pitchFamily="34" charset="0"/>
-            </a:endParaRPr>
-          </a:p>
-        </p:txBody>
-      </p:sp>
-      <p:sp>
-        <p:nvSpPr>
-          <p:cNvPr id="6" name="Rectángulo 5">
+            <a:r>
+              <a:rPr lang="en-US" dirty="0"/>
+              <a:t>Setting dL to 100 µm creates a path length difference that makes the phase shift depend on wavelength, so the output oscillates sinusoidally. H00 and H01 are always complementary. The FSR from the formula is about 5.72 nm and this matches what the plot shows.</a:t>
+            </a:r>
+            <a:endParaRPr lang="it-IT" dirty="0"/>
+          </a:p>
+        </p:txBody>
+      </p:sp>
+      <p:pic>
+        <p:nvPicPr>
+          <p:cNvPr id="12" name="Immagine 11">
             <a:extLst>
               <a:ext uri="{FF2B5EF4-FFF2-40B4-BE49-F238E27FC236}">
-                <a16:creationId xmlns:a16="http://schemas.microsoft.com/office/drawing/2014/main" id="{F95B976F-6522-EA3D-1323-5C97E9F88EDF}"/>
+                <a16:creationId xmlns:a16="http://schemas.microsoft.com/office/drawing/2014/main" id="{93B470A0-0FB0-08D9-5008-E634D172CE80}"/>
               </a:ext>
             </a:extLst>
           </p:cNvPr>
-          <p:cNvSpPr/>
+          <p:cNvPicPr>
+            <a:picLocks noChangeAspect="1"/>
+          </p:cNvPicPr>
           <p:nvPr/>
-        </p:nvSpPr>
-        <p:spPr>
-          <a:xfrm>
-            <a:off x="609441" y="1418373"/>
-            <a:ext cx="5332571" cy="3306028"/>
+        </p:nvPicPr>
+        <p:blipFill>
+          <a:blip r:embed="rId5"/>
+          <a:stretch>
+            <a:fillRect/>
+          </a:stretch>
+        </p:blipFill>
+        <p:spPr>
+          <a:xfrm>
+            <a:off x="357188" y="1716202"/>
+            <a:ext cx="7515225" cy="4114800"/>
           </a:xfrm>
           <a:prstGeom prst="rect">
             <a:avLst/>
           </a:prstGeom>
-          <a:noFill/>
-          <a:ln w="28575">
-            <a:solidFill>
-              <a:srgbClr val="E0700D"/>
-            </a:solidFill>
-          </a:ln>
-        </p:spPr>
-        <p:style>
-          <a:lnRef idx="2">
-            <a:schemeClr val="accent1">
-              <a:shade val="15000"/>
-            </a:schemeClr>
-          </a:lnRef>
-          <a:fillRef idx="1">
-            <a:schemeClr val="accent1"/>
-          </a:fillRef>
-          <a:effectRef idx="0">
-            <a:schemeClr val="accent1"/>
-          </a:effectRef>
-          <a:fontRef idx="minor">
-            <a:schemeClr val="lt1"/>
-          </a:fontRef>
-        </p:style>
-        <p:txBody>
-          <a:bodyPr rtlCol="0" anchor="ctr"/>
-          <a:lstStyle/>
-          <a:p>
-            <a:pPr algn="ctr"/>
-            <a:endParaRPr lang="en-US"/>
-          </a:p>
-        </p:txBody>
-      </p:sp>
-      <p:sp>
-        <p:nvSpPr>
-          <p:cNvPr id="7" name="CuadroTexto 6">
+        </p:spPr>
+      </p:pic>
+      <p:sp>
+        <p:nvSpPr>
+          <p:cNvPr id="17" name="CasellaDiTesto 16">
             <a:extLst>
               <a:ext uri="{FF2B5EF4-FFF2-40B4-BE49-F238E27FC236}">
-                <a16:creationId xmlns:a16="http://schemas.microsoft.com/office/drawing/2014/main" id="{8934523B-51D9-2926-EAC0-7EAD4D1D5B75}"/>
+                <a16:creationId xmlns:a16="http://schemas.microsoft.com/office/drawing/2014/main" id="{E4CBA4FB-F968-C7AF-C5D8-71900121EC43}"/>
               </a:ext>
             </a:extLst>
           </p:cNvPr>
@@ -5766,8 +4849,8 @@
         </p:nvSpPr>
         <p:spPr>
           <a:xfrm>
-            <a:off x="1690195" y="2494306"/>
-            <a:ext cx="3171061" cy="1154162"/>
+            <a:off x="8113426" y="3216272"/>
+            <a:ext cx="3480793" cy="1938992"/>
           </a:xfrm>
           <a:prstGeom prst="rect">
             <a:avLst/>
@@ -5775,31 +4858,56 @@
           <a:noFill/>
         </p:spPr>
         <p:txBody>
-          <a:bodyPr wrap="none" rtlCol="0">
+          <a:bodyPr wrap="square">
             <a:spAutoFit/>
           </a:bodyPr>
           <a:lstStyle/>
           <a:p>
-            <a:pPr algn="ctr"/>
-            <a:r>
-              <a:rPr lang="es-ES" dirty="0"/>
-              <a:t>MZI transfer </a:t>
-            </a:r>
-            <a:r>
-              <a:rPr lang="es-ES" dirty="0" err="1"/>
-              <a:t>functions</a:t>
-            </a:r>
-            <a:endParaRPr lang="en-US" dirty="0"/>
-          </a:p>
-          <a:p>
-            <a:pPr algn="ctr"/>
-            <a:endParaRPr lang="en-US" dirty="0"/>
-          </a:p>
-          <a:p>
-            <a:pPr algn="ctr"/>
-            <a:r>
-              <a:rPr lang="en-US" dirty="0"/>
-              <a:t>Paste plot here</a:t>
+            <a:pPr>
+              <a:buNone/>
+            </a:pPr>
+            <a:r>
+              <a:rPr lang="pt-BR" sz="2400" dirty="0">
+                <a:latin typeface="Arial" panose="020B0604020202020204" pitchFamily="34" charset="0"/>
+                <a:cs typeface="Arial" panose="020B0604020202020204" pitchFamily="34" charset="0"/>
+              </a:rPr>
+              <a:t>FSR = </a:t>
+            </a:r>
+          </a:p>
+          <a:p>
+            <a:pPr>
+              <a:buNone/>
+            </a:pPr>
+            <a:r>
+              <a:rPr lang="pt-BR" sz="2400" dirty="0">
+                <a:latin typeface="Arial" panose="020B0604020202020204" pitchFamily="34" charset="0"/>
+                <a:cs typeface="Arial" panose="020B0604020202020204" pitchFamily="34" charset="0"/>
+              </a:rPr>
+              <a:t>λ² / (n_g · L) = </a:t>
+            </a:r>
+          </a:p>
+          <a:p>
+            <a:pPr>
+              <a:buNone/>
+            </a:pPr>
+            <a:r>
+              <a:rPr lang="pt-BR" sz="2400" dirty="0">
+                <a:latin typeface="Arial" panose="020B0604020202020204" pitchFamily="34" charset="0"/>
+                <a:cs typeface="Arial" panose="020B0604020202020204" pitchFamily="34" charset="0"/>
+              </a:rPr>
+              <a:t>(1.55 µm)² / (2.0 · 50 µm) = </a:t>
+            </a:r>
+          </a:p>
+          <a:p>
+            <a:pPr>
+              <a:buNone/>
+            </a:pPr>
+            <a:r>
+              <a:rPr lang="pt-BR" sz="2400" dirty="0">
+                <a:latin typeface="Arial" panose="020B0604020202020204" pitchFamily="34" charset="0"/>
+                <a:cs typeface="Arial" panose="020B0604020202020204" pitchFamily="34" charset="0"/>
+              </a:rPr>
+              <a:t>24.025 nm</a:t>
             </a:r>
           </a:p>
         </p:txBody>
@@ -5836,34 +4944,6 @@
       </p:grpSpPr>
       <p:sp>
         <p:nvSpPr>
-          <p:cNvPr id="5" name="Marcador de pie de página 4">
-            <a:extLst>
-              <a:ext uri="{FF2B5EF4-FFF2-40B4-BE49-F238E27FC236}">
-                <a16:creationId xmlns:a16="http://schemas.microsoft.com/office/drawing/2014/main" id="{F929251A-3DC4-36B2-3FB3-341378364BED}"/>
-              </a:ext>
-            </a:extLst>
-          </p:cNvPr>
-          <p:cNvSpPr>
-            <a:spLocks noGrp="1"/>
-          </p:cNvSpPr>
-          <p:nvPr>
-            <p:ph type="ftr" sz="quarter" idx="5"/>
-          </p:nvPr>
-        </p:nvSpPr>
-        <p:spPr/>
-        <p:txBody>
-          <a:bodyPr/>
-          <a:lstStyle/>
-          <a:p>
-            <a:r>
-              <a:rPr lang="en-US"/>
-              <a:t>LAB 3.0. CIRCUITS &amp; COMPACT MODELS</a:t>
-            </a:r>
-          </a:p>
-        </p:txBody>
-      </p:sp>
-      <p:sp>
-        <p:nvSpPr>
           <p:cNvPr id="6" name="Marcador de número de diapositiva 5">
             <a:extLst>
               <a:ext uri="{FF2B5EF4-FFF2-40B4-BE49-F238E27FC236}">
@@ -5906,467 +4986,26 @@
         </p:nvSpPr>
         <p:spPr>
           <a:xfrm>
-            <a:off x="611029" y="4860335"/>
-            <a:ext cx="11199530" cy="1015663"/>
-          </a:xfrm>
-          <a:prstGeom prst="rect">
-            <a:avLst/>
-          </a:prstGeom>
-          <a:solidFill>
-            <a:schemeClr val="bg1">
-              <a:lumMod val="95000"/>
-            </a:schemeClr>
-          </a:solidFill>
-          <a:ln w="28575">
-            <a:solidFill>
-              <a:srgbClr val="E0700D"/>
-            </a:solidFill>
-          </a:ln>
-        </p:spPr>
-        <p:txBody>
-          <a:bodyPr wrap="square" rtlCol="0">
-            <a:spAutoFit/>
-          </a:bodyPr>
-          <a:lstStyle/>
-          <a:p>
-            <a:pPr algn="just"/>
-            <a:r>
-              <a:rPr lang="en-US" sz="1200" dirty="0">
-                <a:latin typeface="Arial" panose="020B0604020202020204" pitchFamily="34" charset="0"/>
-                <a:cs typeface="Arial" panose="020B0604020202020204" pitchFamily="34" charset="0"/>
-              </a:rPr>
-              <a:t>Comment results:</a:t>
-            </a:r>
-          </a:p>
-          <a:p>
-            <a:pPr algn="just"/>
-            <a:endParaRPr lang="en-US" sz="1200" dirty="0">
-              <a:latin typeface="Arial" panose="020B0604020202020204" pitchFamily="34" charset="0"/>
-              <a:cs typeface="Arial" panose="020B0604020202020204" pitchFamily="34" charset="0"/>
-            </a:endParaRPr>
-          </a:p>
-          <a:p>
-            <a:pPr algn="just"/>
-            <a:r>
-              <a:rPr lang="en-US" sz="1200" dirty="0">
-                <a:latin typeface="Arial" panose="020B0604020202020204" pitchFamily="34" charset="0"/>
-                <a:cs typeface="Arial" panose="020B0604020202020204" pitchFamily="34" charset="0"/>
-              </a:rPr>
-              <a:t> </a:t>
-            </a:r>
-          </a:p>
-          <a:p>
-            <a:pPr algn="just"/>
-            <a:endParaRPr lang="en-US" sz="1200" dirty="0">
-              <a:latin typeface="Arial" panose="020B0604020202020204" pitchFamily="34" charset="0"/>
-              <a:cs typeface="Arial" panose="020B0604020202020204" pitchFamily="34" charset="0"/>
-            </a:endParaRPr>
-          </a:p>
-          <a:p>
-            <a:pPr algn="just"/>
-            <a:endParaRPr lang="en-US" sz="1200" dirty="0">
-              <a:latin typeface="Arial" panose="020B0604020202020204" pitchFamily="34" charset="0"/>
-              <a:cs typeface="Arial" panose="020B0604020202020204" pitchFamily="34" charset="0"/>
-            </a:endParaRPr>
-          </a:p>
-        </p:txBody>
-      </p:sp>
-      <p:sp>
-        <p:nvSpPr>
-          <p:cNvPr id="11" name="Rectángulo 10">
-            <a:extLst>
-              <a:ext uri="{FF2B5EF4-FFF2-40B4-BE49-F238E27FC236}">
-                <a16:creationId xmlns:a16="http://schemas.microsoft.com/office/drawing/2014/main" id="{B811A5F9-C0B5-716C-70FB-9472E1BC2CD3}"/>
-              </a:ext>
-            </a:extLst>
-          </p:cNvPr>
-          <p:cNvSpPr/>
-          <p:nvPr/>
-        </p:nvSpPr>
-        <p:spPr>
-          <a:xfrm>
-            <a:off x="611030" y="1418373"/>
-            <a:ext cx="3810000" cy="3306028"/>
+            <a:off x="441804" y="5276246"/>
+            <a:ext cx="11199530" cy="584775"/>
           </a:xfrm>
           <a:prstGeom prst="rect">
             <a:avLst/>
           </a:prstGeom>
           <a:noFill/>
           <a:ln w="28575">
-            <a:solidFill>
-              <a:srgbClr val="E0700D"/>
-            </a:solidFill>
+            <a:noFill/>
           </a:ln>
         </p:spPr>
-        <p:style>
-          <a:lnRef idx="2">
-            <a:schemeClr val="accent1">
-              <a:shade val="15000"/>
-            </a:schemeClr>
-          </a:lnRef>
-          <a:fillRef idx="1">
-            <a:schemeClr val="accent1"/>
-          </a:fillRef>
-          <a:effectRef idx="0">
-            <a:schemeClr val="accent1"/>
-          </a:effectRef>
-          <a:fontRef idx="minor">
-            <a:schemeClr val="lt1"/>
-          </a:fontRef>
-        </p:style>
-        <p:txBody>
-          <a:bodyPr rtlCol="0" anchor="ctr"/>
-          <a:lstStyle/>
-          <a:p>
-            <a:pPr algn="ctr"/>
-            <a:endParaRPr lang="en-US"/>
-          </a:p>
-        </p:txBody>
-      </p:sp>
-      <p:sp>
-        <p:nvSpPr>
-          <p:cNvPr id="12" name="CuadroTexto 11">
-            <a:extLst>
-              <a:ext uri="{FF2B5EF4-FFF2-40B4-BE49-F238E27FC236}">
-                <a16:creationId xmlns:a16="http://schemas.microsoft.com/office/drawing/2014/main" id="{1D17C364-5A66-F740-B152-8B41A2A4EF26}"/>
-              </a:ext>
-            </a:extLst>
-          </p:cNvPr>
-          <p:cNvSpPr txBox="1"/>
-          <p:nvPr/>
-        </p:nvSpPr>
-        <p:spPr>
-          <a:xfrm>
-            <a:off x="5305711" y="2494307"/>
-            <a:ext cx="2494977" cy="1015663"/>
-          </a:xfrm>
-          <a:prstGeom prst="rect">
-            <a:avLst/>
-          </a:prstGeom>
-          <a:noFill/>
-        </p:spPr>
-        <p:txBody>
-          <a:bodyPr wrap="none" rtlCol="0">
+        <p:txBody>
+          <a:bodyPr wrap="square" rtlCol="0">
             <a:spAutoFit/>
           </a:bodyPr>
           <a:lstStyle/>
           <a:p>
-            <a:pPr algn="ctr"/>
-            <a:r>
-              <a:rPr lang="es-ES" sz="2000" dirty="0"/>
-              <a:t>MZI transfer </a:t>
-            </a:r>
-            <a:r>
-              <a:rPr lang="es-ES" sz="2000" dirty="0" err="1"/>
-              <a:t>functions</a:t>
-            </a:r>
-            <a:endParaRPr lang="en-US" sz="2000" dirty="0"/>
-          </a:p>
-          <a:p>
-            <a:pPr algn="ctr"/>
-            <a:endParaRPr lang="en-US" sz="2000" dirty="0"/>
-          </a:p>
-          <a:p>
-            <a:pPr algn="ctr"/>
-            <a:r>
-              <a:rPr lang="en-US" sz="2000" dirty="0"/>
-              <a:t>Paste plot here</a:t>
-            </a:r>
-          </a:p>
-        </p:txBody>
-      </p:sp>
-      <p:sp>
-        <p:nvSpPr>
-          <p:cNvPr id="3" name="Rectángulo 2">
-            <a:extLst>
-              <a:ext uri="{FF2B5EF4-FFF2-40B4-BE49-F238E27FC236}">
-                <a16:creationId xmlns:a16="http://schemas.microsoft.com/office/drawing/2014/main" id="{5FB43DF1-4048-35BF-BD58-4BF2A341D2EF}"/>
-              </a:ext>
-            </a:extLst>
-          </p:cNvPr>
-          <p:cNvSpPr/>
-          <p:nvPr/>
-        </p:nvSpPr>
-        <p:spPr>
-          <a:xfrm>
-            <a:off x="8610601" y="1418373"/>
-            <a:ext cx="3199959" cy="3306028"/>
-          </a:xfrm>
-          <a:prstGeom prst="rect">
-            <a:avLst/>
-          </a:prstGeom>
-          <a:solidFill>
-            <a:schemeClr val="bg1">
-              <a:lumMod val="95000"/>
-            </a:schemeClr>
-          </a:solidFill>
-          <a:ln w="28575">
-            <a:solidFill>
-              <a:srgbClr val="E0700D"/>
-            </a:solidFill>
-          </a:ln>
-        </p:spPr>
-        <p:style>
-          <a:lnRef idx="2">
-            <a:schemeClr val="accent1">
-              <a:shade val="15000"/>
-            </a:schemeClr>
-          </a:lnRef>
-          <a:fillRef idx="1">
-            <a:schemeClr val="accent1"/>
-          </a:fillRef>
-          <a:effectRef idx="0">
-            <a:schemeClr val="accent1"/>
-          </a:effectRef>
-          <a:fontRef idx="minor">
-            <a:schemeClr val="lt1"/>
-          </a:fontRef>
-        </p:style>
-        <p:txBody>
-          <a:bodyPr rtlCol="0" anchor="t" anchorCtr="0"/>
-          <a:lstStyle/>
-          <a:p>
-            <a:pPr algn="just"/>
-            <a:r>
-              <a:rPr lang="en-US" b="1" dirty="0">
-                <a:solidFill>
-                  <a:schemeClr val="tx1"/>
-                </a:solidFill>
-                <a:latin typeface="Arial" panose="020B0604020202020204" pitchFamily="34" charset="0"/>
-                <a:cs typeface="Arial" panose="020B0604020202020204" pitchFamily="34" charset="0"/>
-              </a:rPr>
-              <a:t>Hints:</a:t>
-            </a:r>
-            <a:endParaRPr lang="en-US" dirty="0">
-              <a:solidFill>
-                <a:schemeClr val="tx1"/>
-              </a:solidFill>
-              <a:latin typeface="Arial" panose="020B0604020202020204" pitchFamily="34" charset="0"/>
-              <a:cs typeface="Arial" panose="020B0604020202020204" pitchFamily="34" charset="0"/>
-            </a:endParaRPr>
-          </a:p>
-          <a:p>
-            <a:pPr algn="just"/>
-            <a:r>
-              <a:rPr lang="en-US" dirty="0" err="1">
-                <a:solidFill>
-                  <a:schemeClr val="tx1"/>
-                </a:solidFill>
-                <a:latin typeface="Arial" panose="020B0604020202020204" pitchFamily="34" charset="0"/>
-                <a:cs typeface="Arial" panose="020B0604020202020204" pitchFamily="34" charset="0"/>
-                <a:sym typeface="Wingdings" pitchFamily="2" charset="2"/>
-              </a:rPr>
-              <a:t>wvl</a:t>
-            </a:r>
-            <a:r>
-              <a:rPr lang="en-US" dirty="0">
-                <a:solidFill>
-                  <a:schemeClr val="tx1"/>
-                </a:solidFill>
-                <a:latin typeface="Arial" panose="020B0604020202020204" pitchFamily="34" charset="0"/>
-                <a:cs typeface="Arial" panose="020B0604020202020204" pitchFamily="34" charset="0"/>
-                <a:sym typeface="Wingdings" pitchFamily="2" charset="2"/>
-              </a:rPr>
-              <a:t> [1500-1600] step 0.001</a:t>
-            </a:r>
-          </a:p>
-          <a:p>
-            <a:pPr algn="just"/>
-            <a:r>
-              <a:rPr lang="en-US" dirty="0">
-                <a:solidFill>
-                  <a:schemeClr val="tx1"/>
-                </a:solidFill>
-                <a:latin typeface="Arial" panose="020B0604020202020204" pitchFamily="34" charset="0"/>
-                <a:cs typeface="Arial" panose="020B0604020202020204" pitchFamily="34" charset="0"/>
-                <a:sym typeface="Wingdings" pitchFamily="2" charset="2"/>
-              </a:rPr>
-              <a:t>dL = ? µm </a:t>
-            </a:r>
-            <a:r>
-              <a:rPr lang="en-US" b="1" dirty="0">
-                <a:solidFill>
-                  <a:schemeClr val="tx1"/>
-                </a:solidFill>
-                <a:latin typeface="Arial" panose="020B0604020202020204" pitchFamily="34" charset="0"/>
-                <a:cs typeface="Arial" panose="020B0604020202020204" pitchFamily="34" charset="0"/>
-                <a:sym typeface="Wingdings" pitchFamily="2" charset="2"/>
-              </a:rPr>
-              <a:t>calculate for FSR = 2 nm </a:t>
-            </a:r>
-          </a:p>
-          <a:p>
-            <a:pPr algn="just"/>
-            <a:r>
-              <a:rPr lang="en-US" dirty="0">
-                <a:solidFill>
-                  <a:schemeClr val="tx1"/>
-                </a:solidFill>
-                <a:latin typeface="Arial" panose="020B0604020202020204" pitchFamily="34" charset="0"/>
-                <a:cs typeface="Arial" panose="020B0604020202020204" pitchFamily="34" charset="0"/>
-                <a:sym typeface="Wingdings" pitchFamily="2" charset="2"/>
-              </a:rPr>
-              <a:t>Ka = </a:t>
-            </a:r>
-            <a:r>
-              <a:rPr lang="en-US" dirty="0" err="1">
-                <a:solidFill>
-                  <a:schemeClr val="tx1"/>
-                </a:solidFill>
-                <a:latin typeface="Arial" panose="020B0604020202020204" pitchFamily="34" charset="0"/>
-                <a:cs typeface="Arial" panose="020B0604020202020204" pitchFamily="34" charset="0"/>
-                <a:sym typeface="Wingdings" pitchFamily="2" charset="2"/>
-              </a:rPr>
-              <a:t>Kb</a:t>
-            </a:r>
-            <a:r>
-              <a:rPr lang="en-US" dirty="0">
-                <a:solidFill>
-                  <a:schemeClr val="tx1"/>
-                </a:solidFill>
-                <a:latin typeface="Arial" panose="020B0604020202020204" pitchFamily="34" charset="0"/>
-                <a:cs typeface="Arial" panose="020B0604020202020204" pitchFamily="34" charset="0"/>
-                <a:sym typeface="Wingdings" pitchFamily="2" charset="2"/>
-              </a:rPr>
-              <a:t> = 0.5 for all </a:t>
-            </a:r>
-            <a:r>
-              <a:rPr lang="en-US" dirty="0" err="1">
-                <a:solidFill>
-                  <a:schemeClr val="tx1"/>
-                </a:solidFill>
-                <a:latin typeface="Arial" panose="020B0604020202020204" pitchFamily="34" charset="0"/>
-                <a:cs typeface="Arial" panose="020B0604020202020204" pitchFamily="34" charset="0"/>
-                <a:sym typeface="Wingdings" pitchFamily="2" charset="2"/>
-              </a:rPr>
-              <a:t>wvl</a:t>
-            </a:r>
-            <a:endParaRPr lang="en-US" dirty="0">
-              <a:solidFill>
-                <a:schemeClr val="tx1"/>
-              </a:solidFill>
-              <a:latin typeface="Arial" panose="020B0604020202020204" pitchFamily="34" charset="0"/>
-              <a:cs typeface="Arial" panose="020B0604020202020204" pitchFamily="34" charset="0"/>
-              <a:sym typeface="Wingdings" pitchFamily="2" charset="2"/>
-            </a:endParaRPr>
-          </a:p>
-          <a:p>
-            <a:pPr algn="just"/>
-            <a:endParaRPr lang="en-US" sz="1200" dirty="0">
-              <a:solidFill>
-                <a:schemeClr val="tx1"/>
-              </a:solidFill>
-              <a:latin typeface="Arial" panose="020B0604020202020204" pitchFamily="34" charset="0"/>
-              <a:cs typeface="Arial" panose="020B0604020202020204" pitchFamily="34" charset="0"/>
-            </a:endParaRPr>
-          </a:p>
-          <a:p>
-            <a:pPr algn="just"/>
-            <a:endParaRPr lang="en-US" sz="1200" dirty="0">
-              <a:solidFill>
-                <a:schemeClr val="tx1"/>
-              </a:solidFill>
-              <a:latin typeface="Arial" panose="020B0604020202020204" pitchFamily="34" charset="0"/>
-              <a:cs typeface="Arial" panose="020B0604020202020204" pitchFamily="34" charset="0"/>
-            </a:endParaRPr>
-          </a:p>
-        </p:txBody>
-      </p:sp>
-      <p:sp>
-        <p:nvSpPr>
-          <p:cNvPr id="14" name="Rectángulo 13">
-            <a:extLst>
-              <a:ext uri="{FF2B5EF4-FFF2-40B4-BE49-F238E27FC236}">
-                <a16:creationId xmlns:a16="http://schemas.microsoft.com/office/drawing/2014/main" id="{6AA857E7-5C39-DCE1-10B5-40300FCF4B26}"/>
-              </a:ext>
-            </a:extLst>
-          </p:cNvPr>
-          <p:cNvSpPr/>
-          <p:nvPr/>
-        </p:nvSpPr>
-        <p:spPr>
-          <a:xfrm>
-            <a:off x="4648200" y="1418373"/>
-            <a:ext cx="3810000" cy="3306028"/>
-          </a:xfrm>
-          <a:prstGeom prst="rect">
-            <a:avLst/>
-          </a:prstGeom>
-          <a:noFill/>
-          <a:ln w="28575">
-            <a:solidFill>
-              <a:srgbClr val="E0700D"/>
-            </a:solidFill>
-          </a:ln>
-        </p:spPr>
-        <p:style>
-          <a:lnRef idx="2">
-            <a:schemeClr val="accent1">
-              <a:shade val="15000"/>
-            </a:schemeClr>
-          </a:lnRef>
-          <a:fillRef idx="1">
-            <a:schemeClr val="accent1"/>
-          </a:fillRef>
-          <a:effectRef idx="0">
-            <a:schemeClr val="accent1"/>
-          </a:effectRef>
-          <a:fontRef idx="minor">
-            <a:schemeClr val="lt1"/>
-          </a:fontRef>
-        </p:style>
-        <p:txBody>
-          <a:bodyPr rtlCol="0" anchor="ctr"/>
-          <a:lstStyle/>
-          <a:p>
-            <a:pPr algn="ctr"/>
-            <a:endParaRPr lang="en-US"/>
-          </a:p>
-        </p:txBody>
-      </p:sp>
-      <p:sp>
-        <p:nvSpPr>
-          <p:cNvPr id="15" name="CuadroTexto 14">
-            <a:extLst>
-              <a:ext uri="{FF2B5EF4-FFF2-40B4-BE49-F238E27FC236}">
-                <a16:creationId xmlns:a16="http://schemas.microsoft.com/office/drawing/2014/main" id="{54CF28B4-1346-F41D-2CD8-EA104ABBFB98}"/>
-              </a:ext>
-            </a:extLst>
-          </p:cNvPr>
-          <p:cNvSpPr txBox="1"/>
-          <p:nvPr/>
-        </p:nvSpPr>
-        <p:spPr>
-          <a:xfrm>
-            <a:off x="1017546" y="2478160"/>
-            <a:ext cx="2996974" cy="1015663"/>
-          </a:xfrm>
-          <a:prstGeom prst="rect">
-            <a:avLst/>
-          </a:prstGeom>
-          <a:noFill/>
-        </p:spPr>
-        <p:txBody>
-          <a:bodyPr wrap="none" rtlCol="0">
-            <a:spAutoFit/>
-          </a:bodyPr>
-          <a:lstStyle/>
-          <a:p>
-            <a:pPr algn="ctr"/>
-            <a:r>
-              <a:rPr lang="en-US" sz="2000" dirty="0"/>
-              <a:t>Your design justification</a:t>
-            </a:r>
-          </a:p>
-          <a:p>
-            <a:pPr algn="ctr"/>
-            <a:endParaRPr lang="en-US" sz="2000" dirty="0"/>
-          </a:p>
-          <a:p>
-            <a:pPr algn="ctr"/>
-            <a:r>
-              <a:rPr lang="en-US" sz="2000" dirty="0"/>
-              <a:t>Write equations / numbers</a:t>
+            <a:r>
+              <a:rPr lang="en-US" sz="1600" dirty="0"/>
+              <a:t>To get FSR equal to 2 nm we need dL equal to 286 µm from the formula dL equal to lambda squared divided by ng times FSR. The simulation with this value gives fringes spaced exactly 2 nm apart across the full window, confirming the design works.</a:t>
             </a:r>
           </a:p>
         </p:txBody>
@@ -6386,10 +5025,10 @@
           <p:nvPr/>
         </p:nvPicPr>
         <p:blipFill>
-          <a:blip>
+          <a:blip r:embed="rId2">
             <a:extLst>
               <a:ext uri="{96DAC541-7B7A-43D3-8B79-37D633B846F1}">
-                <asvg:svgBlip xmlns:asvg="http://schemas.microsoft.com/office/drawing/2016/SVG/main" r:embed="rId2"/>
+                <asvg:svgBlip xmlns:asvg="http://schemas.microsoft.com/office/drawing/2016/SVG/main" r:embed="rId3"/>
               </a:ext>
             </a:extLst>
           </a:blip>
@@ -6483,6 +5122,553 @@
           </a:p>
         </p:txBody>
       </p:sp>
+      <mc:AlternateContent xmlns:mc="http://schemas.openxmlformats.org/markup-compatibility/2006">
+        <mc:Choice xmlns:a14="http://schemas.microsoft.com/office/drawing/2010/main" Requires="a14">
+          <p:sp>
+            <p:nvSpPr>
+              <p:cNvPr id="17" name="CasellaDiTesto 16">
+                <a:extLst>
+                  <a:ext uri="{FF2B5EF4-FFF2-40B4-BE49-F238E27FC236}">
+                    <a16:creationId xmlns:a16="http://schemas.microsoft.com/office/drawing/2014/main" id="{7EBB5843-66A8-6A7B-28AC-CDA5D13A736F}"/>
+                  </a:ext>
+                </a:extLst>
+              </p:cNvPr>
+              <p:cNvSpPr txBox="1"/>
+              <p:nvPr/>
+            </p:nvSpPr>
+            <p:spPr>
+              <a:xfrm>
+                <a:off x="469661" y="2685416"/>
+                <a:ext cx="1498423" cy="638573"/>
+              </a:xfrm>
+              <a:prstGeom prst="rect">
+                <a:avLst/>
+              </a:prstGeom>
+              <a:noFill/>
+            </p:spPr>
+            <p:txBody>
+              <a:bodyPr wrap="none" lIns="0" tIns="0" rIns="0" bIns="0" rtlCol="0">
+                <a:spAutoFit/>
+              </a:bodyPr>
+              <a:lstStyle/>
+              <a:p>
+                <a:pPr/>
+                <a14:m>
+                  <m:oMathPara xmlns:m="http://schemas.openxmlformats.org/officeDocument/2006/math">
+                    <m:oMathParaPr>
+                      <m:jc m:val="centerGroup"/>
+                    </m:oMathParaPr>
+                    <m:oMath xmlns:m="http://schemas.openxmlformats.org/officeDocument/2006/math">
+                      <m:r>
+                        <m:rPr>
+                          <m:sty m:val="p"/>
+                        </m:rPr>
+                        <a:rPr lang="it-IT" i="1" smtClean="0">
+                          <a:latin typeface="Cambria Math" panose="02040503050406030204" pitchFamily="18" charset="0"/>
+                        </a:rPr>
+                        <m:t>Δ</m:t>
+                      </m:r>
+                      <m:r>
+                        <a:rPr lang="it-IT" i="1" smtClean="0">
+                          <a:latin typeface="Cambria Math" panose="02040503050406030204" pitchFamily="18" charset="0"/>
+                        </a:rPr>
+                        <m:t>𝐿</m:t>
+                      </m:r>
+                      <m:r>
+                        <a:rPr lang="it-IT" i="1" smtClean="0">
+                          <a:latin typeface="Cambria Math" panose="02040503050406030204" pitchFamily="18" charset="0"/>
+                        </a:rPr>
+                        <m:t>=</m:t>
+                      </m:r>
+                      <m:f>
+                        <m:fPr>
+                          <m:ctrlPr>
+                            <a:rPr lang="it-IT" i="1" smtClean="0">
+                              <a:latin typeface="Cambria Math" panose="02040503050406030204" pitchFamily="18" charset="0"/>
+                            </a:rPr>
+                          </m:ctrlPr>
+                        </m:fPr>
+                        <m:num>
+                          <m:sSubSup>
+                            <m:sSubSupPr>
+                              <m:ctrlPr>
+                                <a:rPr lang="it-IT" i="1" smtClean="0">
+                                  <a:latin typeface="Cambria Math" panose="02040503050406030204" pitchFamily="18" charset="0"/>
+                                </a:rPr>
+                              </m:ctrlPr>
+                            </m:sSubSupPr>
+                            <m:e>
+                              <m:r>
+                                <a:rPr lang="it-IT" i="1" smtClean="0">
+                                  <a:latin typeface="Cambria Math" panose="02040503050406030204" pitchFamily="18" charset="0"/>
+                                </a:rPr>
+                                <m:t>𝜆</m:t>
+                              </m:r>
+                            </m:e>
+                            <m:sub>
+                              <m:r>
+                                <a:rPr lang="it-IT" i="1" smtClean="0">
+                                  <a:latin typeface="Cambria Math" panose="02040503050406030204" pitchFamily="18" charset="0"/>
+                                </a:rPr>
+                                <m:t>0</m:t>
+                              </m:r>
+                            </m:sub>
+                            <m:sup>
+                              <m:r>
+                                <a:rPr lang="it-IT" i="1" smtClean="0">
+                                  <a:latin typeface="Cambria Math" panose="02040503050406030204" pitchFamily="18" charset="0"/>
+                                </a:rPr>
+                                <m:t>2</m:t>
+                              </m:r>
+                            </m:sup>
+                          </m:sSubSup>
+                        </m:num>
+                        <m:den>
+                          <m:sSub>
+                            <m:sSubPr>
+                              <m:ctrlPr>
+                                <a:rPr lang="it-IT" i="1" smtClean="0">
+                                  <a:latin typeface="Cambria Math" panose="02040503050406030204" pitchFamily="18" charset="0"/>
+                                </a:rPr>
+                              </m:ctrlPr>
+                            </m:sSubPr>
+                            <m:e>
+                              <m:r>
+                                <a:rPr lang="it-IT" i="1" smtClean="0">
+                                  <a:latin typeface="Cambria Math" panose="02040503050406030204" pitchFamily="18" charset="0"/>
+                                </a:rPr>
+                                <m:t>𝑛</m:t>
+                              </m:r>
+                            </m:e>
+                            <m:sub>
+                              <m:r>
+                                <a:rPr lang="it-IT" i="1" smtClean="0">
+                                  <a:latin typeface="Cambria Math" panose="02040503050406030204" pitchFamily="18" charset="0"/>
+                                </a:rPr>
+                                <m:t>𝑔</m:t>
+                              </m:r>
+                            </m:sub>
+                          </m:sSub>
+                          <m:r>
+                            <a:rPr lang="it-IT" i="1" smtClean="0">
+                              <a:latin typeface="Cambria Math" panose="02040503050406030204" pitchFamily="18" charset="0"/>
+                            </a:rPr>
+                            <m:t>∗</m:t>
+                          </m:r>
+                          <m:r>
+                            <a:rPr lang="it-IT" i="1" smtClean="0">
+                              <a:latin typeface="Cambria Math" panose="02040503050406030204" pitchFamily="18" charset="0"/>
+                            </a:rPr>
+                            <m:t>𝐹𝑆𝑅</m:t>
+                          </m:r>
+                        </m:den>
+                      </m:f>
+                    </m:oMath>
+                  </m:oMathPara>
+                </a14:m>
+                <a:endParaRPr lang="it-IT" dirty="0"/>
+              </a:p>
+            </p:txBody>
+          </p:sp>
+        </mc:Choice>
+        <mc:Fallback>
+          <p:sp>
+            <p:nvSpPr>
+              <p:cNvPr id="17" name="CasellaDiTesto 16">
+                <a:extLst>
+                  <a:ext uri="{FF2B5EF4-FFF2-40B4-BE49-F238E27FC236}">
+                    <a16:creationId xmlns:a16="http://schemas.microsoft.com/office/drawing/2014/main" id="{7EBB5843-66A8-6A7B-28AC-CDA5D13A736F}"/>
+                  </a:ext>
+                </a:extLst>
+              </p:cNvPr>
+              <p:cNvSpPr txBox="1">
+                <a:spLocks noRot="1" noChangeAspect="1" noMove="1" noResize="1" noEditPoints="1" noAdjustHandles="1" noChangeArrowheads="1" noChangeShapeType="1" noTextEdit="1"/>
+              </p:cNvSpPr>
+              <p:nvPr/>
+            </p:nvSpPr>
+            <p:spPr>
+              <a:xfrm>
+                <a:off x="469661" y="2685416"/>
+                <a:ext cx="1498423" cy="638573"/>
+              </a:xfrm>
+              <a:prstGeom prst="rect">
+                <a:avLst/>
+              </a:prstGeom>
+              <a:blipFill>
+                <a:blip r:embed="rId4"/>
+                <a:stretch>
+                  <a:fillRect/>
+                </a:stretch>
+              </a:blipFill>
+            </p:spPr>
+            <p:txBody>
+              <a:bodyPr/>
+              <a:lstStyle/>
+              <a:p>
+                <a:r>
+                  <a:rPr lang="it-IT">
+                    <a:noFill/>
+                  </a:rPr>
+                  <a:t> </a:t>
+                </a:r>
+              </a:p>
+            </p:txBody>
+          </p:sp>
+        </mc:Fallback>
+      </mc:AlternateContent>
+      <mc:AlternateContent xmlns:mc="http://schemas.openxmlformats.org/markup-compatibility/2006">
+        <mc:Choice xmlns:a14="http://schemas.microsoft.com/office/drawing/2010/main" Requires="a14">
+          <p:sp>
+            <p:nvSpPr>
+              <p:cNvPr id="19" name="CasellaDiTesto 18">
+                <a:extLst>
+                  <a:ext uri="{FF2B5EF4-FFF2-40B4-BE49-F238E27FC236}">
+                    <a16:creationId xmlns:a16="http://schemas.microsoft.com/office/drawing/2014/main" id="{19923059-3A37-5EA7-F205-873B4D1C06C6}"/>
+                  </a:ext>
+                </a:extLst>
+              </p:cNvPr>
+              <p:cNvSpPr txBox="1"/>
+              <p:nvPr/>
+            </p:nvSpPr>
+            <p:spPr>
+              <a:xfrm>
+                <a:off x="1574561" y="2598160"/>
+                <a:ext cx="2514600" cy="664734"/>
+              </a:xfrm>
+              <a:prstGeom prst="rect">
+                <a:avLst/>
+              </a:prstGeom>
+              <a:noFill/>
+            </p:spPr>
+            <p:txBody>
+              <a:bodyPr wrap="square">
+                <a:spAutoFit/>
+              </a:bodyPr>
+              <a:lstStyle/>
+              <a:p>
+                <a:pPr/>
+                <a14:m>
+                  <m:oMathPara xmlns:m="http://schemas.openxmlformats.org/officeDocument/2006/math">
+                    <m:oMathParaPr>
+                      <m:jc m:val="centerGroup"/>
+                    </m:oMathParaPr>
+                    <m:oMath xmlns:m="http://schemas.openxmlformats.org/officeDocument/2006/math">
+                      <m:r>
+                        <a:rPr lang="it-IT" i="1" smtClean="0">
+                          <a:latin typeface="Cambria Math" panose="02040503050406030204" pitchFamily="18" charset="0"/>
+                        </a:rPr>
+                        <m:t>=</m:t>
+                      </m:r>
+                      <m:f>
+                        <m:fPr>
+                          <m:ctrlPr>
+                            <a:rPr lang="it-IT" i="1" smtClean="0">
+                              <a:latin typeface="Cambria Math" panose="02040503050406030204" pitchFamily="18" charset="0"/>
+                            </a:rPr>
+                          </m:ctrlPr>
+                        </m:fPr>
+                        <m:num>
+                          <m:sSubSup>
+                            <m:sSubSupPr>
+                              <m:ctrlPr>
+                                <a:rPr lang="it-IT" i="1" smtClean="0">
+                                  <a:latin typeface="Cambria Math" panose="02040503050406030204" pitchFamily="18" charset="0"/>
+                                </a:rPr>
+                              </m:ctrlPr>
+                            </m:sSubSupPr>
+                            <m:e>
+                              <m:r>
+                                <a:rPr lang="en-US" b="0" i="1" smtClean="0">
+                                  <a:latin typeface="Cambria Math" panose="02040503050406030204" pitchFamily="18" charset="0"/>
+                                </a:rPr>
+                                <m:t>(1.55∗</m:t>
+                              </m:r>
+                              <m:sSup>
+                                <m:sSupPr>
+                                  <m:ctrlPr>
+                                    <a:rPr lang="en-US" b="0" i="1" smtClean="0">
+                                      <a:latin typeface="Cambria Math" panose="02040503050406030204" pitchFamily="18" charset="0"/>
+                                    </a:rPr>
+                                  </m:ctrlPr>
+                                </m:sSupPr>
+                                <m:e>
+                                  <m:r>
+                                    <a:rPr lang="en-US" b="0" i="1" smtClean="0">
+                                      <a:latin typeface="Cambria Math" panose="02040503050406030204" pitchFamily="18" charset="0"/>
+                                    </a:rPr>
+                                    <m:t>10</m:t>
+                                  </m:r>
+                                </m:e>
+                                <m:sup>
+                                  <m:r>
+                                    <a:rPr lang="en-US" b="0" i="1" smtClean="0">
+                                      <a:latin typeface="Cambria Math" panose="02040503050406030204" pitchFamily="18" charset="0"/>
+                                    </a:rPr>
+                                    <m:t>−6</m:t>
+                                  </m:r>
+                                </m:sup>
+                              </m:sSup>
+                              <m:r>
+                                <a:rPr lang="en-US" b="0" i="1" smtClean="0">
+                                  <a:latin typeface="Cambria Math" panose="02040503050406030204" pitchFamily="18" charset="0"/>
+                                </a:rPr>
+                                <m:t>)</m:t>
+                              </m:r>
+                            </m:e>
+                            <m:sub/>
+                            <m:sup>
+                              <m:r>
+                                <a:rPr lang="it-IT" i="1" smtClean="0">
+                                  <a:latin typeface="Cambria Math" panose="02040503050406030204" pitchFamily="18" charset="0"/>
+                                </a:rPr>
+                                <m:t>2</m:t>
+                              </m:r>
+                            </m:sup>
+                          </m:sSubSup>
+                        </m:num>
+                        <m:den>
+                          <m:r>
+                            <a:rPr lang="en-US" b="0" i="1" smtClean="0">
+                              <a:latin typeface="Cambria Math" panose="02040503050406030204" pitchFamily="18" charset="0"/>
+                            </a:rPr>
+                            <m:t>2.0∗</m:t>
+                          </m:r>
+                          <m:r>
+                            <a:rPr lang="en-US" b="0" i="1" smtClean="0">
+                              <a:latin typeface="Cambria Math" panose="02040503050406030204" pitchFamily="18" charset="0"/>
+                            </a:rPr>
+                            <m:t>4.2</m:t>
+                          </m:r>
+                          <m:r>
+                            <a:rPr lang="it-IT" i="1" smtClean="0">
+                              <a:latin typeface="Cambria Math" panose="02040503050406030204" pitchFamily="18" charset="0"/>
+                            </a:rPr>
+                            <m:t>∗</m:t>
+                          </m:r>
+                          <m:sSup>
+                            <m:sSupPr>
+                              <m:ctrlPr>
+                                <a:rPr lang="it-IT" i="1" smtClean="0">
+                                  <a:latin typeface="Cambria Math" panose="02040503050406030204" pitchFamily="18" charset="0"/>
+                                </a:rPr>
+                              </m:ctrlPr>
+                            </m:sSupPr>
+                            <m:e>
+                              <m:r>
+                                <a:rPr lang="en-US" b="0" i="1" smtClean="0">
+                                  <a:latin typeface="Cambria Math" panose="02040503050406030204" pitchFamily="18" charset="0"/>
+                                </a:rPr>
+                                <m:t>10</m:t>
+                              </m:r>
+                            </m:e>
+                            <m:sup>
+                              <m:r>
+                                <a:rPr lang="en-US" b="0" i="1" smtClean="0">
+                                  <a:latin typeface="Cambria Math" panose="02040503050406030204" pitchFamily="18" charset="0"/>
+                                </a:rPr>
+                                <m:t>−9</m:t>
+                              </m:r>
+                            </m:sup>
+                          </m:sSup>
+                        </m:den>
+                      </m:f>
+                    </m:oMath>
+                  </m:oMathPara>
+                </a14:m>
+                <a:endParaRPr lang="it-IT" dirty="0"/>
+              </a:p>
+            </p:txBody>
+          </p:sp>
+        </mc:Choice>
+        <mc:Fallback>
+          <p:sp>
+            <p:nvSpPr>
+              <p:cNvPr id="19" name="CasellaDiTesto 18">
+                <a:extLst>
+                  <a:ext uri="{FF2B5EF4-FFF2-40B4-BE49-F238E27FC236}">
+                    <a16:creationId xmlns:a16="http://schemas.microsoft.com/office/drawing/2014/main" id="{19923059-3A37-5EA7-F205-873B4D1C06C6}"/>
+                  </a:ext>
+                </a:extLst>
+              </p:cNvPr>
+              <p:cNvSpPr txBox="1">
+                <a:spLocks noRot="1" noChangeAspect="1" noMove="1" noResize="1" noEditPoints="1" noAdjustHandles="1" noChangeArrowheads="1" noChangeShapeType="1" noTextEdit="1"/>
+              </p:cNvSpPr>
+              <p:nvPr/>
+            </p:nvSpPr>
+            <p:spPr>
+              <a:xfrm>
+                <a:off x="1574561" y="2598160"/>
+                <a:ext cx="2514600" cy="664734"/>
+              </a:xfrm>
+              <a:prstGeom prst="rect">
+                <a:avLst/>
+              </a:prstGeom>
+              <a:blipFill>
+                <a:blip r:embed="rId5"/>
+                <a:stretch>
+                  <a:fillRect/>
+                </a:stretch>
+              </a:blipFill>
+            </p:spPr>
+            <p:txBody>
+              <a:bodyPr/>
+              <a:lstStyle/>
+              <a:p>
+                <a:r>
+                  <a:rPr lang="it-IT">
+                    <a:noFill/>
+                  </a:rPr>
+                  <a:t> </a:t>
+                </a:r>
+              </a:p>
+            </p:txBody>
+          </p:sp>
+        </mc:Fallback>
+      </mc:AlternateContent>
+      <mc:AlternateContent xmlns:mc="http://schemas.openxmlformats.org/markup-compatibility/2006">
+        <mc:Choice xmlns:a14="http://schemas.microsoft.com/office/drawing/2010/main" Requires="a14">
+          <p:sp>
+            <p:nvSpPr>
+              <p:cNvPr id="21" name="CasellaDiTesto 20">
+                <a:extLst>
+                  <a:ext uri="{FF2B5EF4-FFF2-40B4-BE49-F238E27FC236}">
+                    <a16:creationId xmlns:a16="http://schemas.microsoft.com/office/drawing/2014/main" id="{B218EAA0-5B71-295C-AE4D-A9E0A11E9477}"/>
+                  </a:ext>
+                </a:extLst>
+              </p:cNvPr>
+              <p:cNvSpPr txBox="1"/>
+              <p:nvPr/>
+            </p:nvSpPr>
+            <p:spPr>
+              <a:xfrm>
+                <a:off x="3538616" y="2814429"/>
+                <a:ext cx="1824990" cy="380545"/>
+              </a:xfrm>
+              <a:prstGeom prst="rect">
+                <a:avLst/>
+              </a:prstGeom>
+              <a:noFill/>
+            </p:spPr>
+            <p:txBody>
+              <a:bodyPr wrap="square">
+                <a:spAutoFit/>
+              </a:bodyPr>
+              <a:lstStyle/>
+              <a:p>
+                <a:pPr/>
+                <a14:m>
+                  <m:oMathPara xmlns:m="http://schemas.openxmlformats.org/officeDocument/2006/math">
+                    <m:oMathParaPr>
+                      <m:jc m:val="centerGroup"/>
+                    </m:oMathParaPr>
+                    <m:oMath xmlns:m="http://schemas.openxmlformats.org/officeDocument/2006/math">
+                      <m:r>
+                        <a:rPr lang="it-IT" i="1" smtClean="0">
+                          <a:latin typeface="Cambria Math" panose="02040503050406030204" pitchFamily="18" charset="0"/>
+                        </a:rPr>
+                        <m:t>=</m:t>
+                      </m:r>
+                      <m:r>
+                        <a:rPr lang="en-US" b="0" i="1" smtClean="0">
+                          <a:latin typeface="Cambria Math" panose="02040503050406030204" pitchFamily="18" charset="0"/>
+                        </a:rPr>
+                        <m:t>286</m:t>
+                      </m:r>
+                      <m:r>
+                        <a:rPr lang="en-US" b="0" i="1" smtClean="0">
+                          <a:latin typeface="Cambria Math" panose="02040503050406030204" pitchFamily="18" charset="0"/>
+                        </a:rPr>
+                        <m:t>.25 </m:t>
+                      </m:r>
+                      <m:r>
+                        <a:rPr lang="en-US" b="0" i="1" smtClean="0">
+                          <a:latin typeface="Cambria Math" panose="02040503050406030204" pitchFamily="18" charset="0"/>
+                        </a:rPr>
+                        <m:t>𝑢𝑚</m:t>
+                      </m:r>
+                    </m:oMath>
+                  </m:oMathPara>
+                </a14:m>
+                <a:endParaRPr lang="it-IT" dirty="0"/>
+              </a:p>
+            </p:txBody>
+          </p:sp>
+        </mc:Choice>
+        <mc:Fallback>
+          <p:sp>
+            <p:nvSpPr>
+              <p:cNvPr id="21" name="CasellaDiTesto 20">
+                <a:extLst>
+                  <a:ext uri="{FF2B5EF4-FFF2-40B4-BE49-F238E27FC236}">
+                    <a16:creationId xmlns:a16="http://schemas.microsoft.com/office/drawing/2014/main" id="{B218EAA0-5B71-295C-AE4D-A9E0A11E9477}"/>
+                  </a:ext>
+                </a:extLst>
+              </p:cNvPr>
+              <p:cNvSpPr txBox="1">
+                <a:spLocks noRot="1" noChangeAspect="1" noMove="1" noResize="1" noEditPoints="1" noAdjustHandles="1" noChangeArrowheads="1" noChangeShapeType="1" noTextEdit="1"/>
+              </p:cNvSpPr>
+              <p:nvPr/>
+            </p:nvSpPr>
+            <p:spPr>
+              <a:xfrm>
+                <a:off x="3538616" y="2814429"/>
+                <a:ext cx="1824990" cy="380545"/>
+              </a:xfrm>
+              <a:prstGeom prst="rect">
+                <a:avLst/>
+              </a:prstGeom>
+              <a:blipFill>
+                <a:blip r:embed="rId6"/>
+                <a:stretch>
+                  <a:fillRect/>
+                </a:stretch>
+              </a:blipFill>
+            </p:spPr>
+            <p:txBody>
+              <a:bodyPr/>
+              <a:lstStyle/>
+              <a:p>
+                <a:r>
+                  <a:rPr lang="it-IT">
+                    <a:noFill/>
+                  </a:rPr>
+                  <a:t> </a:t>
+                </a:r>
+              </a:p>
+            </p:txBody>
+          </p:sp>
+        </mc:Fallback>
+      </mc:AlternateContent>
+      <p:pic>
+        <p:nvPicPr>
+          <p:cNvPr id="3" name="Immagine 2">
+            <a:extLst>
+              <a:ext uri="{FF2B5EF4-FFF2-40B4-BE49-F238E27FC236}">
+                <a16:creationId xmlns:a16="http://schemas.microsoft.com/office/drawing/2014/main" id="{2C149A61-8E32-7C89-2E23-7B59C7472566}"/>
+              </a:ext>
+            </a:extLst>
+          </p:cNvPr>
+          <p:cNvPicPr>
+            <a:picLocks noChangeAspect="1"/>
+          </p:cNvPicPr>
+          <p:nvPr/>
+        </p:nvPicPr>
+        <p:blipFill>
+          <a:blip r:embed="rId7"/>
+          <a:stretch>
+            <a:fillRect/>
+          </a:stretch>
+        </p:blipFill>
+        <p:spPr>
+          <a:xfrm>
+            <a:off x="5194935" y="1101727"/>
+            <a:ext cx="6680200" cy="3657600"/>
+          </a:xfrm>
+          <a:prstGeom prst="rect">
+            <a:avLst/>
+          </a:prstGeom>
+        </p:spPr>
+      </p:pic>
     </p:spTree>
     <p:extLst>
       <p:ext uri="{BB962C8B-B14F-4D97-AF65-F5344CB8AC3E}">
@@ -6521,34 +5707,6 @@
       </p:grpSpPr>
       <p:sp>
         <p:nvSpPr>
-          <p:cNvPr id="5" name="Marcador de pie de página 4">
-            <a:extLst>
-              <a:ext uri="{FF2B5EF4-FFF2-40B4-BE49-F238E27FC236}">
-                <a16:creationId xmlns:a16="http://schemas.microsoft.com/office/drawing/2014/main" id="{D79F9CCB-631D-A124-3694-9DBF91E01CAA}"/>
-              </a:ext>
-            </a:extLst>
-          </p:cNvPr>
-          <p:cNvSpPr>
-            <a:spLocks noGrp="1"/>
-          </p:cNvSpPr>
-          <p:nvPr>
-            <p:ph type="ftr" sz="quarter" idx="5"/>
-          </p:nvPr>
-        </p:nvSpPr>
-        <p:spPr/>
-        <p:txBody>
-          <a:bodyPr/>
-          <a:lstStyle/>
-          <a:p>
-            <a:r>
-              <a:rPr lang="en-US"/>
-              <a:t>LAB 3.0. CIRCUITS &amp; COMPACT MODELS</a:t>
-            </a:r>
-          </a:p>
-        </p:txBody>
-      </p:sp>
-      <p:sp>
-        <p:nvSpPr>
           <p:cNvPr id="6" name="Marcador de número de diapositiva 5">
             <a:extLst>
               <a:ext uri="{FF2B5EF4-FFF2-40B4-BE49-F238E27FC236}">
@@ -6592,10 +5750,10 @@
           <p:nvPr/>
         </p:nvPicPr>
         <p:blipFill>
-          <a:blip>
+          <a:blip r:embed="rId2">
             <a:extLst>
               <a:ext uri="{96DAC541-7B7A-43D3-8B79-37D633B846F1}">
-                <asvg:svgBlip xmlns:asvg="http://schemas.microsoft.com/office/drawing/2016/SVG/main" r:embed="rId2"/>
+                <asvg:svgBlip xmlns:asvg="http://schemas.microsoft.com/office/drawing/2016/SVG/main" r:embed="rId3"/>
               </a:ext>
             </a:extLst>
           </a:blip>
@@ -6629,8 +5787,8 @@
         </p:nvSpPr>
         <p:spPr>
           <a:xfrm>
-            <a:off x="685800" y="408883"/>
-            <a:ext cx="10994410" cy="718145"/>
+            <a:off x="381001" y="23812"/>
+            <a:ext cx="6629400" cy="718145"/>
           </a:xfrm>
           <a:prstGeom prst="rect">
             <a:avLst/>
@@ -6697,393 +5855,168 @@
         </p:nvSpPr>
         <p:spPr>
           <a:xfrm>
-            <a:off x="609441" y="4860334"/>
-            <a:ext cx="11199971" cy="1200329"/>
-          </a:xfrm>
-          <a:prstGeom prst="rect">
-            <a:avLst/>
-          </a:prstGeom>
-          <a:solidFill>
-            <a:schemeClr val="bg1">
-              <a:lumMod val="95000"/>
-            </a:schemeClr>
-          </a:solidFill>
-          <a:ln w="28575">
-            <a:solidFill>
-              <a:srgbClr val="E0700D"/>
-            </a:solidFill>
-          </a:ln>
-        </p:spPr>
-        <p:txBody>
-          <a:bodyPr wrap="square" rtlCol="0">
-            <a:spAutoFit/>
-          </a:bodyPr>
-          <a:lstStyle/>
-          <a:p>
-            <a:pPr algn="just"/>
-            <a:r>
-              <a:rPr lang="en-US" sz="1200" dirty="0">
-                <a:latin typeface="Arial" panose="020B0604020202020204" pitchFamily="34" charset="0"/>
-                <a:cs typeface="Arial" panose="020B0604020202020204" pitchFamily="34" charset="0"/>
-              </a:rPr>
-              <a:t>Comment results: describe the transfer function, is there any interference pattern in case 1? Is there any interference pattern in case 2? Explain the difference between both cases. Compare the Extinction Ratio of both variations. </a:t>
-            </a:r>
-          </a:p>
-          <a:p>
-            <a:pPr algn="just"/>
-            <a:r>
-              <a:rPr lang="en-US" sz="1200" dirty="0">
-                <a:latin typeface="Arial" panose="020B0604020202020204" pitchFamily="34" charset="0"/>
-                <a:cs typeface="Arial" panose="020B0604020202020204" pitchFamily="34" charset="0"/>
-              </a:rPr>
-              <a:t>Extra: What coupling coefficient will you select for the input coupler if you want to match the losses of the longer arm? Simulate and extract the ER.</a:t>
-            </a:r>
-          </a:p>
-          <a:p>
-            <a:pPr algn="just"/>
-            <a:endParaRPr lang="en-US" sz="1200" dirty="0">
-              <a:latin typeface="Arial" panose="020B0604020202020204" pitchFamily="34" charset="0"/>
-              <a:cs typeface="Arial" panose="020B0604020202020204" pitchFamily="34" charset="0"/>
-            </a:endParaRPr>
-          </a:p>
-          <a:p>
-            <a:pPr algn="just"/>
-            <a:endParaRPr lang="en-US" sz="1200" dirty="0">
-              <a:latin typeface="Arial" panose="020B0604020202020204" pitchFamily="34" charset="0"/>
-              <a:cs typeface="Arial" panose="020B0604020202020204" pitchFamily="34" charset="0"/>
-            </a:endParaRPr>
-          </a:p>
-          <a:p>
-            <a:pPr algn="just"/>
-            <a:endParaRPr lang="en-US" sz="1200" dirty="0">
-              <a:latin typeface="Arial" panose="020B0604020202020204" pitchFamily="34" charset="0"/>
-              <a:cs typeface="Arial" panose="020B0604020202020204" pitchFamily="34" charset="0"/>
-            </a:endParaRPr>
-          </a:p>
-        </p:txBody>
-      </p:sp>
-      <p:sp>
-        <p:nvSpPr>
-          <p:cNvPr id="4" name="Rectángulo 3">
-            <a:extLst>
-              <a:ext uri="{FF2B5EF4-FFF2-40B4-BE49-F238E27FC236}">
-                <a16:creationId xmlns:a16="http://schemas.microsoft.com/office/drawing/2014/main" id="{FDBAE930-4EE5-671B-4DE7-6BC60C48E7C0}"/>
-              </a:ext>
-            </a:extLst>
-          </p:cNvPr>
-          <p:cNvSpPr/>
-          <p:nvPr/>
-        </p:nvSpPr>
-        <p:spPr>
-          <a:xfrm>
-            <a:off x="609441" y="1418373"/>
-            <a:ext cx="5332571" cy="3306028"/>
+            <a:off x="762000" y="1600200"/>
+            <a:ext cx="3841715" cy="4247317"/>
           </a:xfrm>
           <a:prstGeom prst="rect">
             <a:avLst/>
           </a:prstGeom>
           <a:noFill/>
           <a:ln w="28575">
-            <a:solidFill>
-              <a:srgbClr val="E0700D"/>
-            </a:solidFill>
+            <a:noFill/>
           </a:ln>
         </p:spPr>
-        <p:style>
-          <a:lnRef idx="2">
-            <a:schemeClr val="accent1">
-              <a:shade val="15000"/>
-            </a:schemeClr>
-          </a:lnRef>
-          <a:fillRef idx="1">
-            <a:schemeClr val="accent1"/>
-          </a:fillRef>
-          <a:effectRef idx="0">
-            <a:schemeClr val="accent1"/>
-          </a:effectRef>
-          <a:fontRef idx="minor">
-            <a:schemeClr val="lt1"/>
-          </a:fontRef>
-        </p:style>
-        <p:txBody>
-          <a:bodyPr rtlCol="0" anchor="ctr"/>
+        <p:txBody>
+          <a:bodyPr wrap="square" rtlCol="0">
+            <a:spAutoFit/>
+          </a:bodyPr>
           <a:lstStyle/>
           <a:p>
-            <a:pPr algn="ctr"/>
-            <a:endParaRPr lang="en-US"/>
-          </a:p>
-        </p:txBody>
-      </p:sp>
-      <p:sp>
-        <p:nvSpPr>
-          <p:cNvPr id="7" name="Rectángulo 6">
+            <a:r>
+              <a:rPr lang="en-US" dirty="0"/>
+              <a:t>In Case 1 with Ka equal to </a:t>
+            </a:r>
+            <a:r>
+              <a:rPr lang="en-US" dirty="0" err="1"/>
+              <a:t>Kb</a:t>
+            </a:r>
+            <a:r>
+              <a:rPr lang="en-US" dirty="0"/>
+              <a:t> equal to 0.5 there is an interference pattern but the visibility is low. The long arm is about 57 mm longer so it loses around 22 dB more than the short one, which makes the two signals very unequal at the output and gives an ER of about 1.25 </a:t>
+            </a:r>
+            <a:r>
+              <a:rPr lang="en-US" dirty="0" err="1"/>
+              <a:t>dB.</a:t>
+            </a:r>
+            <a:r>
+              <a:rPr lang="en-US" dirty="0"/>
+              <a:t> In Case 2 with Ka equal to 0.1 most of the power stays in the short arm so there is almost nothing left in the long arm to interfere with. The fringes nearly disappear and the ER drops to around 0.4 </a:t>
+            </a:r>
+            <a:r>
+              <a:rPr lang="en-US" dirty="0" err="1"/>
+              <a:t>dB.</a:t>
+            </a:r>
+            <a:r>
+              <a:rPr lang="en-US" dirty="0"/>
+              <a:t> The key point is that interference only works well when the two amplitudes are similar.</a:t>
+            </a:r>
+          </a:p>
+        </p:txBody>
+      </p:sp>
+      <p:sp>
+        <p:nvSpPr>
+          <p:cNvPr id="3" name="CasellaDiTesto 2">
             <a:extLst>
               <a:ext uri="{FF2B5EF4-FFF2-40B4-BE49-F238E27FC236}">
-                <a16:creationId xmlns:a16="http://schemas.microsoft.com/office/drawing/2014/main" id="{A6CCE634-FF91-FD5F-7C1D-4329E9DA2469}"/>
+                <a16:creationId xmlns:a16="http://schemas.microsoft.com/office/drawing/2014/main" id="{BF6F3C10-8009-44EF-B0B9-62108142F326}"/>
               </a:ext>
             </a:extLst>
           </p:cNvPr>
-          <p:cNvSpPr/>
+          <p:cNvSpPr txBox="1"/>
           <p:nvPr/>
         </p:nvSpPr>
         <p:spPr>
           <a:xfrm>
-            <a:off x="6476400" y="1418373"/>
-            <a:ext cx="5332571" cy="3306028"/>
+            <a:off x="2362200" y="540157"/>
+            <a:ext cx="5715000" cy="769441"/>
           </a:xfrm>
           <a:prstGeom prst="rect">
             <a:avLst/>
           </a:prstGeom>
-          <a:solidFill>
-            <a:schemeClr val="bg1">
-              <a:lumMod val="95000"/>
-            </a:schemeClr>
-          </a:solidFill>
-          <a:ln w="28575">
-            <a:solidFill>
-              <a:srgbClr val="E0700D"/>
-            </a:solidFill>
-          </a:ln>
-        </p:spPr>
-        <p:style>
-          <a:lnRef idx="2">
-            <a:schemeClr val="accent1">
-              <a:shade val="15000"/>
-            </a:schemeClr>
-          </a:lnRef>
-          <a:fillRef idx="1">
-            <a:schemeClr val="accent1"/>
-          </a:fillRef>
-          <a:effectRef idx="0">
-            <a:schemeClr val="accent1"/>
-          </a:effectRef>
-          <a:fontRef idx="minor">
-            <a:schemeClr val="lt1"/>
-          </a:fontRef>
-        </p:style>
-        <p:txBody>
-          <a:bodyPr rtlCol="0" anchor="t" anchorCtr="0"/>
+          <a:noFill/>
+        </p:spPr>
+        <p:txBody>
+          <a:bodyPr wrap="square" rtlCol="0">
+            <a:spAutoFit/>
+          </a:bodyPr>
           <a:lstStyle/>
           <a:p>
             <a:pPr algn="just"/>
             <a:r>
-              <a:rPr lang="en-US" sz="1600" b="1" dirty="0">
-                <a:solidFill>
-                  <a:schemeClr val="tx1"/>
-                </a:solidFill>
+              <a:rPr lang="en-US" sz="1100" b="1" dirty="0">
                 <a:latin typeface="Arial" panose="020B0604020202020204" pitchFamily="34" charset="0"/>
                 <a:cs typeface="Arial" panose="020B0604020202020204" pitchFamily="34" charset="0"/>
+                <a:sym typeface="Wingdings" pitchFamily="2" charset="2"/>
               </a:rPr>
-              <a:t>Hints:</a:t>
-            </a:r>
-          </a:p>
-          <a:p>
-            <a:pPr algn="just"/>
-            <a:r>
-              <a:rPr lang="en-US" sz="1600" dirty="0" err="1">
-                <a:solidFill>
-                  <a:schemeClr val="tx1"/>
-                </a:solidFill>
+              <a:t>Case 1</a:t>
+            </a:r>
+            <a:r>
+              <a:rPr lang="en-US" sz="1100" dirty="0">
+                <a:latin typeface="Arial" panose="020B0604020202020204" pitchFamily="34" charset="0"/>
+                <a:cs typeface="Arial" panose="020B0604020202020204" pitchFamily="34" charset="0"/>
+                <a:sym typeface="Wingdings" pitchFamily="2" charset="2"/>
+              </a:rPr>
+              <a:t>. Simulate for Ka = </a:t>
+            </a:r>
+            <a:r>
+              <a:rPr lang="en-US" sz="1100" dirty="0" err="1">
+                <a:latin typeface="Arial" panose="020B0604020202020204" pitchFamily="34" charset="0"/>
+                <a:cs typeface="Arial" panose="020B0604020202020204" pitchFamily="34" charset="0"/>
+                <a:sym typeface="Wingdings" pitchFamily="2" charset="2"/>
+              </a:rPr>
+              <a:t>Kb</a:t>
+            </a:r>
+            <a:r>
+              <a:rPr lang="en-US" sz="1100" dirty="0">
+                <a:latin typeface="Arial" panose="020B0604020202020204" pitchFamily="34" charset="0"/>
+                <a:cs typeface="Arial" panose="020B0604020202020204" pitchFamily="34" charset="0"/>
+                <a:sym typeface="Wingdings" pitchFamily="2" charset="2"/>
+              </a:rPr>
+              <a:t> = 0.5 for all </a:t>
+            </a:r>
+            <a:r>
+              <a:rPr lang="en-US" sz="1100" dirty="0" err="1">
                 <a:latin typeface="Arial" panose="020B0604020202020204" pitchFamily="34" charset="0"/>
                 <a:cs typeface="Arial" panose="020B0604020202020204" pitchFamily="34" charset="0"/>
                 <a:sym typeface="Wingdings" pitchFamily="2" charset="2"/>
               </a:rPr>
               <a:t>wvl</a:t>
             </a:r>
-            <a:r>
-              <a:rPr lang="en-US" sz="1600" dirty="0">
-                <a:solidFill>
-                  <a:schemeClr val="tx1"/>
-                </a:solidFill>
+            <a:endParaRPr lang="en-US" sz="1100" dirty="0">
+              <a:latin typeface="Arial" panose="020B0604020202020204" pitchFamily="34" charset="0"/>
+              <a:cs typeface="Arial" panose="020B0604020202020204" pitchFamily="34" charset="0"/>
+              <a:sym typeface="Wingdings" pitchFamily="2" charset="2"/>
+            </a:endParaRPr>
+          </a:p>
+          <a:p>
+            <a:pPr algn="just"/>
+            <a:r>
+              <a:rPr lang="en-US" sz="1100" b="1" dirty="0">
                 <a:latin typeface="Arial" panose="020B0604020202020204" pitchFamily="34" charset="0"/>
                 <a:cs typeface="Arial" panose="020B0604020202020204" pitchFamily="34" charset="0"/>
                 <a:sym typeface="Wingdings" pitchFamily="2" charset="2"/>
               </a:rPr>
-              <a:t> [1550-1550.5] step 0.0000005</a:t>
-            </a:r>
-          </a:p>
-          <a:p>
-            <a:pPr algn="just"/>
-            <a:r>
-              <a:rPr lang="en-US" sz="1600" dirty="0">
-                <a:solidFill>
-                  <a:schemeClr val="tx1"/>
-                </a:solidFill>
+              <a:t>Case 2</a:t>
+            </a:r>
+            <a:r>
+              <a:rPr lang="en-US" sz="1100" dirty="0">
                 <a:latin typeface="Arial" panose="020B0604020202020204" pitchFamily="34" charset="0"/>
                 <a:cs typeface="Arial" panose="020B0604020202020204" pitchFamily="34" charset="0"/>
                 <a:sym typeface="Wingdings" pitchFamily="2" charset="2"/>
               </a:rPr>
-              <a:t>Silicon waveguide model:</a:t>
-            </a:r>
-          </a:p>
-          <a:p>
-            <a:pPr algn="just"/>
-            <a:r>
-              <a:rPr lang="en-US" sz="1600" dirty="0" err="1">
-                <a:solidFill>
-                  <a:schemeClr val="tx1"/>
-                </a:solidFill>
+              <a:t>. Simulate for Ka=0.1 for all </a:t>
+            </a:r>
+            <a:r>
+              <a:rPr lang="en-US" sz="1100" dirty="0" err="1">
                 <a:latin typeface="Arial" panose="020B0604020202020204" pitchFamily="34" charset="0"/>
                 <a:cs typeface="Arial" panose="020B0604020202020204" pitchFamily="34" charset="0"/>
                 <a:sym typeface="Wingdings" pitchFamily="2" charset="2"/>
               </a:rPr>
-              <a:t>n_eff</a:t>
-            </a:r>
-            <a:r>
-              <a:rPr lang="en-US" sz="1600" dirty="0">
-                <a:solidFill>
-                  <a:schemeClr val="tx1"/>
-                </a:solidFill>
+              <a:t>wvl</a:t>
+            </a:r>
+            <a:r>
+              <a:rPr lang="en-US" sz="1100" dirty="0">
                 <a:latin typeface="Arial" panose="020B0604020202020204" pitchFamily="34" charset="0"/>
                 <a:cs typeface="Arial" panose="020B0604020202020204" pitchFamily="34" charset="0"/>
                 <a:sym typeface="Wingdings" pitchFamily="2" charset="2"/>
               </a:rPr>
-              <a:t> = 2.38, </a:t>
+              <a:t> </a:t>
             </a:r>
           </a:p>
           <a:p>
             <a:pPr algn="just"/>
             <a:r>
-              <a:rPr lang="en-US" sz="1600" dirty="0" err="1">
-                <a:solidFill>
-                  <a:schemeClr val="tx1"/>
-                </a:solidFill>
-                <a:latin typeface="Arial" panose="020B0604020202020204" pitchFamily="34" charset="0"/>
-                <a:cs typeface="Arial" panose="020B0604020202020204" pitchFamily="34" charset="0"/>
-                <a:sym typeface="Wingdings" pitchFamily="2" charset="2"/>
-              </a:rPr>
-              <a:t>n_g</a:t>
-            </a:r>
-            <a:r>
-              <a:rPr lang="en-US" sz="1600" dirty="0">
-                <a:solidFill>
-                  <a:schemeClr val="tx1"/>
-                </a:solidFill>
-                <a:latin typeface="Arial" panose="020B0604020202020204" pitchFamily="34" charset="0"/>
-                <a:cs typeface="Arial" panose="020B0604020202020204" pitchFamily="34" charset="0"/>
-                <a:sym typeface="Wingdings" pitchFamily="2" charset="2"/>
-              </a:rPr>
-              <a:t> = 4.25, </a:t>
-            </a:r>
-          </a:p>
-          <a:p>
-            <a:pPr algn="just"/>
-            <a:r>
-              <a:rPr lang="en-US" sz="1600" dirty="0">
-                <a:solidFill>
-                  <a:schemeClr val="tx1"/>
-                </a:solidFill>
-                <a:latin typeface="Arial" panose="020B0604020202020204" pitchFamily="34" charset="0"/>
-                <a:cs typeface="Arial" panose="020B0604020202020204" pitchFamily="34" charset="0"/>
-                <a:sym typeface="Wingdings" pitchFamily="2" charset="2"/>
-              </a:rPr>
-              <a:t>D=0,</a:t>
-            </a:r>
-          </a:p>
-          <a:p>
-            <a:pPr algn="just"/>
-            <a:r>
-              <a:rPr lang="en-US" sz="1600" dirty="0" err="1">
-                <a:solidFill>
-                  <a:schemeClr val="tx1"/>
-                </a:solidFill>
-                <a:latin typeface="Arial" panose="020B0604020202020204" pitchFamily="34" charset="0"/>
-                <a:cs typeface="Arial" panose="020B0604020202020204" pitchFamily="34" charset="0"/>
-                <a:sym typeface="Wingdings" pitchFamily="2" charset="2"/>
-              </a:rPr>
-              <a:t>L_base</a:t>
-            </a:r>
-            <a:r>
-              <a:rPr lang="en-US" sz="1600" dirty="0">
-                <a:solidFill>
-                  <a:schemeClr val="tx1"/>
-                </a:solidFill>
-                <a:latin typeface="Arial" panose="020B0604020202020204" pitchFamily="34" charset="0"/>
-                <a:cs typeface="Arial" panose="020B0604020202020204" pitchFamily="34" charset="0"/>
-                <a:sym typeface="Wingdings" pitchFamily="2" charset="2"/>
-              </a:rPr>
-              <a:t>=1000</a:t>
-            </a:r>
-          </a:p>
-          <a:p>
-            <a:pPr algn="just"/>
-            <a:r>
-              <a:rPr lang="en-US" sz="1600" dirty="0">
-                <a:solidFill>
-                  <a:schemeClr val="tx1"/>
-                </a:solidFill>
-                <a:latin typeface="Arial" panose="020B0604020202020204" pitchFamily="34" charset="0"/>
-                <a:cs typeface="Arial" panose="020B0604020202020204" pitchFamily="34" charset="0"/>
-                <a:sym typeface="Wingdings" pitchFamily="2" charset="2"/>
-              </a:rPr>
-              <a:t>dL = </a:t>
-            </a:r>
-            <a:r>
-              <a:rPr lang="en-US" sz="1600" dirty="0" err="1">
-                <a:solidFill>
-                  <a:schemeClr val="tx1"/>
-                </a:solidFill>
-                <a:latin typeface="Arial" panose="020B0604020202020204" pitchFamily="34" charset="0"/>
-                <a:cs typeface="Arial" panose="020B0604020202020204" pitchFamily="34" charset="0"/>
-                <a:sym typeface="Wingdings" pitchFamily="2" charset="2"/>
-              </a:rPr>
-              <a:t>L_base</a:t>
-            </a:r>
-            <a:r>
-              <a:rPr lang="en-US" sz="1600" dirty="0">
-                <a:solidFill>
-                  <a:schemeClr val="tx1"/>
-                </a:solidFill>
-                <a:latin typeface="Arial" panose="020B0604020202020204" pitchFamily="34" charset="0"/>
-                <a:cs typeface="Arial" panose="020B0604020202020204" pitchFamily="34" charset="0"/>
-                <a:sym typeface="Wingdings" pitchFamily="2" charset="2"/>
-              </a:rPr>
-              <a:t> + 55960.0840224255;</a:t>
-            </a:r>
-          </a:p>
-          <a:p>
-            <a:pPr algn="just"/>
-            <a:r>
-              <a:rPr lang="en-US" sz="1600" dirty="0">
-                <a:solidFill>
-                  <a:schemeClr val="tx1"/>
-                </a:solidFill>
-                <a:latin typeface="Arial" panose="020B0604020202020204" pitchFamily="34" charset="0"/>
-                <a:cs typeface="Arial" panose="020B0604020202020204" pitchFamily="34" charset="0"/>
-                <a:sym typeface="Wingdings" pitchFamily="2" charset="2"/>
-              </a:rPr>
-              <a:t>loss = 4 dB / cm</a:t>
-            </a:r>
-          </a:p>
-          <a:p>
-            <a:pPr algn="just"/>
-            <a:r>
-              <a:rPr lang="en-US" sz="1600" b="1" dirty="0">
-                <a:solidFill>
-                  <a:schemeClr val="tx1"/>
-                </a:solidFill>
-                <a:latin typeface="Arial" panose="020B0604020202020204" pitchFamily="34" charset="0"/>
-                <a:cs typeface="Arial" panose="020B0604020202020204" pitchFamily="34" charset="0"/>
-                <a:sym typeface="Wingdings" pitchFamily="2" charset="2"/>
-              </a:rPr>
-              <a:t>Case 1</a:t>
-            </a:r>
-            <a:r>
-              <a:rPr lang="en-US" sz="1600" dirty="0">
-                <a:solidFill>
-                  <a:schemeClr val="tx1"/>
-                </a:solidFill>
-                <a:latin typeface="Arial" panose="020B0604020202020204" pitchFamily="34" charset="0"/>
-                <a:cs typeface="Arial" panose="020B0604020202020204" pitchFamily="34" charset="0"/>
-                <a:sym typeface="Wingdings" pitchFamily="2" charset="2"/>
-              </a:rPr>
-              <a:t>. Simulate for Ka = </a:t>
-            </a:r>
-            <a:r>
-              <a:rPr lang="en-US" sz="1600" dirty="0" err="1">
-                <a:solidFill>
-                  <a:schemeClr val="tx1"/>
-                </a:solidFill>
+              <a:rPr lang="en-US" sz="1100" dirty="0" err="1">
                 <a:latin typeface="Arial" panose="020B0604020202020204" pitchFamily="34" charset="0"/>
                 <a:cs typeface="Arial" panose="020B0604020202020204" pitchFamily="34" charset="0"/>
                 <a:sym typeface="Wingdings" pitchFamily="2" charset="2"/>
@@ -7091,177 +6024,91 @@
               <a:t>Kb</a:t>
             </a:r>
             <a:r>
-              <a:rPr lang="en-US" sz="1600" dirty="0">
-                <a:solidFill>
-                  <a:schemeClr val="tx1"/>
-                </a:solidFill>
+              <a:rPr lang="en-US" sz="1100" dirty="0">
                 <a:latin typeface="Arial" panose="020B0604020202020204" pitchFamily="34" charset="0"/>
                 <a:cs typeface="Arial" panose="020B0604020202020204" pitchFamily="34" charset="0"/>
                 <a:sym typeface="Wingdings" pitchFamily="2" charset="2"/>
               </a:rPr>
-              <a:t> = 0.5 for all </a:t>
-            </a:r>
-            <a:r>
-              <a:rPr lang="en-US" sz="1600" dirty="0" err="1">
-                <a:solidFill>
-                  <a:schemeClr val="tx1"/>
-                </a:solidFill>
+              <a:t>=0.5 for all </a:t>
+            </a:r>
+            <a:r>
+              <a:rPr lang="en-US" sz="1100" dirty="0" err="1">
                 <a:latin typeface="Arial" panose="020B0604020202020204" pitchFamily="34" charset="0"/>
                 <a:cs typeface="Arial" panose="020B0604020202020204" pitchFamily="34" charset="0"/>
                 <a:sym typeface="Wingdings" pitchFamily="2" charset="2"/>
               </a:rPr>
               <a:t>wvl</a:t>
             </a:r>
-            <a:endParaRPr lang="en-US" sz="1600" dirty="0">
-              <a:solidFill>
-                <a:schemeClr val="tx1"/>
-              </a:solidFill>
-              <a:latin typeface="Arial" panose="020B0604020202020204" pitchFamily="34" charset="0"/>
-              <a:cs typeface="Arial" panose="020B0604020202020204" pitchFamily="34" charset="0"/>
-              <a:sym typeface="Wingdings" pitchFamily="2" charset="2"/>
-            </a:endParaRPr>
-          </a:p>
-          <a:p>
-            <a:pPr algn="just"/>
-            <a:r>
-              <a:rPr lang="en-US" sz="1600" b="1" dirty="0">
-                <a:solidFill>
-                  <a:schemeClr val="tx1"/>
-                </a:solidFill>
-                <a:latin typeface="Arial" panose="020B0604020202020204" pitchFamily="34" charset="0"/>
-                <a:cs typeface="Arial" panose="020B0604020202020204" pitchFamily="34" charset="0"/>
-                <a:sym typeface="Wingdings" pitchFamily="2" charset="2"/>
-              </a:rPr>
-              <a:t>Case 2</a:t>
-            </a:r>
-            <a:r>
-              <a:rPr lang="en-US" sz="1600" dirty="0">
-                <a:solidFill>
-                  <a:schemeClr val="tx1"/>
-                </a:solidFill>
-                <a:latin typeface="Arial" panose="020B0604020202020204" pitchFamily="34" charset="0"/>
-                <a:cs typeface="Arial" panose="020B0604020202020204" pitchFamily="34" charset="0"/>
-                <a:sym typeface="Wingdings" pitchFamily="2" charset="2"/>
-              </a:rPr>
-              <a:t>. Simulate for Ka=0.1 for all </a:t>
-            </a:r>
-            <a:r>
-              <a:rPr lang="en-US" sz="1600" dirty="0" err="1">
-                <a:solidFill>
-                  <a:schemeClr val="tx1"/>
-                </a:solidFill>
-                <a:latin typeface="Arial" panose="020B0604020202020204" pitchFamily="34" charset="0"/>
-                <a:cs typeface="Arial" panose="020B0604020202020204" pitchFamily="34" charset="0"/>
-                <a:sym typeface="Wingdings" pitchFamily="2" charset="2"/>
-              </a:rPr>
-              <a:t>wvl</a:t>
-            </a:r>
-            <a:endParaRPr lang="en-US" sz="1600" dirty="0">
-              <a:solidFill>
-                <a:schemeClr val="tx1"/>
-              </a:solidFill>
-              <a:latin typeface="Arial" panose="020B0604020202020204" pitchFamily="34" charset="0"/>
-              <a:cs typeface="Arial" panose="020B0604020202020204" pitchFamily="34" charset="0"/>
-              <a:sym typeface="Wingdings" pitchFamily="2" charset="2"/>
-            </a:endParaRPr>
-          </a:p>
-          <a:p>
-            <a:pPr algn="just"/>
-            <a:r>
-              <a:rPr lang="en-US" sz="1600" dirty="0" err="1">
-                <a:solidFill>
-                  <a:schemeClr val="tx1"/>
-                </a:solidFill>
-                <a:latin typeface="Arial" panose="020B0604020202020204" pitchFamily="34" charset="0"/>
-                <a:cs typeface="Arial" panose="020B0604020202020204" pitchFamily="34" charset="0"/>
-                <a:sym typeface="Wingdings" pitchFamily="2" charset="2"/>
-              </a:rPr>
-              <a:t>Kb</a:t>
-            </a:r>
-            <a:r>
-              <a:rPr lang="en-US" sz="1600" dirty="0">
-                <a:solidFill>
-                  <a:schemeClr val="tx1"/>
-                </a:solidFill>
-                <a:latin typeface="Arial" panose="020B0604020202020204" pitchFamily="34" charset="0"/>
-                <a:cs typeface="Arial" panose="020B0604020202020204" pitchFamily="34" charset="0"/>
-                <a:sym typeface="Wingdings" pitchFamily="2" charset="2"/>
-              </a:rPr>
-              <a:t>=0.5 for all </a:t>
-            </a:r>
-            <a:r>
-              <a:rPr lang="en-US" sz="1600" dirty="0" err="1">
-                <a:solidFill>
-                  <a:schemeClr val="tx1"/>
-                </a:solidFill>
-                <a:latin typeface="Arial" panose="020B0604020202020204" pitchFamily="34" charset="0"/>
-                <a:cs typeface="Arial" panose="020B0604020202020204" pitchFamily="34" charset="0"/>
-                <a:sym typeface="Wingdings" pitchFamily="2" charset="2"/>
-              </a:rPr>
-              <a:t>wvl</a:t>
-            </a:r>
-            <a:endParaRPr lang="en-US" sz="1600" dirty="0">
-              <a:solidFill>
-                <a:schemeClr val="tx1"/>
-              </a:solidFill>
+            <a:endParaRPr lang="en-US" sz="1100" dirty="0">
               <a:latin typeface="Arial" panose="020B0604020202020204" pitchFamily="34" charset="0"/>
               <a:cs typeface="Arial" panose="020B0604020202020204" pitchFamily="34" charset="0"/>
             </a:endParaRPr>
           </a:p>
-        </p:txBody>
-      </p:sp>
-      <p:sp>
-        <p:nvSpPr>
-          <p:cNvPr id="9" name="CuadroTexto 8">
+          <a:p>
+            <a:endParaRPr lang="it-IT" sz="1050" dirty="0"/>
+          </a:p>
+        </p:txBody>
+      </p:sp>
+      <p:pic>
+        <p:nvPicPr>
+          <p:cNvPr id="5" name="Immagine 4">
             <a:extLst>
               <a:ext uri="{FF2B5EF4-FFF2-40B4-BE49-F238E27FC236}">
-                <a16:creationId xmlns:a16="http://schemas.microsoft.com/office/drawing/2014/main" id="{EF71FD03-8141-88A1-69BA-49588EB48896}"/>
+                <a16:creationId xmlns:a16="http://schemas.microsoft.com/office/drawing/2014/main" id="{615C2D43-A703-2595-C2D2-5CA7619308CA}"/>
               </a:ext>
             </a:extLst>
           </p:cNvPr>
-          <p:cNvSpPr txBox="1"/>
+          <p:cNvPicPr>
+            <a:picLocks noChangeAspect="1"/>
+          </p:cNvPicPr>
           <p:nvPr/>
-        </p:nvSpPr>
-        <p:spPr>
-          <a:xfrm>
-            <a:off x="1690195" y="2494306"/>
-            <a:ext cx="3171061" cy="1154162"/>
+        </p:nvPicPr>
+        <p:blipFill>
+          <a:blip r:embed="rId4"/>
+          <a:stretch>
+            <a:fillRect/>
+          </a:stretch>
+        </p:blipFill>
+        <p:spPr>
+          <a:xfrm>
+            <a:off x="6609413" y="3394143"/>
+            <a:ext cx="5028341" cy="2852737"/>
           </a:xfrm>
           <a:prstGeom prst="rect">
             <a:avLst/>
           </a:prstGeom>
-          <a:noFill/>
-        </p:spPr>
-        <p:txBody>
-          <a:bodyPr wrap="none" rtlCol="0">
-            <a:spAutoFit/>
-          </a:bodyPr>
-          <a:lstStyle/>
-          <a:p>
-            <a:pPr algn="ctr"/>
-            <a:r>
-              <a:rPr lang="es-ES" dirty="0"/>
-              <a:t>MZI transfer </a:t>
-            </a:r>
-            <a:r>
-              <a:rPr lang="es-ES" dirty="0" err="1"/>
-              <a:t>functions</a:t>
-            </a:r>
-            <a:endParaRPr lang="en-US" dirty="0"/>
-          </a:p>
-          <a:p>
-            <a:pPr algn="ctr"/>
-            <a:endParaRPr lang="en-US" dirty="0"/>
-          </a:p>
-          <a:p>
-            <a:pPr algn="ctr"/>
-            <a:r>
-              <a:rPr lang="en-US" dirty="0"/>
-              <a:t>Paste plot here</a:t>
-            </a:r>
-          </a:p>
-        </p:txBody>
-      </p:sp>
+        </p:spPr>
+      </p:pic>
+      <p:pic>
+        <p:nvPicPr>
+          <p:cNvPr id="9" name="Immagine 8">
+            <a:extLst>
+              <a:ext uri="{FF2B5EF4-FFF2-40B4-BE49-F238E27FC236}">
+                <a16:creationId xmlns:a16="http://schemas.microsoft.com/office/drawing/2014/main" id="{ABBF676A-A01E-80ED-74C9-78883EEAE8B1}"/>
+              </a:ext>
+            </a:extLst>
+          </p:cNvPr>
+          <p:cNvPicPr>
+            <a:picLocks noChangeAspect="1"/>
+          </p:cNvPicPr>
+          <p:nvPr/>
+        </p:nvPicPr>
+        <p:blipFill>
+          <a:blip r:embed="rId5"/>
+          <a:stretch>
+            <a:fillRect/>
+          </a:stretch>
+        </p:blipFill>
+        <p:spPr>
+          <a:xfrm>
+            <a:off x="6629400" y="518921"/>
+            <a:ext cx="5084768" cy="2852737"/>
+          </a:xfrm>
+          <a:prstGeom prst="rect">
+            <a:avLst/>
+          </a:prstGeom>
+        </p:spPr>
+      </p:pic>
     </p:spTree>
     <p:extLst>
       <p:ext uri="{BB962C8B-B14F-4D97-AF65-F5344CB8AC3E}">
@@ -7364,437 +6211,32 @@
         </p:nvSpPr>
         <p:spPr>
           <a:xfrm>
-            <a:off x="611029" y="4860335"/>
-            <a:ext cx="11199530" cy="1200329"/>
-          </a:xfrm>
-          <a:prstGeom prst="rect">
-            <a:avLst/>
-          </a:prstGeom>
-          <a:solidFill>
-            <a:schemeClr val="bg1">
-              <a:lumMod val="95000"/>
-            </a:schemeClr>
-          </a:solidFill>
-          <a:ln w="28575">
-            <a:solidFill>
-              <a:srgbClr val="E0700D"/>
-            </a:solidFill>
-          </a:ln>
-        </p:spPr>
-        <p:txBody>
-          <a:bodyPr wrap="square" rtlCol="0">
-            <a:spAutoFit/>
-          </a:bodyPr>
-          <a:lstStyle/>
-          <a:p>
-            <a:pPr algn="just"/>
-            <a:r>
-              <a:rPr lang="en-US" sz="1200" dirty="0">
-                <a:latin typeface="Arial" panose="020B0604020202020204" pitchFamily="34" charset="0"/>
-                <a:cs typeface="Arial" panose="020B0604020202020204" pitchFamily="34" charset="0"/>
-              </a:rPr>
-              <a:t>Comment results: describer the transfer functions. which is the FSR? How is it related to the ring perimeter? </a:t>
-            </a:r>
-          </a:p>
-          <a:p>
-            <a:pPr algn="just"/>
-            <a:endParaRPr lang="en-US" sz="1200" dirty="0">
-              <a:latin typeface="Arial" panose="020B0604020202020204" pitchFamily="34" charset="0"/>
-              <a:cs typeface="Arial" panose="020B0604020202020204" pitchFamily="34" charset="0"/>
-            </a:endParaRPr>
-          </a:p>
-          <a:p>
-            <a:pPr algn="just"/>
-            <a:endParaRPr lang="en-US" sz="1200" dirty="0">
-              <a:latin typeface="Arial" panose="020B0604020202020204" pitchFamily="34" charset="0"/>
-              <a:cs typeface="Arial" panose="020B0604020202020204" pitchFamily="34" charset="0"/>
-            </a:endParaRPr>
-          </a:p>
-          <a:p>
-            <a:pPr algn="just"/>
-            <a:r>
-              <a:rPr lang="en-US" sz="1200" dirty="0">
-                <a:latin typeface="Arial" panose="020B0604020202020204" pitchFamily="34" charset="0"/>
-                <a:cs typeface="Arial" panose="020B0604020202020204" pitchFamily="34" charset="0"/>
-              </a:rPr>
-              <a:t>Show a numeric calculation of the FSR and length difference matching the results in the graph,</a:t>
-            </a:r>
-          </a:p>
-          <a:p>
-            <a:pPr algn="just"/>
-            <a:endParaRPr lang="en-US" sz="1200" dirty="0">
-              <a:latin typeface="Arial" panose="020B0604020202020204" pitchFamily="34" charset="0"/>
-              <a:cs typeface="Arial" panose="020B0604020202020204" pitchFamily="34" charset="0"/>
-            </a:endParaRPr>
-          </a:p>
-          <a:p>
-            <a:pPr algn="just"/>
-            <a:endParaRPr lang="en-US" sz="1200" dirty="0">
-              <a:latin typeface="Arial" panose="020B0604020202020204" pitchFamily="34" charset="0"/>
-              <a:cs typeface="Arial" panose="020B0604020202020204" pitchFamily="34" charset="0"/>
-            </a:endParaRPr>
-          </a:p>
-        </p:txBody>
-      </p:sp>
-      <p:sp>
-        <p:nvSpPr>
-          <p:cNvPr id="11" name="Rectángulo 10">
-            <a:extLst>
-              <a:ext uri="{FF2B5EF4-FFF2-40B4-BE49-F238E27FC236}">
-                <a16:creationId xmlns:a16="http://schemas.microsoft.com/office/drawing/2014/main" id="{B811A5F9-C0B5-716C-70FB-9472E1BC2CD3}"/>
-              </a:ext>
-            </a:extLst>
-          </p:cNvPr>
-          <p:cNvSpPr/>
-          <p:nvPr/>
-        </p:nvSpPr>
-        <p:spPr>
-          <a:xfrm>
-            <a:off x="611030" y="1418373"/>
-            <a:ext cx="3810000" cy="3306028"/>
+            <a:off x="7546150" y="1524000"/>
+            <a:ext cx="4280278" cy="2308324"/>
           </a:xfrm>
           <a:prstGeom prst="rect">
             <a:avLst/>
           </a:prstGeom>
           <a:noFill/>
           <a:ln w="28575">
-            <a:solidFill>
-              <a:srgbClr val="E0700D"/>
-            </a:solidFill>
+            <a:noFill/>
           </a:ln>
         </p:spPr>
-        <p:style>
-          <a:lnRef idx="2">
-            <a:schemeClr val="accent1">
-              <a:shade val="15000"/>
-            </a:schemeClr>
-          </a:lnRef>
-          <a:fillRef idx="1">
-            <a:schemeClr val="accent1"/>
-          </a:fillRef>
-          <a:effectRef idx="0">
-            <a:schemeClr val="accent1"/>
-          </a:effectRef>
-          <a:fontRef idx="minor">
-            <a:schemeClr val="lt1"/>
-          </a:fontRef>
-        </p:style>
-        <p:txBody>
-          <a:bodyPr rtlCol="0" anchor="ctr"/>
-          <a:lstStyle/>
-          <a:p>
-            <a:pPr algn="ctr"/>
-            <a:endParaRPr lang="en-US"/>
-          </a:p>
-        </p:txBody>
-      </p:sp>
-      <p:sp>
-        <p:nvSpPr>
-          <p:cNvPr id="12" name="CuadroTexto 11">
-            <a:extLst>
-              <a:ext uri="{FF2B5EF4-FFF2-40B4-BE49-F238E27FC236}">
-                <a16:creationId xmlns:a16="http://schemas.microsoft.com/office/drawing/2014/main" id="{1D17C364-5A66-F740-B152-8B41A2A4EF26}"/>
-              </a:ext>
-            </a:extLst>
-          </p:cNvPr>
-          <p:cNvSpPr txBox="1"/>
-          <p:nvPr/>
-        </p:nvSpPr>
-        <p:spPr>
-          <a:xfrm>
-            <a:off x="5536543" y="2494307"/>
-            <a:ext cx="2033313" cy="1323439"/>
-          </a:xfrm>
-          <a:prstGeom prst="rect">
-            <a:avLst/>
-          </a:prstGeom>
-          <a:noFill/>
-        </p:spPr>
-        <p:txBody>
-          <a:bodyPr wrap="none" rtlCol="0">
+        <p:txBody>
+          <a:bodyPr wrap="square" rtlCol="0">
             <a:spAutoFit/>
           </a:bodyPr>
           <a:lstStyle/>
           <a:p>
-            <a:pPr algn="ctr"/>
-            <a:r>
-              <a:rPr lang="es-ES" sz="2000" dirty="0"/>
-              <a:t>Single ring</a:t>
-            </a:r>
-          </a:p>
-          <a:p>
-            <a:pPr algn="ctr"/>
-            <a:r>
-              <a:rPr lang="es-ES" sz="2000" dirty="0"/>
-              <a:t>transfer </a:t>
-            </a:r>
-            <a:r>
-              <a:rPr lang="es-ES" sz="2000" dirty="0" err="1"/>
-              <a:t>functions</a:t>
-            </a:r>
-            <a:endParaRPr lang="es-ES" sz="2000" dirty="0"/>
-          </a:p>
-          <a:p>
-            <a:pPr algn="ctr"/>
-            <a:endParaRPr lang="es-ES" sz="2000" dirty="0"/>
-          </a:p>
-          <a:p>
-            <a:pPr algn="ctr"/>
-            <a:r>
-              <a:rPr lang="es-ES" sz="2000" dirty="0" err="1"/>
-              <a:t>Logaritmic</a:t>
-            </a:r>
-            <a:r>
-              <a:rPr lang="es-ES" sz="2000" dirty="0"/>
-              <a:t> </a:t>
-            </a:r>
-            <a:r>
-              <a:rPr lang="es-ES" sz="2000" dirty="0" err="1"/>
-              <a:t>units</a:t>
-            </a:r>
-            <a:endParaRPr lang="en-US" sz="2000" dirty="0"/>
-          </a:p>
-        </p:txBody>
-      </p:sp>
-      <p:sp>
-        <p:nvSpPr>
-          <p:cNvPr id="3" name="Rectángulo 2">
-            <a:extLst>
-              <a:ext uri="{FF2B5EF4-FFF2-40B4-BE49-F238E27FC236}">
-                <a16:creationId xmlns:a16="http://schemas.microsoft.com/office/drawing/2014/main" id="{5FB43DF1-4048-35BF-BD58-4BF2A341D2EF}"/>
-              </a:ext>
-            </a:extLst>
-          </p:cNvPr>
-          <p:cNvSpPr/>
-          <p:nvPr/>
-        </p:nvSpPr>
-        <p:spPr>
-          <a:xfrm>
-            <a:off x="8610601" y="1418373"/>
-            <a:ext cx="3199959" cy="3306028"/>
-          </a:xfrm>
-          <a:prstGeom prst="rect">
-            <a:avLst/>
-          </a:prstGeom>
-          <a:solidFill>
-            <a:schemeClr val="bg1">
-              <a:lumMod val="95000"/>
-            </a:schemeClr>
-          </a:solidFill>
-          <a:ln w="28575">
-            <a:solidFill>
-              <a:srgbClr val="E0700D"/>
-            </a:solidFill>
-          </a:ln>
-        </p:spPr>
-        <p:style>
-          <a:lnRef idx="2">
-            <a:schemeClr val="accent1">
-              <a:shade val="15000"/>
-            </a:schemeClr>
-          </a:lnRef>
-          <a:fillRef idx="1">
-            <a:schemeClr val="accent1"/>
-          </a:fillRef>
-          <a:effectRef idx="0">
-            <a:schemeClr val="accent1"/>
-          </a:effectRef>
-          <a:fontRef idx="minor">
-            <a:schemeClr val="lt1"/>
-          </a:fontRef>
-        </p:style>
-        <p:txBody>
-          <a:bodyPr rtlCol="0" anchor="t" anchorCtr="0"/>
-          <a:lstStyle/>
-          <a:p>
             <a:pPr algn="just"/>
             <a:r>
-              <a:rPr lang="en-US" sz="1200" b="1" dirty="0">
-                <a:solidFill>
-                  <a:schemeClr val="tx1"/>
-                </a:solidFill>
-                <a:latin typeface="Arial" panose="020B0604020202020204" pitchFamily="34" charset="0"/>
-                <a:cs typeface="Arial" panose="020B0604020202020204" pitchFamily="34" charset="0"/>
-              </a:rPr>
-              <a:t>Hints:</a:t>
-            </a:r>
-          </a:p>
-          <a:p>
-            <a:pPr algn="just"/>
-            <a:endParaRPr lang="en-US" sz="1200" b="1" dirty="0">
-              <a:solidFill>
-                <a:schemeClr val="tx1"/>
-              </a:solidFill>
+              <a:rPr lang="en-US" dirty="0"/>
+              <a:t>The ring shows periodic dips every 24 nm. Between resonances transmission stays near 1 and at resonance light couples into the ring and gets absorbed by propagation loss. The FSR calculated from the formula with ng equal to 2.0 and L equal to 50 µm gives exactly 24.025 nm which matches the plot.</a:t>
+            </a:r>
+            <a:endParaRPr lang="en-US" sz="1600" dirty="0">
               <a:latin typeface="Arial" panose="020B0604020202020204" pitchFamily="34" charset="0"/>
               <a:cs typeface="Arial" panose="020B0604020202020204" pitchFamily="34" charset="0"/>
             </a:endParaRPr>
-          </a:p>
-          <a:p>
-            <a:pPr algn="just"/>
-            <a:r>
-              <a:rPr lang="en-US" sz="1200" dirty="0">
-                <a:solidFill>
-                  <a:schemeClr val="tx1"/>
-                </a:solidFill>
-                <a:latin typeface="Arial" panose="020B0604020202020204" pitchFamily="34" charset="0"/>
-                <a:cs typeface="Arial" panose="020B0604020202020204" pitchFamily="34" charset="0"/>
-              </a:rPr>
-              <a:t>None </a:t>
-            </a:r>
-            <a:r>
-              <a:rPr lang="en-US" sz="1200" dirty="0">
-                <a:solidFill>
-                  <a:schemeClr val="tx1"/>
-                </a:solidFill>
-                <a:latin typeface="Arial" panose="020B0604020202020204" pitchFamily="34" charset="0"/>
-                <a:cs typeface="Arial" panose="020B0604020202020204" pitchFamily="34" charset="0"/>
-                <a:sym typeface="Wingdings" pitchFamily="2" charset="2"/>
-              </a:rPr>
-              <a:t> </a:t>
-            </a:r>
-            <a:endParaRPr lang="en-US" sz="1200" dirty="0">
-              <a:solidFill>
-                <a:schemeClr val="tx1"/>
-              </a:solidFill>
-              <a:latin typeface="Arial" panose="020B0604020202020204" pitchFamily="34" charset="0"/>
-              <a:cs typeface="Arial" panose="020B0604020202020204" pitchFamily="34" charset="0"/>
-            </a:endParaRPr>
-          </a:p>
-          <a:p>
-            <a:pPr algn="just"/>
-            <a:endParaRPr lang="en-US" sz="1200" dirty="0">
-              <a:solidFill>
-                <a:schemeClr val="tx1"/>
-              </a:solidFill>
-              <a:latin typeface="Arial" panose="020B0604020202020204" pitchFamily="34" charset="0"/>
-              <a:cs typeface="Arial" panose="020B0604020202020204" pitchFamily="34" charset="0"/>
-            </a:endParaRPr>
-          </a:p>
-          <a:p>
-            <a:pPr algn="just"/>
-            <a:endParaRPr lang="en-US" sz="1200" dirty="0">
-              <a:solidFill>
-                <a:schemeClr val="tx1"/>
-              </a:solidFill>
-              <a:latin typeface="Arial" panose="020B0604020202020204" pitchFamily="34" charset="0"/>
-              <a:cs typeface="Arial" panose="020B0604020202020204" pitchFamily="34" charset="0"/>
-            </a:endParaRPr>
-          </a:p>
-        </p:txBody>
-      </p:sp>
-      <p:sp>
-        <p:nvSpPr>
-          <p:cNvPr id="14" name="Rectángulo 13">
-            <a:extLst>
-              <a:ext uri="{FF2B5EF4-FFF2-40B4-BE49-F238E27FC236}">
-                <a16:creationId xmlns:a16="http://schemas.microsoft.com/office/drawing/2014/main" id="{6AA857E7-5C39-DCE1-10B5-40300FCF4B26}"/>
-              </a:ext>
-            </a:extLst>
-          </p:cNvPr>
-          <p:cNvSpPr/>
-          <p:nvPr/>
-        </p:nvSpPr>
-        <p:spPr>
-          <a:xfrm>
-            <a:off x="4648200" y="1418373"/>
-            <a:ext cx="3810000" cy="3306028"/>
-          </a:xfrm>
-          <a:prstGeom prst="rect">
-            <a:avLst/>
-          </a:prstGeom>
-          <a:noFill/>
-          <a:ln w="28575">
-            <a:solidFill>
-              <a:srgbClr val="E0700D"/>
-            </a:solidFill>
-          </a:ln>
-        </p:spPr>
-        <p:style>
-          <a:lnRef idx="2">
-            <a:schemeClr val="accent1">
-              <a:shade val="15000"/>
-            </a:schemeClr>
-          </a:lnRef>
-          <a:fillRef idx="1">
-            <a:schemeClr val="accent1"/>
-          </a:fillRef>
-          <a:effectRef idx="0">
-            <a:schemeClr val="accent1"/>
-          </a:effectRef>
-          <a:fontRef idx="minor">
-            <a:schemeClr val="lt1"/>
-          </a:fontRef>
-        </p:style>
-        <p:txBody>
-          <a:bodyPr rtlCol="0" anchor="ctr"/>
-          <a:lstStyle/>
-          <a:p>
-            <a:pPr algn="ctr"/>
-            <a:endParaRPr lang="en-US"/>
-          </a:p>
-        </p:txBody>
-      </p:sp>
-      <p:sp>
-        <p:nvSpPr>
-          <p:cNvPr id="15" name="CuadroTexto 14">
-            <a:extLst>
-              <a:ext uri="{FF2B5EF4-FFF2-40B4-BE49-F238E27FC236}">
-                <a16:creationId xmlns:a16="http://schemas.microsoft.com/office/drawing/2014/main" id="{54CF28B4-1346-F41D-2CD8-EA104ABBFB98}"/>
-              </a:ext>
-            </a:extLst>
-          </p:cNvPr>
-          <p:cNvSpPr txBox="1"/>
-          <p:nvPr/>
-        </p:nvSpPr>
-        <p:spPr>
-          <a:xfrm>
-            <a:off x="1499379" y="2478160"/>
-            <a:ext cx="2033313" cy="1323439"/>
-          </a:xfrm>
-          <a:prstGeom prst="rect">
-            <a:avLst/>
-          </a:prstGeom>
-          <a:noFill/>
-        </p:spPr>
-        <p:txBody>
-          <a:bodyPr wrap="none" rtlCol="0">
-            <a:spAutoFit/>
-          </a:bodyPr>
-          <a:lstStyle/>
-          <a:p>
-            <a:pPr algn="ctr"/>
-            <a:r>
-              <a:rPr lang="es-ES" sz="2000" dirty="0"/>
-              <a:t>Single ring</a:t>
-            </a:r>
-          </a:p>
-          <a:p>
-            <a:pPr algn="ctr"/>
-            <a:r>
-              <a:rPr lang="es-ES" sz="2000" dirty="0"/>
-              <a:t>transfer </a:t>
-            </a:r>
-            <a:r>
-              <a:rPr lang="es-ES" sz="2000" dirty="0" err="1"/>
-              <a:t>functions</a:t>
-            </a:r>
-            <a:endParaRPr lang="es-ES" sz="2000" dirty="0"/>
-          </a:p>
-          <a:p>
-            <a:pPr algn="ctr"/>
-            <a:endParaRPr lang="es-ES" sz="2000" dirty="0"/>
-          </a:p>
-          <a:p>
-            <a:pPr algn="ctr"/>
-            <a:r>
-              <a:rPr lang="es-ES" sz="2000" dirty="0"/>
-              <a:t>Linear </a:t>
-            </a:r>
-            <a:r>
-              <a:rPr lang="es-ES" sz="2000" dirty="0" err="1"/>
-              <a:t>units</a:t>
-            </a:r>
-            <a:endParaRPr lang="en-US" sz="2000" dirty="0"/>
           </a:p>
         </p:txBody>
       </p:sp>
@@ -7813,10 +6255,10 @@
           <p:nvPr/>
         </p:nvPicPr>
         <p:blipFill>
-          <a:blip>
+          <a:blip r:embed="rId2">
             <a:extLst>
               <a:ext uri="{96DAC541-7B7A-43D3-8B79-37D633B846F1}">
-                <asvg:svgBlip xmlns:asvg="http://schemas.microsoft.com/office/drawing/2016/SVG/main" r:embed="rId2"/>
+                <asvg:svgBlip xmlns:asvg="http://schemas.microsoft.com/office/drawing/2016/SVG/main" r:embed="rId3"/>
               </a:ext>
             </a:extLst>
           </a:blip>
@@ -7850,7 +6292,7 @@
         </p:nvSpPr>
         <p:spPr>
           <a:xfrm>
-            <a:off x="685800" y="408883"/>
+            <a:off x="228600" y="118110"/>
             <a:ext cx="10994410" cy="718145"/>
           </a:xfrm>
           <a:prstGeom prst="rect">
@@ -7900,6 +6342,416 @@
           </a:p>
         </p:txBody>
       </p:sp>
+      <mc:AlternateContent xmlns:mc="http://schemas.openxmlformats.org/markup-compatibility/2006" xmlns:a14="http://schemas.microsoft.com/office/drawing/2010/main">
+        <mc:Choice Requires="a14">
+          <p:sp>
+            <p:nvSpPr>
+              <p:cNvPr id="18" name="CasellaDiTesto 17">
+                <a:extLst>
+                  <a:ext uri="{FF2B5EF4-FFF2-40B4-BE49-F238E27FC236}">
+                    <a16:creationId xmlns:a16="http://schemas.microsoft.com/office/drawing/2014/main" id="{85A27F01-714F-2778-F4E8-13C37B9579F7}"/>
+                  </a:ext>
+                </a:extLst>
+              </p:cNvPr>
+              <p:cNvSpPr txBox="1"/>
+              <p:nvPr/>
+            </p:nvSpPr>
+            <p:spPr>
+              <a:xfrm>
+                <a:off x="6923410" y="4386481"/>
+                <a:ext cx="5254358" cy="768608"/>
+              </a:xfrm>
+              <a:prstGeom prst="rect">
+                <a:avLst/>
+              </a:prstGeom>
+              <a:noFill/>
+            </p:spPr>
+            <p:txBody>
+              <a:bodyPr wrap="square" lIns="0" tIns="0" rIns="0" bIns="0" rtlCol="0">
+                <a:spAutoFit/>
+              </a:bodyPr>
+              <a:lstStyle/>
+              <a:p>
+                <a14:m>
+                  <m:oMath xmlns:m="http://schemas.openxmlformats.org/officeDocument/2006/math">
+                    <m:sSub>
+                      <m:sSubPr>
+                        <m:ctrlPr>
+                          <a:rPr lang="el-GR" sz="2400" i="1" smtClean="0">
+                            <a:latin typeface="Cambria Math" panose="02040503050406030204" pitchFamily="18" charset="0"/>
+                          </a:rPr>
+                        </m:ctrlPr>
+                      </m:sSubPr>
+                      <m:e>
+                        <m:r>
+                          <m:rPr>
+                            <m:nor/>
+                          </m:rPr>
+                          <a:rPr lang="el-GR" sz="2400"/>
+                          <m:t>Δλ</m:t>
+                        </m:r>
+                      </m:e>
+                      <m:sub>
+                        <m:r>
+                          <a:rPr lang="en-US" sz="2400" b="0" i="1" smtClean="0">
+                            <a:latin typeface="Cambria Math" panose="02040503050406030204" pitchFamily="18" charset="0"/>
+                          </a:rPr>
+                          <m:t>𝐹𝑆𝑅</m:t>
+                        </m:r>
+                      </m:sub>
+                    </m:sSub>
+                    <m:r>
+                      <a:rPr lang="en-US" sz="2400" i="1" smtClean="0">
+                        <a:latin typeface="Cambria Math" panose="02040503050406030204" pitchFamily="18" charset="0"/>
+                      </a:rPr>
+                      <m:t>=</m:t>
+                    </m:r>
+                    <m:f>
+                      <m:fPr>
+                        <m:ctrlPr>
+                          <a:rPr lang="en-US" sz="2400" i="1" smtClean="0">
+                            <a:latin typeface="Cambria Math" panose="02040503050406030204" pitchFamily="18" charset="0"/>
+                          </a:rPr>
+                        </m:ctrlPr>
+                      </m:fPr>
+                      <m:num>
+                        <m:sSup>
+                          <m:sSupPr>
+                            <m:ctrlPr>
+                              <a:rPr lang="en-US" sz="2400" i="1" smtClean="0">
+                                <a:latin typeface="Cambria Math" panose="02040503050406030204" pitchFamily="18" charset="0"/>
+                              </a:rPr>
+                            </m:ctrlPr>
+                          </m:sSupPr>
+                          <m:e>
+                            <m:sSub>
+                              <m:sSubPr>
+                                <m:ctrlPr>
+                                  <a:rPr lang="en-US" sz="2400" i="1" smtClean="0">
+                                    <a:latin typeface="Cambria Math" panose="02040503050406030204" pitchFamily="18" charset="0"/>
+                                  </a:rPr>
+                                </m:ctrlPr>
+                              </m:sSubPr>
+                              <m:e>
+                                <m:r>
+                                  <m:rPr>
+                                    <m:nor/>
+                                  </m:rPr>
+                                  <a:rPr lang="el-GR" sz="2400"/>
+                                  <m:t>λ</m:t>
+                                </m:r>
+                              </m:e>
+                              <m:sub>
+                                <m:r>
+                                  <a:rPr lang="en-US" sz="2400" b="0" i="1" smtClean="0">
+                                    <a:latin typeface="Cambria Math" panose="02040503050406030204" pitchFamily="18" charset="0"/>
+                                  </a:rPr>
+                                  <m:t>0</m:t>
+                                </m:r>
+                              </m:sub>
+                            </m:sSub>
+                          </m:e>
+                          <m:sup>
+                            <m:r>
+                              <a:rPr lang="en-US" sz="2400" b="0" i="1" smtClean="0">
+                                <a:latin typeface="Cambria Math" panose="02040503050406030204" pitchFamily="18" charset="0"/>
+                              </a:rPr>
+                              <m:t>2</m:t>
+                            </m:r>
+                          </m:sup>
+                        </m:sSup>
+                      </m:num>
+                      <m:den>
+                        <m:sSub>
+                          <m:sSubPr>
+                            <m:ctrlPr>
+                              <a:rPr lang="en-US" sz="2400" b="0" i="1" smtClean="0">
+                                <a:latin typeface="Cambria Math" panose="02040503050406030204" pitchFamily="18" charset="0"/>
+                              </a:rPr>
+                            </m:ctrlPr>
+                          </m:sSubPr>
+                          <m:e>
+                            <m:r>
+                              <m:rPr>
+                                <m:sty m:val="p"/>
+                              </m:rPr>
+                              <a:rPr lang="en-US" sz="2400" b="0" i="1" smtClean="0">
+                                <a:latin typeface="Cambria Math" panose="02040503050406030204" pitchFamily="18" charset="0"/>
+                              </a:rPr>
+                              <m:t>n</m:t>
+                            </m:r>
+                          </m:e>
+                          <m:sub>
+                            <m:r>
+                              <m:rPr>
+                                <m:nor/>
+                              </m:rPr>
+                              <a:rPr lang="it-IT" sz="2400"/>
+                              <m:t>g</m:t>
+                            </m:r>
+                          </m:sub>
+                        </m:sSub>
+                        <m:r>
+                          <a:rPr lang="en-US" sz="2400" b="0" i="1" smtClean="0">
+                            <a:latin typeface="Cambria Math" panose="02040503050406030204" pitchFamily="18" charset="0"/>
+                          </a:rPr>
+                          <m:t>∗</m:t>
+                        </m:r>
+                        <m:sSub>
+                          <m:sSubPr>
+                            <m:ctrlPr>
+                              <a:rPr lang="en-US" sz="2400" b="0" i="1" smtClean="0">
+                                <a:latin typeface="Cambria Math" panose="02040503050406030204" pitchFamily="18" charset="0"/>
+                              </a:rPr>
+                            </m:ctrlPr>
+                          </m:sSubPr>
+                          <m:e>
+                            <m:r>
+                              <m:rPr>
+                                <m:sty m:val="p"/>
+                              </m:rPr>
+                              <a:rPr lang="en-US" sz="2400" b="0" i="1" smtClean="0">
+                                <a:latin typeface="Cambria Math" panose="02040503050406030204" pitchFamily="18" charset="0"/>
+                              </a:rPr>
+                              <m:t>L</m:t>
+                            </m:r>
+                          </m:e>
+                          <m:sub>
+                            <m:r>
+                              <m:rPr>
+                                <m:sty m:val="p"/>
+                              </m:rPr>
+                              <a:rPr lang="en-US" sz="2400" b="0" i="1" smtClean="0">
+                                <a:latin typeface="Cambria Math" panose="02040503050406030204" pitchFamily="18" charset="0"/>
+                              </a:rPr>
+                              <m:t>r</m:t>
+                            </m:r>
+                          </m:sub>
+                        </m:sSub>
+                      </m:den>
+                    </m:f>
+                  </m:oMath>
+                </a14:m>
+                <a:r>
+                  <a:rPr lang="it-IT" sz="2400" dirty="0"/>
+                  <a:t> = </a:t>
+                </a:r>
+                <a14:m>
+                  <m:oMath xmlns:m="http://schemas.openxmlformats.org/officeDocument/2006/math">
+                    <m:f>
+                      <m:fPr>
+                        <m:ctrlPr>
+                          <a:rPr lang="it-IT" sz="2400" i="1">
+                            <a:latin typeface="Cambria Math" panose="02040503050406030204" pitchFamily="18" charset="0"/>
+                          </a:rPr>
+                        </m:ctrlPr>
+                      </m:fPr>
+                      <m:num>
+                        <m:sSup>
+                          <m:sSupPr>
+                            <m:ctrlPr>
+                              <a:rPr lang="en-US" sz="2400" i="1">
+                                <a:latin typeface="Cambria Math" panose="02040503050406030204" pitchFamily="18" charset="0"/>
+                              </a:rPr>
+                            </m:ctrlPr>
+                          </m:sSupPr>
+                          <m:e>
+                            <m:d>
+                              <m:dPr>
+                                <m:ctrlPr>
+                                  <a:rPr lang="en-US" sz="2400" i="1">
+                                    <a:latin typeface="Cambria Math" panose="02040503050406030204" pitchFamily="18" charset="0"/>
+                                  </a:rPr>
+                                </m:ctrlPr>
+                              </m:dPr>
+                              <m:e>
+                                <m:r>
+                                  <a:rPr lang="en-US" sz="2400" i="1">
+                                    <a:latin typeface="Cambria Math" panose="02040503050406030204" pitchFamily="18" charset="0"/>
+                                  </a:rPr>
+                                  <m:t>1.55∗</m:t>
+                                </m:r>
+                                <m:sSup>
+                                  <m:sSupPr>
+                                    <m:ctrlPr>
+                                      <a:rPr lang="en-US" sz="2400" i="1">
+                                        <a:latin typeface="Cambria Math" panose="02040503050406030204" pitchFamily="18" charset="0"/>
+                                      </a:rPr>
+                                    </m:ctrlPr>
+                                  </m:sSupPr>
+                                  <m:e>
+                                    <m:r>
+                                      <a:rPr lang="en-US" sz="2400" i="1">
+                                        <a:latin typeface="Cambria Math" panose="02040503050406030204" pitchFamily="18" charset="0"/>
+                                      </a:rPr>
+                                      <m:t>10</m:t>
+                                    </m:r>
+                                  </m:e>
+                                  <m:sup>
+                                    <m:r>
+                                      <a:rPr lang="en-US" sz="2400" i="1">
+                                        <a:latin typeface="Cambria Math" panose="02040503050406030204" pitchFamily="18" charset="0"/>
+                                      </a:rPr>
+                                      <m:t>−6</m:t>
+                                    </m:r>
+                                  </m:sup>
+                                </m:sSup>
+                              </m:e>
+                            </m:d>
+                          </m:e>
+                          <m:sup>
+                            <m:r>
+                              <a:rPr lang="it-IT" sz="2400" i="1">
+                                <a:latin typeface="Cambria Math" panose="02040503050406030204" pitchFamily="18" charset="0"/>
+                              </a:rPr>
+                              <m:t>2</m:t>
+                            </m:r>
+                          </m:sup>
+                        </m:sSup>
+                      </m:num>
+                      <m:den>
+                        <m:r>
+                          <a:rPr lang="en-US" sz="2400" b="0" i="1" smtClean="0">
+                            <a:latin typeface="Cambria Math" panose="02040503050406030204" pitchFamily="18" charset="0"/>
+                          </a:rPr>
+                          <m:t> </m:t>
+                        </m:r>
+                        <m:r>
+                          <a:rPr lang="en-US" sz="2400" i="1">
+                            <a:latin typeface="Cambria Math" panose="02040503050406030204" pitchFamily="18" charset="0"/>
+                          </a:rPr>
+                          <m:t>2.0∗</m:t>
+                        </m:r>
+                        <m:r>
+                          <a:rPr lang="en-US" sz="2400" b="0" i="1" smtClean="0">
+                            <a:latin typeface="Cambria Math" panose="02040503050406030204" pitchFamily="18" charset="0"/>
+                          </a:rPr>
+                          <m:t>50</m:t>
+                        </m:r>
+                        <m:r>
+                          <a:rPr lang="it-IT" sz="2400" i="1">
+                            <a:latin typeface="Cambria Math" panose="02040503050406030204" pitchFamily="18" charset="0"/>
+                          </a:rPr>
+                          <m:t>∗</m:t>
+                        </m:r>
+                        <m:sSup>
+                          <m:sSupPr>
+                            <m:ctrlPr>
+                              <a:rPr lang="it-IT" sz="2400" i="1">
+                                <a:latin typeface="Cambria Math" panose="02040503050406030204" pitchFamily="18" charset="0"/>
+                              </a:rPr>
+                            </m:ctrlPr>
+                          </m:sSupPr>
+                          <m:e>
+                            <m:r>
+                              <a:rPr lang="en-US" sz="2400" i="1">
+                                <a:latin typeface="Cambria Math" panose="02040503050406030204" pitchFamily="18" charset="0"/>
+                              </a:rPr>
+                              <m:t>10</m:t>
+                            </m:r>
+                          </m:e>
+                          <m:sup>
+                            <m:r>
+                              <a:rPr lang="en-US" sz="2400" i="1">
+                                <a:latin typeface="Cambria Math" panose="02040503050406030204" pitchFamily="18" charset="0"/>
+                              </a:rPr>
+                              <m:t>−</m:t>
+                            </m:r>
+                            <m:r>
+                              <a:rPr lang="en-US" sz="2400" b="0" i="1" smtClean="0">
+                                <a:latin typeface="Cambria Math" panose="02040503050406030204" pitchFamily="18" charset="0"/>
+                              </a:rPr>
+                              <m:t>6</m:t>
+                            </m:r>
+                          </m:sup>
+                        </m:sSup>
+                      </m:den>
+                    </m:f>
+                  </m:oMath>
+                </a14:m>
+                <a:r>
+                  <a:rPr lang="it-IT" sz="2400" dirty="0"/>
+                  <a:t> = 24.03nm</a:t>
+                </a:r>
+              </a:p>
+            </p:txBody>
+          </p:sp>
+        </mc:Choice>
+        <mc:Fallback xmlns="">
+          <p:sp>
+            <p:nvSpPr>
+              <p:cNvPr id="18" name="CasellaDiTesto 17">
+                <a:extLst>
+                  <a:ext uri="{FF2B5EF4-FFF2-40B4-BE49-F238E27FC236}">
+                    <a16:creationId xmlns:a16="http://schemas.microsoft.com/office/drawing/2014/main" id="{85A27F01-714F-2778-F4E8-13C37B9579F7}"/>
+                  </a:ext>
+                </a:extLst>
+              </p:cNvPr>
+              <p:cNvSpPr txBox="1">
+                <a:spLocks noRot="1" noChangeAspect="1" noMove="1" noResize="1" noEditPoints="1" noAdjustHandles="1" noChangeArrowheads="1" noChangeShapeType="1" noTextEdit="1"/>
+              </p:cNvSpPr>
+              <p:nvPr/>
+            </p:nvSpPr>
+            <p:spPr>
+              <a:xfrm>
+                <a:off x="6923410" y="4386481"/>
+                <a:ext cx="5254358" cy="768608"/>
+              </a:xfrm>
+              <a:prstGeom prst="rect">
+                <a:avLst/>
+              </a:prstGeom>
+              <a:blipFill>
+                <a:blip r:embed="rId5"/>
+                <a:stretch>
+                  <a:fillRect/>
+                </a:stretch>
+              </a:blipFill>
+            </p:spPr>
+            <p:txBody>
+              <a:bodyPr/>
+              <a:lstStyle/>
+              <a:p>
+                <a:r>
+                  <a:rPr lang="it-IT">
+                    <a:noFill/>
+                  </a:rPr>
+                  <a:t> </a:t>
+                </a:r>
+              </a:p>
+            </p:txBody>
+          </p:sp>
+        </mc:Fallback>
+      </mc:AlternateContent>
+      <p:pic>
+        <p:nvPicPr>
+          <p:cNvPr id="3" name="Immagine 2">
+            <a:extLst>
+              <a:ext uri="{FF2B5EF4-FFF2-40B4-BE49-F238E27FC236}">
+                <a16:creationId xmlns:a16="http://schemas.microsoft.com/office/drawing/2014/main" id="{673FA93F-967F-DB96-8E85-353D28B9E380}"/>
+              </a:ext>
+            </a:extLst>
+          </p:cNvPr>
+          <p:cNvPicPr>
+            <a:picLocks noChangeAspect="1"/>
+          </p:cNvPicPr>
+          <p:nvPr/>
+        </p:nvPicPr>
+        <p:blipFill>
+          <a:blip r:embed="rId6"/>
+          <a:stretch>
+            <a:fillRect/>
+          </a:stretch>
+        </p:blipFill>
+        <p:spPr>
+          <a:xfrm>
+            <a:off x="228600" y="1487774"/>
+            <a:ext cx="6694810" cy="3840847"/>
+          </a:xfrm>
+          <a:prstGeom prst="rect">
+            <a:avLst/>
+          </a:prstGeom>
+        </p:spPr>
+      </p:pic>
     </p:spTree>
     <p:extLst>
       <p:ext uri="{BB962C8B-B14F-4D97-AF65-F5344CB8AC3E}">
@@ -7938,34 +6790,6 @@
       </p:grpSpPr>
       <p:sp>
         <p:nvSpPr>
-          <p:cNvPr id="5" name="Marcador de pie de página 4">
-            <a:extLst>
-              <a:ext uri="{FF2B5EF4-FFF2-40B4-BE49-F238E27FC236}">
-                <a16:creationId xmlns:a16="http://schemas.microsoft.com/office/drawing/2014/main" id="{4915C280-A84A-95DA-94D2-FE062C8ED61F}"/>
-              </a:ext>
-            </a:extLst>
-          </p:cNvPr>
-          <p:cNvSpPr>
-            <a:spLocks noGrp="1"/>
-          </p:cNvSpPr>
-          <p:nvPr>
-            <p:ph type="ftr" sz="quarter" idx="5"/>
-          </p:nvPr>
-        </p:nvSpPr>
-        <p:spPr/>
-        <p:txBody>
-          <a:bodyPr/>
-          <a:lstStyle/>
-          <a:p>
-            <a:r>
-              <a:rPr lang="en-US"/>
-              <a:t>LAB 3.0. CIRCUITS &amp; COMPACT MODELS</a:t>
-            </a:r>
-          </a:p>
-        </p:txBody>
-      </p:sp>
-      <p:sp>
-        <p:nvSpPr>
           <p:cNvPr id="6" name="Marcador de número de diapositiva 5">
             <a:extLst>
               <a:ext uri="{FF2B5EF4-FFF2-40B4-BE49-F238E27FC236}">
@@ -7991,469 +6815,6 @@
               <a:t>8</a:t>
             </a:fld>
             <a:endParaRPr lang="en-US" dirty="0"/>
-          </a:p>
-        </p:txBody>
-      </p:sp>
-      <p:sp>
-        <p:nvSpPr>
-          <p:cNvPr id="8" name="CuadroTexto 7">
-            <a:extLst>
-              <a:ext uri="{FF2B5EF4-FFF2-40B4-BE49-F238E27FC236}">
-                <a16:creationId xmlns:a16="http://schemas.microsoft.com/office/drawing/2014/main" id="{3BC6D2B9-07F5-E2FA-C9AD-029B63B098DA}"/>
-              </a:ext>
-            </a:extLst>
-          </p:cNvPr>
-          <p:cNvSpPr txBox="1"/>
-          <p:nvPr/>
-        </p:nvSpPr>
-        <p:spPr>
-          <a:xfrm>
-            <a:off x="611029" y="4860335"/>
-            <a:ext cx="11199530" cy="1200329"/>
-          </a:xfrm>
-          <a:prstGeom prst="rect">
-            <a:avLst/>
-          </a:prstGeom>
-          <a:solidFill>
-            <a:schemeClr val="bg1">
-              <a:lumMod val="95000"/>
-            </a:schemeClr>
-          </a:solidFill>
-          <a:ln w="28575">
-            <a:solidFill>
-              <a:srgbClr val="E0700D"/>
-            </a:solidFill>
-          </a:ln>
-        </p:spPr>
-        <p:txBody>
-          <a:bodyPr wrap="square" rtlCol="0">
-            <a:spAutoFit/>
-          </a:bodyPr>
-          <a:lstStyle/>
-          <a:p>
-            <a:pPr algn="just"/>
-            <a:r>
-              <a:rPr lang="en-US" sz="1200" dirty="0">
-                <a:latin typeface="Arial" panose="020B0604020202020204" pitchFamily="34" charset="0"/>
-                <a:cs typeface="Arial" panose="020B0604020202020204" pitchFamily="34" charset="0"/>
-              </a:rPr>
-              <a:t>Comment results: describer the transfer function. How’s the dependence on the coupler coefficient? Calculate the Extinction Ratio. How would you achieve critical coupling for the latter design? Justify your answers.</a:t>
-            </a:r>
-          </a:p>
-          <a:p>
-            <a:pPr algn="just"/>
-            <a:endParaRPr lang="en-US" sz="1200" dirty="0">
-              <a:latin typeface="Arial" panose="020B0604020202020204" pitchFamily="34" charset="0"/>
-              <a:cs typeface="Arial" panose="020B0604020202020204" pitchFamily="34" charset="0"/>
-            </a:endParaRPr>
-          </a:p>
-          <a:p>
-            <a:pPr algn="just"/>
-            <a:endParaRPr lang="en-US" sz="1200" dirty="0">
-              <a:latin typeface="Arial" panose="020B0604020202020204" pitchFamily="34" charset="0"/>
-              <a:cs typeface="Arial" panose="020B0604020202020204" pitchFamily="34" charset="0"/>
-            </a:endParaRPr>
-          </a:p>
-          <a:p>
-            <a:pPr algn="just"/>
-            <a:endParaRPr lang="en-US" sz="1200" dirty="0">
-              <a:latin typeface="Arial" panose="020B0604020202020204" pitchFamily="34" charset="0"/>
-              <a:cs typeface="Arial" panose="020B0604020202020204" pitchFamily="34" charset="0"/>
-            </a:endParaRPr>
-          </a:p>
-          <a:p>
-            <a:pPr algn="just"/>
-            <a:r>
-              <a:rPr lang="en-US" sz="1200" dirty="0">
-                <a:latin typeface="Arial" panose="020B0604020202020204" pitchFamily="34" charset="0"/>
-                <a:cs typeface="Arial" panose="020B0604020202020204" pitchFamily="34" charset="0"/>
-              </a:rPr>
-              <a:t> </a:t>
-            </a:r>
-          </a:p>
-        </p:txBody>
-      </p:sp>
-      <p:sp>
-        <p:nvSpPr>
-          <p:cNvPr id="3" name="Rectángulo 2">
-            <a:extLst>
-              <a:ext uri="{FF2B5EF4-FFF2-40B4-BE49-F238E27FC236}">
-                <a16:creationId xmlns:a16="http://schemas.microsoft.com/office/drawing/2014/main" id="{E54DA3AC-DFE0-BB51-7C71-7CD9087359D0}"/>
-              </a:ext>
-            </a:extLst>
-          </p:cNvPr>
-          <p:cNvSpPr/>
-          <p:nvPr/>
-        </p:nvSpPr>
-        <p:spPr>
-          <a:xfrm>
-            <a:off x="8610601" y="1418373"/>
-            <a:ext cx="3199959" cy="3306028"/>
-          </a:xfrm>
-          <a:prstGeom prst="rect">
-            <a:avLst/>
-          </a:prstGeom>
-          <a:solidFill>
-            <a:schemeClr val="bg1">
-              <a:lumMod val="95000"/>
-            </a:schemeClr>
-          </a:solidFill>
-          <a:ln w="28575">
-            <a:solidFill>
-              <a:srgbClr val="E0700D"/>
-            </a:solidFill>
-          </a:ln>
-        </p:spPr>
-        <p:style>
-          <a:lnRef idx="2">
-            <a:schemeClr val="accent1">
-              <a:shade val="15000"/>
-            </a:schemeClr>
-          </a:lnRef>
-          <a:fillRef idx="1">
-            <a:schemeClr val="accent1"/>
-          </a:fillRef>
-          <a:effectRef idx="0">
-            <a:schemeClr val="accent1"/>
-          </a:effectRef>
-          <a:fontRef idx="minor">
-            <a:schemeClr val="lt1"/>
-          </a:fontRef>
-        </p:style>
-        <p:txBody>
-          <a:bodyPr rtlCol="0" anchor="t" anchorCtr="0"/>
-          <a:lstStyle/>
-          <a:p>
-            <a:pPr algn="just"/>
-            <a:r>
-              <a:rPr lang="en-US" sz="1200" b="1" dirty="0">
-                <a:solidFill>
-                  <a:schemeClr val="tx1"/>
-                </a:solidFill>
-                <a:latin typeface="Arial" panose="020B0604020202020204" pitchFamily="34" charset="0"/>
-                <a:cs typeface="Arial" panose="020B0604020202020204" pitchFamily="34" charset="0"/>
-              </a:rPr>
-              <a:t>Hints:</a:t>
-            </a:r>
-            <a:endParaRPr lang="en-US" sz="1200" dirty="0">
-              <a:solidFill>
-                <a:schemeClr val="tx1"/>
-              </a:solidFill>
-              <a:latin typeface="Arial" panose="020B0604020202020204" pitchFamily="34" charset="0"/>
-              <a:cs typeface="Arial" panose="020B0604020202020204" pitchFamily="34" charset="0"/>
-            </a:endParaRPr>
-          </a:p>
-          <a:p>
-            <a:pPr algn="just"/>
-            <a:endParaRPr lang="en-US" sz="1200" dirty="0">
-              <a:solidFill>
-                <a:schemeClr val="tx1"/>
-              </a:solidFill>
-              <a:latin typeface="Arial" panose="020B0604020202020204" pitchFamily="34" charset="0"/>
-              <a:cs typeface="Arial" panose="020B0604020202020204" pitchFamily="34" charset="0"/>
-            </a:endParaRPr>
-          </a:p>
-          <a:p>
-            <a:pPr algn="just"/>
-            <a:r>
-              <a:rPr lang="en-US" sz="1200" dirty="0">
-                <a:solidFill>
-                  <a:schemeClr val="tx1"/>
-                </a:solidFill>
-                <a:latin typeface="Arial" panose="020B0604020202020204" pitchFamily="34" charset="0"/>
-                <a:cs typeface="Arial" panose="020B0604020202020204" pitchFamily="34" charset="0"/>
-              </a:rPr>
-              <a:t>Design the perimeter for a FSR = 15 nm. </a:t>
-            </a:r>
-          </a:p>
-          <a:p>
-            <a:pPr algn="just"/>
-            <a:endParaRPr lang="en-US" sz="1200" dirty="0">
-              <a:solidFill>
-                <a:schemeClr val="tx1"/>
-              </a:solidFill>
-              <a:latin typeface="Arial" panose="020B0604020202020204" pitchFamily="34" charset="0"/>
-              <a:cs typeface="Arial" panose="020B0604020202020204" pitchFamily="34" charset="0"/>
-            </a:endParaRPr>
-          </a:p>
-          <a:p>
-            <a:pPr algn="just"/>
-            <a:r>
-              <a:rPr lang="en-US" sz="1200" dirty="0">
-                <a:solidFill>
-                  <a:schemeClr val="tx1"/>
-                </a:solidFill>
-                <a:latin typeface="Arial" panose="020B0604020202020204" pitchFamily="34" charset="0"/>
-                <a:cs typeface="Arial" panose="020B0604020202020204" pitchFamily="34" charset="0"/>
-              </a:rPr>
-              <a:t>Use equations given in class that relate FSR and perimeter.</a:t>
-            </a:r>
-          </a:p>
-          <a:p>
-            <a:pPr algn="just"/>
-            <a:endParaRPr lang="en-US" sz="1200" dirty="0">
-              <a:solidFill>
-                <a:schemeClr val="tx1"/>
-              </a:solidFill>
-              <a:latin typeface="Arial" panose="020B0604020202020204" pitchFamily="34" charset="0"/>
-              <a:cs typeface="Arial" panose="020B0604020202020204" pitchFamily="34" charset="0"/>
-            </a:endParaRPr>
-          </a:p>
-          <a:p>
-            <a:pPr algn="just"/>
-            <a:endParaRPr lang="en-US" sz="1200" dirty="0">
-              <a:solidFill>
-                <a:schemeClr val="tx1"/>
-              </a:solidFill>
-              <a:latin typeface="Arial" panose="020B0604020202020204" pitchFamily="34" charset="0"/>
-              <a:cs typeface="Arial" panose="020B0604020202020204" pitchFamily="34" charset="0"/>
-            </a:endParaRPr>
-          </a:p>
-          <a:p>
-            <a:pPr algn="just"/>
-            <a:endParaRPr lang="en-US" sz="1200" dirty="0">
-              <a:solidFill>
-                <a:schemeClr val="tx1"/>
-              </a:solidFill>
-              <a:latin typeface="Arial" panose="020B0604020202020204" pitchFamily="34" charset="0"/>
-              <a:cs typeface="Arial" panose="020B0604020202020204" pitchFamily="34" charset="0"/>
-            </a:endParaRPr>
-          </a:p>
-        </p:txBody>
-      </p:sp>
-      <p:sp>
-        <p:nvSpPr>
-          <p:cNvPr id="10" name="Rectángulo 9">
-            <a:extLst>
-              <a:ext uri="{FF2B5EF4-FFF2-40B4-BE49-F238E27FC236}">
-                <a16:creationId xmlns:a16="http://schemas.microsoft.com/office/drawing/2014/main" id="{82011495-88D4-8787-6CB7-704897D84CF9}"/>
-              </a:ext>
-            </a:extLst>
-          </p:cNvPr>
-          <p:cNvSpPr/>
-          <p:nvPr/>
-        </p:nvSpPr>
-        <p:spPr>
-          <a:xfrm>
-            <a:off x="611030" y="1418373"/>
-            <a:ext cx="3810000" cy="3306028"/>
-          </a:xfrm>
-          <a:prstGeom prst="rect">
-            <a:avLst/>
-          </a:prstGeom>
-          <a:noFill/>
-          <a:ln w="28575">
-            <a:solidFill>
-              <a:srgbClr val="E0700D"/>
-            </a:solidFill>
-          </a:ln>
-        </p:spPr>
-        <p:style>
-          <a:lnRef idx="2">
-            <a:schemeClr val="accent1">
-              <a:shade val="15000"/>
-            </a:schemeClr>
-          </a:lnRef>
-          <a:fillRef idx="1">
-            <a:schemeClr val="accent1"/>
-          </a:fillRef>
-          <a:effectRef idx="0">
-            <a:schemeClr val="accent1"/>
-          </a:effectRef>
-          <a:fontRef idx="minor">
-            <a:schemeClr val="lt1"/>
-          </a:fontRef>
-        </p:style>
-        <p:txBody>
-          <a:bodyPr rtlCol="0" anchor="ctr"/>
-          <a:lstStyle/>
-          <a:p>
-            <a:pPr algn="ctr"/>
-            <a:endParaRPr lang="en-US"/>
-          </a:p>
-        </p:txBody>
-      </p:sp>
-      <p:sp>
-        <p:nvSpPr>
-          <p:cNvPr id="12" name="CuadroTexto 11">
-            <a:extLst>
-              <a:ext uri="{FF2B5EF4-FFF2-40B4-BE49-F238E27FC236}">
-                <a16:creationId xmlns:a16="http://schemas.microsoft.com/office/drawing/2014/main" id="{3BD35A6E-6540-9761-4128-0E43122290D4}"/>
-              </a:ext>
-            </a:extLst>
-          </p:cNvPr>
-          <p:cNvSpPr txBox="1"/>
-          <p:nvPr/>
-        </p:nvSpPr>
-        <p:spPr>
-          <a:xfrm>
-            <a:off x="5536543" y="2494307"/>
-            <a:ext cx="2033313" cy="1323439"/>
-          </a:xfrm>
-          <a:prstGeom prst="rect">
-            <a:avLst/>
-          </a:prstGeom>
-          <a:noFill/>
-        </p:spPr>
-        <p:txBody>
-          <a:bodyPr wrap="none" rtlCol="0">
-            <a:spAutoFit/>
-          </a:bodyPr>
-          <a:lstStyle/>
-          <a:p>
-            <a:pPr algn="ctr"/>
-            <a:r>
-              <a:rPr lang="es-ES" sz="2000" dirty="0"/>
-              <a:t>Single ring</a:t>
-            </a:r>
-          </a:p>
-          <a:p>
-            <a:pPr algn="ctr"/>
-            <a:r>
-              <a:rPr lang="es-ES" sz="2000" dirty="0"/>
-              <a:t>transfer </a:t>
-            </a:r>
-            <a:r>
-              <a:rPr lang="es-ES" sz="2000" dirty="0" err="1"/>
-              <a:t>functions</a:t>
-            </a:r>
-            <a:endParaRPr lang="es-ES" sz="2000" dirty="0"/>
-          </a:p>
-          <a:p>
-            <a:pPr algn="ctr"/>
-            <a:endParaRPr lang="es-ES" sz="2000" dirty="0"/>
-          </a:p>
-          <a:p>
-            <a:pPr algn="ctr"/>
-            <a:r>
-              <a:rPr lang="es-ES" sz="2000" dirty="0" err="1"/>
-              <a:t>Logaritmic</a:t>
-            </a:r>
-            <a:r>
-              <a:rPr lang="es-ES" sz="2000" dirty="0"/>
-              <a:t> </a:t>
-            </a:r>
-            <a:r>
-              <a:rPr lang="es-ES" sz="2000" dirty="0" err="1"/>
-              <a:t>units</a:t>
-            </a:r>
-            <a:endParaRPr lang="en-US" sz="2000" dirty="0"/>
-          </a:p>
-        </p:txBody>
-      </p:sp>
-      <p:sp>
-        <p:nvSpPr>
-          <p:cNvPr id="13" name="Rectángulo 12">
-            <a:extLst>
-              <a:ext uri="{FF2B5EF4-FFF2-40B4-BE49-F238E27FC236}">
-                <a16:creationId xmlns:a16="http://schemas.microsoft.com/office/drawing/2014/main" id="{03798D61-1E16-8473-BDCE-1D97F95EF7BE}"/>
-              </a:ext>
-            </a:extLst>
-          </p:cNvPr>
-          <p:cNvSpPr/>
-          <p:nvPr/>
-        </p:nvSpPr>
-        <p:spPr>
-          <a:xfrm>
-            <a:off x="4648200" y="1418373"/>
-            <a:ext cx="3810000" cy="3306028"/>
-          </a:xfrm>
-          <a:prstGeom prst="rect">
-            <a:avLst/>
-          </a:prstGeom>
-          <a:noFill/>
-          <a:ln w="28575">
-            <a:solidFill>
-              <a:srgbClr val="E0700D"/>
-            </a:solidFill>
-          </a:ln>
-        </p:spPr>
-        <p:style>
-          <a:lnRef idx="2">
-            <a:schemeClr val="accent1">
-              <a:shade val="15000"/>
-            </a:schemeClr>
-          </a:lnRef>
-          <a:fillRef idx="1">
-            <a:schemeClr val="accent1"/>
-          </a:fillRef>
-          <a:effectRef idx="0">
-            <a:schemeClr val="accent1"/>
-          </a:effectRef>
-          <a:fontRef idx="minor">
-            <a:schemeClr val="lt1"/>
-          </a:fontRef>
-        </p:style>
-        <p:txBody>
-          <a:bodyPr rtlCol="0" anchor="ctr"/>
-          <a:lstStyle/>
-          <a:p>
-            <a:pPr algn="ctr"/>
-            <a:endParaRPr lang="en-US"/>
-          </a:p>
-        </p:txBody>
-      </p:sp>
-      <p:sp>
-        <p:nvSpPr>
-          <p:cNvPr id="16" name="CuadroTexto 15">
-            <a:extLst>
-              <a:ext uri="{FF2B5EF4-FFF2-40B4-BE49-F238E27FC236}">
-                <a16:creationId xmlns:a16="http://schemas.microsoft.com/office/drawing/2014/main" id="{B49B3613-E785-3FCB-DA8D-2B43EB104C5D}"/>
-              </a:ext>
-            </a:extLst>
-          </p:cNvPr>
-          <p:cNvSpPr txBox="1"/>
-          <p:nvPr/>
-        </p:nvSpPr>
-        <p:spPr>
-          <a:xfrm>
-            <a:off x="1499379" y="2478160"/>
-            <a:ext cx="2033313" cy="1323439"/>
-          </a:xfrm>
-          <a:prstGeom prst="rect">
-            <a:avLst/>
-          </a:prstGeom>
-          <a:noFill/>
-        </p:spPr>
-        <p:txBody>
-          <a:bodyPr wrap="none" rtlCol="0">
-            <a:spAutoFit/>
-          </a:bodyPr>
-          <a:lstStyle/>
-          <a:p>
-            <a:pPr algn="ctr"/>
-            <a:r>
-              <a:rPr lang="es-ES" sz="2000" dirty="0"/>
-              <a:t>Single ring</a:t>
-            </a:r>
-          </a:p>
-          <a:p>
-            <a:pPr algn="ctr"/>
-            <a:r>
-              <a:rPr lang="es-ES" sz="2000" dirty="0"/>
-              <a:t>transfer </a:t>
-            </a:r>
-            <a:r>
-              <a:rPr lang="es-ES" sz="2000" dirty="0" err="1"/>
-              <a:t>functions</a:t>
-            </a:r>
-            <a:endParaRPr lang="es-ES" sz="2000" dirty="0"/>
-          </a:p>
-          <a:p>
-            <a:pPr algn="ctr"/>
-            <a:endParaRPr lang="es-ES" sz="2000" dirty="0"/>
-          </a:p>
-          <a:p>
-            <a:pPr algn="ctr"/>
-            <a:r>
-              <a:rPr lang="es-ES" sz="2000" dirty="0"/>
-              <a:t>Linear </a:t>
-            </a:r>
-            <a:r>
-              <a:rPr lang="es-ES" sz="2000" dirty="0" err="1"/>
-              <a:t>units</a:t>
-            </a:r>
-            <a:endParaRPr lang="en-US" sz="2000" dirty="0"/>
           </a:p>
         </p:txBody>
       </p:sp>
@@ -8472,10 +6833,10 @@
           <p:nvPr/>
         </p:nvPicPr>
         <p:blipFill>
-          <a:blip>
+          <a:blip r:embed="rId2">
             <a:extLst>
               <a:ext uri="{96DAC541-7B7A-43D3-8B79-37D633B846F1}">
-                <asvg:svgBlip xmlns:asvg="http://schemas.microsoft.com/office/drawing/2016/SVG/main" r:embed="rId2"/>
+                <asvg:svgBlip xmlns:asvg="http://schemas.microsoft.com/office/drawing/2016/SVG/main" r:embed="rId3"/>
               </a:ext>
             </a:extLst>
           </a:blip>
@@ -8509,7 +6870,7 @@
         </p:nvSpPr>
         <p:spPr>
           <a:xfrm>
-            <a:off x="685800" y="408883"/>
+            <a:off x="53669" y="26659"/>
             <a:ext cx="10994410" cy="718145"/>
           </a:xfrm>
           <a:prstGeom prst="rect">
@@ -8559,6 +6920,448 @@
           </a:p>
         </p:txBody>
       </p:sp>
+      <mc:AlternateContent xmlns:mc="http://schemas.openxmlformats.org/markup-compatibility/2006">
+        <mc:Choice xmlns:a14="http://schemas.microsoft.com/office/drawing/2010/main" Requires="a14">
+          <p:sp>
+            <p:nvSpPr>
+              <p:cNvPr id="9" name="CasellaDiTesto 8">
+                <a:extLst>
+                  <a:ext uri="{FF2B5EF4-FFF2-40B4-BE49-F238E27FC236}">
+                    <a16:creationId xmlns:a16="http://schemas.microsoft.com/office/drawing/2014/main" id="{4DE7A6D3-AA91-EEF8-28C5-C3ABB9976FEE}"/>
+                  </a:ext>
+                </a:extLst>
+              </p:cNvPr>
+              <p:cNvSpPr txBox="1"/>
+              <p:nvPr/>
+            </p:nvSpPr>
+            <p:spPr>
+              <a:xfrm>
+                <a:off x="6400800" y="436146"/>
+                <a:ext cx="6129336" cy="668966"/>
+              </a:xfrm>
+              <a:prstGeom prst="rect">
+                <a:avLst/>
+              </a:prstGeom>
+              <a:noFill/>
+            </p:spPr>
+            <p:txBody>
+              <a:bodyPr wrap="square">
+                <a:spAutoFit/>
+              </a:bodyPr>
+              <a:lstStyle/>
+              <a:p>
+                <a14:m>
+                  <m:oMath xmlns:m="http://schemas.openxmlformats.org/officeDocument/2006/math">
+                    <m:sSub>
+                      <m:sSubPr>
+                        <m:ctrlPr>
+                          <a:rPr lang="el-GR" i="1" smtClean="0">
+                            <a:latin typeface="Cambria Math" panose="02040503050406030204" pitchFamily="18" charset="0"/>
+                          </a:rPr>
+                        </m:ctrlPr>
+                      </m:sSubPr>
+                      <m:e>
+                        <m:r>
+                          <m:rPr>
+                            <m:nor/>
+                          </m:rPr>
+                          <a:rPr lang="el-GR"/>
+                          <m:t>Δλ</m:t>
+                        </m:r>
+                      </m:e>
+                      <m:sub>
+                        <m:r>
+                          <a:rPr lang="en-US" b="0" i="1" smtClean="0">
+                            <a:latin typeface="Cambria Math" panose="02040503050406030204" pitchFamily="18" charset="0"/>
+                          </a:rPr>
+                          <m:t>𝐹𝑆𝑅</m:t>
+                        </m:r>
+                      </m:sub>
+                    </m:sSub>
+                    <m:r>
+                      <a:rPr lang="en-US" i="1" smtClean="0">
+                        <a:latin typeface="Cambria Math" panose="02040503050406030204" pitchFamily="18" charset="0"/>
+                      </a:rPr>
+                      <m:t>=</m:t>
+                    </m:r>
+                    <m:f>
+                      <m:fPr>
+                        <m:ctrlPr>
+                          <a:rPr lang="en-US" i="1" smtClean="0">
+                            <a:latin typeface="Cambria Math" panose="02040503050406030204" pitchFamily="18" charset="0"/>
+                          </a:rPr>
+                        </m:ctrlPr>
+                      </m:fPr>
+                      <m:num>
+                        <m:sSup>
+                          <m:sSupPr>
+                            <m:ctrlPr>
+                              <a:rPr lang="en-US" i="1" smtClean="0">
+                                <a:latin typeface="Cambria Math" panose="02040503050406030204" pitchFamily="18" charset="0"/>
+                              </a:rPr>
+                            </m:ctrlPr>
+                          </m:sSupPr>
+                          <m:e>
+                            <m:sSub>
+                              <m:sSubPr>
+                                <m:ctrlPr>
+                                  <a:rPr lang="en-US" i="1" smtClean="0">
+                                    <a:latin typeface="Cambria Math" panose="02040503050406030204" pitchFamily="18" charset="0"/>
+                                  </a:rPr>
+                                </m:ctrlPr>
+                              </m:sSubPr>
+                              <m:e>
+                                <m:r>
+                                  <m:rPr>
+                                    <m:nor/>
+                                  </m:rPr>
+                                  <a:rPr lang="el-GR"/>
+                                  <m:t>λ</m:t>
+                                </m:r>
+                              </m:e>
+                              <m:sub>
+                                <m:r>
+                                  <a:rPr lang="en-US" b="0" i="1" smtClean="0">
+                                    <a:latin typeface="Cambria Math" panose="02040503050406030204" pitchFamily="18" charset="0"/>
+                                  </a:rPr>
+                                  <m:t>0</m:t>
+                                </m:r>
+                              </m:sub>
+                            </m:sSub>
+                          </m:e>
+                          <m:sup>
+                            <m:r>
+                              <a:rPr lang="en-US" b="0" i="1" smtClean="0">
+                                <a:latin typeface="Cambria Math" panose="02040503050406030204" pitchFamily="18" charset="0"/>
+                              </a:rPr>
+                              <m:t>2</m:t>
+                            </m:r>
+                          </m:sup>
+                        </m:sSup>
+                      </m:num>
+                      <m:den>
+                        <m:sSub>
+                          <m:sSubPr>
+                            <m:ctrlPr>
+                              <a:rPr lang="en-US" b="0" i="1" smtClean="0">
+                                <a:latin typeface="Cambria Math" panose="02040503050406030204" pitchFamily="18" charset="0"/>
+                              </a:rPr>
+                            </m:ctrlPr>
+                          </m:sSubPr>
+                          <m:e>
+                            <m:r>
+                              <m:rPr>
+                                <m:sty m:val="p"/>
+                              </m:rPr>
+                              <a:rPr lang="en-US" b="0" i="1" smtClean="0">
+                                <a:latin typeface="Cambria Math" panose="02040503050406030204" pitchFamily="18" charset="0"/>
+                              </a:rPr>
+                              <m:t>n</m:t>
+                            </m:r>
+                          </m:e>
+                          <m:sub>
+                            <m:r>
+                              <m:rPr>
+                                <m:nor/>
+                              </m:rPr>
+                              <a:rPr lang="it-IT"/>
+                              <m:t>g</m:t>
+                            </m:r>
+                          </m:sub>
+                        </m:sSub>
+                        <m:r>
+                          <a:rPr lang="en-US" b="0" i="1" smtClean="0">
+                            <a:latin typeface="Cambria Math" panose="02040503050406030204" pitchFamily="18" charset="0"/>
+                          </a:rPr>
+                          <m:t>∗</m:t>
+                        </m:r>
+                        <m:r>
+                          <m:rPr>
+                            <m:sty m:val="p"/>
+                          </m:rPr>
+                          <a:rPr lang="en-US" b="0" i="1" smtClean="0">
+                            <a:latin typeface="Cambria Math" panose="02040503050406030204" pitchFamily="18" charset="0"/>
+                          </a:rPr>
+                          <m:t>FSR</m:t>
+                        </m:r>
+                      </m:den>
+                    </m:f>
+                  </m:oMath>
+                </a14:m>
+                <a:r>
+                  <a:rPr lang="it-IT" dirty="0"/>
+                  <a:t> = </a:t>
+                </a:r>
+                <a14:m>
+                  <m:oMath xmlns:m="http://schemas.openxmlformats.org/officeDocument/2006/math">
+                    <m:f>
+                      <m:fPr>
+                        <m:ctrlPr>
+                          <a:rPr lang="it-IT" i="1">
+                            <a:latin typeface="Cambria Math" panose="02040503050406030204" pitchFamily="18" charset="0"/>
+                          </a:rPr>
+                        </m:ctrlPr>
+                      </m:fPr>
+                      <m:num>
+                        <m:sSup>
+                          <m:sSupPr>
+                            <m:ctrlPr>
+                              <a:rPr lang="en-US" i="1">
+                                <a:latin typeface="Cambria Math" panose="02040503050406030204" pitchFamily="18" charset="0"/>
+                              </a:rPr>
+                            </m:ctrlPr>
+                          </m:sSupPr>
+                          <m:e>
+                            <m:d>
+                              <m:dPr>
+                                <m:ctrlPr>
+                                  <a:rPr lang="en-US" i="1">
+                                    <a:latin typeface="Cambria Math" panose="02040503050406030204" pitchFamily="18" charset="0"/>
+                                  </a:rPr>
+                                </m:ctrlPr>
+                              </m:dPr>
+                              <m:e>
+                                <m:r>
+                                  <a:rPr lang="en-US" i="1">
+                                    <a:latin typeface="Cambria Math" panose="02040503050406030204" pitchFamily="18" charset="0"/>
+                                  </a:rPr>
+                                  <m:t>1.55∗</m:t>
+                                </m:r>
+                                <m:sSup>
+                                  <m:sSupPr>
+                                    <m:ctrlPr>
+                                      <a:rPr lang="en-US" i="1">
+                                        <a:latin typeface="Cambria Math" panose="02040503050406030204" pitchFamily="18" charset="0"/>
+                                      </a:rPr>
+                                    </m:ctrlPr>
+                                  </m:sSupPr>
+                                  <m:e>
+                                    <m:r>
+                                      <a:rPr lang="en-US" i="1">
+                                        <a:latin typeface="Cambria Math" panose="02040503050406030204" pitchFamily="18" charset="0"/>
+                                      </a:rPr>
+                                      <m:t>10</m:t>
+                                    </m:r>
+                                  </m:e>
+                                  <m:sup>
+                                    <m:r>
+                                      <a:rPr lang="en-US" i="1">
+                                        <a:latin typeface="Cambria Math" panose="02040503050406030204" pitchFamily="18" charset="0"/>
+                                      </a:rPr>
+                                      <m:t>−6</m:t>
+                                    </m:r>
+                                  </m:sup>
+                                </m:sSup>
+                              </m:e>
+                            </m:d>
+                          </m:e>
+                          <m:sup>
+                            <m:r>
+                              <a:rPr lang="it-IT" i="1">
+                                <a:latin typeface="Cambria Math" panose="02040503050406030204" pitchFamily="18" charset="0"/>
+                              </a:rPr>
+                              <m:t>2</m:t>
+                            </m:r>
+                          </m:sup>
+                        </m:sSup>
+                      </m:num>
+                      <m:den>
+                        <m:r>
+                          <a:rPr lang="en-US" b="0" i="1" smtClean="0">
+                            <a:latin typeface="Cambria Math" panose="02040503050406030204" pitchFamily="18" charset="0"/>
+                          </a:rPr>
+                          <m:t> </m:t>
+                        </m:r>
+                        <m:r>
+                          <a:rPr lang="en-US" b="0" i="1" smtClean="0">
+                            <a:latin typeface="Cambria Math" panose="02040503050406030204" pitchFamily="18" charset="0"/>
+                          </a:rPr>
+                          <m:t>2.0</m:t>
+                        </m:r>
+                        <m:r>
+                          <a:rPr lang="en-US" i="1">
+                            <a:latin typeface="Cambria Math" panose="02040503050406030204" pitchFamily="18" charset="0"/>
+                          </a:rPr>
+                          <m:t>∗</m:t>
+                        </m:r>
+                        <m:r>
+                          <a:rPr lang="en-US" b="0" i="1" smtClean="0">
+                            <a:latin typeface="Cambria Math" panose="02040503050406030204" pitchFamily="18" charset="0"/>
+                          </a:rPr>
+                          <m:t>15</m:t>
+                        </m:r>
+                        <m:r>
+                          <a:rPr lang="it-IT" i="1">
+                            <a:latin typeface="Cambria Math" panose="02040503050406030204" pitchFamily="18" charset="0"/>
+                          </a:rPr>
+                          <m:t>∗</m:t>
+                        </m:r>
+                        <m:sSup>
+                          <m:sSupPr>
+                            <m:ctrlPr>
+                              <a:rPr lang="it-IT" i="1">
+                                <a:latin typeface="Cambria Math" panose="02040503050406030204" pitchFamily="18" charset="0"/>
+                              </a:rPr>
+                            </m:ctrlPr>
+                          </m:sSupPr>
+                          <m:e>
+                            <m:r>
+                              <a:rPr lang="en-US" i="1">
+                                <a:latin typeface="Cambria Math" panose="02040503050406030204" pitchFamily="18" charset="0"/>
+                              </a:rPr>
+                              <m:t>10</m:t>
+                            </m:r>
+                          </m:e>
+                          <m:sup>
+                            <m:r>
+                              <a:rPr lang="en-US" i="1">
+                                <a:latin typeface="Cambria Math" panose="02040503050406030204" pitchFamily="18" charset="0"/>
+                              </a:rPr>
+                              <m:t>−9</m:t>
+                            </m:r>
+                          </m:sup>
+                        </m:sSup>
+                      </m:den>
+                    </m:f>
+                  </m:oMath>
+                </a14:m>
+                <a:r>
+                  <a:rPr lang="it-IT" dirty="0"/>
+                  <a:t> = 80.08 </a:t>
+                </a:r>
+                <a:r>
+                  <a:rPr lang="it-IT" dirty="0" err="1"/>
+                  <a:t>um</a:t>
+                </a:r>
+                <a:endParaRPr lang="it-IT" dirty="0"/>
+              </a:p>
+            </p:txBody>
+          </p:sp>
+        </mc:Choice>
+        <mc:Fallback>
+          <p:sp>
+            <p:nvSpPr>
+              <p:cNvPr id="9" name="CasellaDiTesto 8">
+                <a:extLst>
+                  <a:ext uri="{FF2B5EF4-FFF2-40B4-BE49-F238E27FC236}">
+                    <a16:creationId xmlns:a16="http://schemas.microsoft.com/office/drawing/2014/main" id="{4DE7A6D3-AA91-EEF8-28C5-C3ABB9976FEE}"/>
+                  </a:ext>
+                </a:extLst>
+              </p:cNvPr>
+              <p:cNvSpPr txBox="1">
+                <a:spLocks noRot="1" noChangeAspect="1" noMove="1" noResize="1" noEditPoints="1" noAdjustHandles="1" noChangeArrowheads="1" noChangeShapeType="1" noTextEdit="1"/>
+              </p:cNvSpPr>
+              <p:nvPr/>
+            </p:nvSpPr>
+            <p:spPr>
+              <a:xfrm>
+                <a:off x="6400800" y="436146"/>
+                <a:ext cx="6129336" cy="668966"/>
+              </a:xfrm>
+              <a:prstGeom prst="rect">
+                <a:avLst/>
+              </a:prstGeom>
+              <a:blipFill>
+                <a:blip r:embed="rId4"/>
+                <a:stretch>
+                  <a:fillRect/>
+                </a:stretch>
+              </a:blipFill>
+            </p:spPr>
+            <p:txBody>
+              <a:bodyPr/>
+              <a:lstStyle/>
+              <a:p>
+                <a:r>
+                  <a:rPr lang="it-IT">
+                    <a:noFill/>
+                  </a:rPr>
+                  <a:t> </a:t>
+                </a:r>
+              </a:p>
+            </p:txBody>
+          </p:sp>
+        </mc:Fallback>
+      </mc:AlternateContent>
+      <p:sp>
+        <p:nvSpPr>
+          <p:cNvPr id="20" name="CasellaDiTesto 19">
+            <a:extLst>
+              <a:ext uri="{FF2B5EF4-FFF2-40B4-BE49-F238E27FC236}">
+                <a16:creationId xmlns:a16="http://schemas.microsoft.com/office/drawing/2014/main" id="{0661499F-34C7-9DD9-299E-AEA3D6C20B96}"/>
+              </a:ext>
+            </a:extLst>
+          </p:cNvPr>
+          <p:cNvSpPr txBox="1"/>
+          <p:nvPr/>
+        </p:nvSpPr>
+        <p:spPr>
+          <a:xfrm>
+            <a:off x="511889" y="1529473"/>
+            <a:ext cx="3755311" cy="4401205"/>
+          </a:xfrm>
+          <a:prstGeom prst="rect">
+            <a:avLst/>
+          </a:prstGeom>
+          <a:noFill/>
+        </p:spPr>
+        <p:txBody>
+          <a:bodyPr wrap="square" rtlCol="0">
+            <a:spAutoFit/>
+          </a:bodyPr>
+          <a:lstStyle/>
+          <a:p>
+            <a:r>
+              <a:rPr lang="en-US" sz="2000" dirty="0"/>
+              <a:t>The simulation confirms FSR = 15 nm. </a:t>
+            </a:r>
+          </a:p>
+          <a:p>
+            <a:r>
+              <a:rPr lang="en-US" sz="2000" dirty="0"/>
+              <a:t>With K = 0.5 and loss = 0.02 dB/µm the ring is over-coupled, the notch reaches about −20 dB but not infinity. To hit critical coupling you need K = 1 − a², where a² is the round-trip power transmission. With loss = 0.02 dB/µm and L = 80.08 µm the round-trip loss is 1.6 dB, giving a² = 0.69, so </a:t>
+            </a:r>
+            <a:r>
+              <a:rPr lang="en-US" sz="2000" dirty="0" err="1"/>
+              <a:t>K_crit</a:t>
+            </a:r>
+            <a:r>
+              <a:rPr lang="en-US" sz="2000" dirty="0"/>
+              <a:t> ≈ 0.31. Setting K to that value would make the notch go to −∞ theoretically.</a:t>
+            </a:r>
+          </a:p>
+        </p:txBody>
+      </p:sp>
+      <p:pic>
+        <p:nvPicPr>
+          <p:cNvPr id="3" name="Immagine 2">
+            <a:extLst>
+              <a:ext uri="{FF2B5EF4-FFF2-40B4-BE49-F238E27FC236}">
+                <a16:creationId xmlns:a16="http://schemas.microsoft.com/office/drawing/2014/main" id="{8549A0C2-263B-DF3A-A835-F3DC61A14F00}"/>
+              </a:ext>
+            </a:extLst>
+          </p:cNvPr>
+          <p:cNvPicPr>
+            <a:picLocks noChangeAspect="1"/>
+          </p:cNvPicPr>
+          <p:nvPr/>
+        </p:nvPicPr>
+        <p:blipFill>
+          <a:blip r:embed="rId5"/>
+          <a:stretch>
+            <a:fillRect/>
+          </a:stretch>
+        </p:blipFill>
+        <p:spPr>
+          <a:xfrm>
+            <a:off x="5005890" y="1450536"/>
+            <a:ext cx="6897144" cy="3956927"/>
+          </a:xfrm>
+          <a:prstGeom prst="rect">
+            <a:avLst/>
+          </a:prstGeom>
+        </p:spPr>
+      </p:pic>
     </p:spTree>
     <p:extLst>
       <p:ext uri="{BB962C8B-B14F-4D97-AF65-F5344CB8AC3E}">
@@ -8591,583 +7394,6 @@
       </p:grpSpPr>
       <p:sp>
         <p:nvSpPr>
-          <p:cNvPr id="5" name="Marcador de pie de página 4">
-            <a:extLst>
-              <a:ext uri="{FF2B5EF4-FFF2-40B4-BE49-F238E27FC236}">
-                <a16:creationId xmlns:a16="http://schemas.microsoft.com/office/drawing/2014/main" id="{F929251A-3DC4-36B2-3FB3-341378364BED}"/>
-              </a:ext>
-            </a:extLst>
-          </p:cNvPr>
-          <p:cNvSpPr>
-            <a:spLocks noGrp="1"/>
-          </p:cNvSpPr>
-          <p:nvPr>
-            <p:ph type="ftr" sz="quarter" idx="5"/>
-          </p:nvPr>
-        </p:nvSpPr>
-        <p:spPr/>
-        <p:txBody>
-          <a:bodyPr/>
-          <a:lstStyle/>
-          <a:p>
-            <a:r>
-              <a:rPr lang="en-US"/>
-              <a:t>LAB 3.0. CIRCUITS &amp; COMPACT MODELS</a:t>
-            </a:r>
-          </a:p>
-        </p:txBody>
-      </p:sp>
-      <p:sp>
-        <p:nvSpPr>
-          <p:cNvPr id="6" name="Marcador de número de diapositiva 5">
-            <a:extLst>
-              <a:ext uri="{FF2B5EF4-FFF2-40B4-BE49-F238E27FC236}">
-                <a16:creationId xmlns:a16="http://schemas.microsoft.com/office/drawing/2014/main" id="{8E91A34C-DF76-97CF-3EFD-546BC64A2184}"/>
-              </a:ext>
-            </a:extLst>
-          </p:cNvPr>
-          <p:cNvSpPr>
-            <a:spLocks noGrp="1"/>
-          </p:cNvSpPr>
-          <p:nvPr>
-            <p:ph type="sldNum" sz="quarter" idx="7"/>
-          </p:nvPr>
-        </p:nvSpPr>
-        <p:spPr/>
-        <p:txBody>
-          <a:bodyPr/>
-          <a:lstStyle/>
-          <a:p>
-            <a:fld id="{C2F52289-4012-4053-9770-FE82CEB9514F}" type="slidenum">
-              <a:rPr lang="en-US" smtClean="0"/>
-              <a:pPr/>
-              <a:t>9</a:t>
-            </a:fld>
-            <a:endParaRPr lang="en-US" dirty="0"/>
-          </a:p>
-        </p:txBody>
-      </p:sp>
-      <p:sp>
-        <p:nvSpPr>
-          <p:cNvPr id="8" name="CuadroTexto 7">
-            <a:extLst>
-              <a:ext uri="{FF2B5EF4-FFF2-40B4-BE49-F238E27FC236}">
-                <a16:creationId xmlns:a16="http://schemas.microsoft.com/office/drawing/2014/main" id="{D9601617-351E-AE1A-1F4D-693F2EA59361}"/>
-              </a:ext>
-            </a:extLst>
-          </p:cNvPr>
-          <p:cNvSpPr txBox="1"/>
-          <p:nvPr/>
-        </p:nvSpPr>
-        <p:spPr>
-          <a:xfrm>
-            <a:off x="611029" y="4860335"/>
-            <a:ext cx="11199530" cy="646331"/>
-          </a:xfrm>
-          <a:prstGeom prst="rect">
-            <a:avLst/>
-          </a:prstGeom>
-          <a:solidFill>
-            <a:schemeClr val="bg1">
-              <a:lumMod val="95000"/>
-            </a:schemeClr>
-          </a:solidFill>
-          <a:ln w="28575">
-            <a:solidFill>
-              <a:srgbClr val="E0700D"/>
-            </a:solidFill>
-          </a:ln>
-        </p:spPr>
-        <p:txBody>
-          <a:bodyPr wrap="square" rtlCol="0">
-            <a:spAutoFit/>
-          </a:bodyPr>
-          <a:lstStyle/>
-          <a:p>
-            <a:pPr algn="just"/>
-            <a:r>
-              <a:rPr lang="en-US" sz="1200" dirty="0">
-                <a:latin typeface="Arial" panose="020B0604020202020204" pitchFamily="34" charset="0"/>
-                <a:cs typeface="Arial" panose="020B0604020202020204" pitchFamily="34" charset="0"/>
-              </a:rPr>
-              <a:t>Comment results: Try to classify the resonances, in which case are you close to critical coupling? Why?</a:t>
-            </a:r>
-          </a:p>
-          <a:p>
-            <a:pPr algn="just"/>
-            <a:endParaRPr lang="en-US" sz="1200" dirty="0">
-              <a:latin typeface="Arial" panose="020B0604020202020204" pitchFamily="34" charset="0"/>
-              <a:cs typeface="Arial" panose="020B0604020202020204" pitchFamily="34" charset="0"/>
-            </a:endParaRPr>
-          </a:p>
-          <a:p>
-            <a:pPr algn="just"/>
-            <a:endParaRPr lang="en-US" sz="1200" dirty="0">
-              <a:latin typeface="Arial" panose="020B0604020202020204" pitchFamily="34" charset="0"/>
-              <a:cs typeface="Arial" panose="020B0604020202020204" pitchFamily="34" charset="0"/>
-            </a:endParaRPr>
-          </a:p>
-        </p:txBody>
-      </p:sp>
-      <p:sp>
-        <p:nvSpPr>
-          <p:cNvPr id="11" name="Rectángulo 10">
-            <a:extLst>
-              <a:ext uri="{FF2B5EF4-FFF2-40B4-BE49-F238E27FC236}">
-                <a16:creationId xmlns:a16="http://schemas.microsoft.com/office/drawing/2014/main" id="{B811A5F9-C0B5-716C-70FB-9472E1BC2CD3}"/>
-              </a:ext>
-            </a:extLst>
-          </p:cNvPr>
-          <p:cNvSpPr/>
-          <p:nvPr/>
-        </p:nvSpPr>
-        <p:spPr>
-          <a:xfrm>
-            <a:off x="611030" y="1418373"/>
-            <a:ext cx="2538552" cy="3306028"/>
-          </a:xfrm>
-          <a:prstGeom prst="rect">
-            <a:avLst/>
-          </a:prstGeom>
-          <a:noFill/>
-          <a:ln w="28575">
-            <a:solidFill>
-              <a:srgbClr val="E0700D"/>
-            </a:solidFill>
-          </a:ln>
-        </p:spPr>
-        <p:style>
-          <a:lnRef idx="2">
-            <a:schemeClr val="accent1">
-              <a:shade val="15000"/>
-            </a:schemeClr>
-          </a:lnRef>
-          <a:fillRef idx="1">
-            <a:schemeClr val="accent1"/>
-          </a:fillRef>
-          <a:effectRef idx="0">
-            <a:schemeClr val="accent1"/>
-          </a:effectRef>
-          <a:fontRef idx="minor">
-            <a:schemeClr val="lt1"/>
-          </a:fontRef>
-        </p:style>
-        <p:txBody>
-          <a:bodyPr rtlCol="0" anchor="ctr"/>
-          <a:lstStyle/>
-          <a:p>
-            <a:pPr algn="ctr"/>
-            <a:endParaRPr lang="en-US"/>
-          </a:p>
-        </p:txBody>
-      </p:sp>
-      <p:sp>
-        <p:nvSpPr>
-          <p:cNvPr id="14" name="Rectángulo 13">
-            <a:extLst>
-              <a:ext uri="{FF2B5EF4-FFF2-40B4-BE49-F238E27FC236}">
-                <a16:creationId xmlns:a16="http://schemas.microsoft.com/office/drawing/2014/main" id="{6AA857E7-5C39-DCE1-10B5-40300FCF4B26}"/>
-              </a:ext>
-            </a:extLst>
-          </p:cNvPr>
-          <p:cNvSpPr/>
-          <p:nvPr/>
-        </p:nvSpPr>
-        <p:spPr>
-          <a:xfrm>
-            <a:off x="3277315" y="1419036"/>
-            <a:ext cx="2538552" cy="3306028"/>
-          </a:xfrm>
-          <a:prstGeom prst="rect">
-            <a:avLst/>
-          </a:prstGeom>
-          <a:noFill/>
-          <a:ln w="28575">
-            <a:solidFill>
-              <a:srgbClr val="E0700D"/>
-            </a:solidFill>
-          </a:ln>
-        </p:spPr>
-        <p:style>
-          <a:lnRef idx="2">
-            <a:schemeClr val="accent1">
-              <a:shade val="15000"/>
-            </a:schemeClr>
-          </a:lnRef>
-          <a:fillRef idx="1">
-            <a:schemeClr val="accent1"/>
-          </a:fillRef>
-          <a:effectRef idx="0">
-            <a:schemeClr val="accent1"/>
-          </a:effectRef>
-          <a:fontRef idx="minor">
-            <a:schemeClr val="lt1"/>
-          </a:fontRef>
-        </p:style>
-        <p:txBody>
-          <a:bodyPr rtlCol="0" anchor="ctr"/>
-          <a:lstStyle/>
-          <a:p>
-            <a:pPr algn="ctr"/>
-            <a:endParaRPr lang="en-US"/>
-          </a:p>
-        </p:txBody>
-      </p:sp>
-      <p:sp>
-        <p:nvSpPr>
-          <p:cNvPr id="15" name="CuadroTexto 14">
-            <a:extLst>
-              <a:ext uri="{FF2B5EF4-FFF2-40B4-BE49-F238E27FC236}">
-                <a16:creationId xmlns:a16="http://schemas.microsoft.com/office/drawing/2014/main" id="{54CF28B4-1346-F41D-2CD8-EA104ABBFB98}"/>
-              </a:ext>
-            </a:extLst>
-          </p:cNvPr>
-          <p:cNvSpPr txBox="1"/>
-          <p:nvPr/>
-        </p:nvSpPr>
-        <p:spPr>
-          <a:xfrm>
-            <a:off x="863650" y="2101891"/>
-            <a:ext cx="2033313" cy="1938992"/>
-          </a:xfrm>
-          <a:prstGeom prst="rect">
-            <a:avLst/>
-          </a:prstGeom>
-          <a:noFill/>
-        </p:spPr>
-        <p:txBody>
-          <a:bodyPr wrap="none" rtlCol="0">
-            <a:spAutoFit/>
-          </a:bodyPr>
-          <a:lstStyle/>
-          <a:p>
-            <a:pPr algn="ctr"/>
-            <a:r>
-              <a:rPr lang="es-ES" sz="2000" dirty="0"/>
-              <a:t>Single ring</a:t>
-            </a:r>
-          </a:p>
-          <a:p>
-            <a:pPr algn="ctr"/>
-            <a:r>
-              <a:rPr lang="es-ES" sz="2000" dirty="0"/>
-              <a:t>transfer </a:t>
-            </a:r>
-            <a:r>
-              <a:rPr lang="es-ES" sz="2000" dirty="0" err="1"/>
-              <a:t>functions</a:t>
-            </a:r>
-            <a:endParaRPr lang="es-ES" sz="2000" dirty="0"/>
-          </a:p>
-          <a:p>
-            <a:pPr algn="ctr"/>
-            <a:endParaRPr lang="es-ES" sz="2000" dirty="0"/>
-          </a:p>
-          <a:p>
-            <a:pPr algn="ctr"/>
-            <a:r>
-              <a:rPr lang="es-ES" sz="2000" dirty="0"/>
-              <a:t>Linear </a:t>
-            </a:r>
-            <a:r>
-              <a:rPr lang="es-ES" sz="2000" dirty="0" err="1"/>
-              <a:t>units</a:t>
-            </a:r>
-            <a:endParaRPr lang="es-ES" sz="2000" dirty="0"/>
-          </a:p>
-          <a:p>
-            <a:pPr algn="ctr"/>
-            <a:endParaRPr lang="es-ES" sz="2000" dirty="0"/>
-          </a:p>
-          <a:p>
-            <a:pPr algn="ctr"/>
-            <a:r>
-              <a:rPr lang="es-ES" sz="2000" dirty="0"/>
-              <a:t>K=</a:t>
-            </a:r>
-            <a:endParaRPr lang="en-US" sz="2000" dirty="0"/>
-          </a:p>
-        </p:txBody>
-      </p:sp>
-      <p:sp>
-        <p:nvSpPr>
-          <p:cNvPr id="9" name="Rectángulo 8">
-            <a:extLst>
-              <a:ext uri="{FF2B5EF4-FFF2-40B4-BE49-F238E27FC236}">
-                <a16:creationId xmlns:a16="http://schemas.microsoft.com/office/drawing/2014/main" id="{11F0F5FC-B571-59FC-7890-3105A6A843BB}"/>
-              </a:ext>
-            </a:extLst>
-          </p:cNvPr>
-          <p:cNvSpPr/>
-          <p:nvPr/>
-        </p:nvSpPr>
-        <p:spPr>
-          <a:xfrm>
-            <a:off x="5943600" y="1418373"/>
-            <a:ext cx="2538552" cy="3306028"/>
-          </a:xfrm>
-          <a:prstGeom prst="rect">
-            <a:avLst/>
-          </a:prstGeom>
-          <a:noFill/>
-          <a:ln w="28575">
-            <a:solidFill>
-              <a:srgbClr val="E0700D"/>
-            </a:solidFill>
-          </a:ln>
-        </p:spPr>
-        <p:style>
-          <a:lnRef idx="2">
-            <a:schemeClr val="accent1">
-              <a:shade val="15000"/>
-            </a:schemeClr>
-          </a:lnRef>
-          <a:fillRef idx="1">
-            <a:schemeClr val="accent1"/>
-          </a:fillRef>
-          <a:effectRef idx="0">
-            <a:schemeClr val="accent1"/>
-          </a:effectRef>
-          <a:fontRef idx="minor">
-            <a:schemeClr val="lt1"/>
-          </a:fontRef>
-        </p:style>
-        <p:txBody>
-          <a:bodyPr rtlCol="0" anchor="ctr"/>
-          <a:lstStyle/>
-          <a:p>
-            <a:pPr algn="ctr"/>
-            <a:endParaRPr lang="en-US"/>
-          </a:p>
-        </p:txBody>
-      </p:sp>
-      <p:sp>
-        <p:nvSpPr>
-          <p:cNvPr id="10" name="CuadroTexto 9">
-            <a:extLst>
-              <a:ext uri="{FF2B5EF4-FFF2-40B4-BE49-F238E27FC236}">
-                <a16:creationId xmlns:a16="http://schemas.microsoft.com/office/drawing/2014/main" id="{3146642F-220B-8F6A-59A8-2D128DDF3BEB}"/>
-              </a:ext>
-            </a:extLst>
-          </p:cNvPr>
-          <p:cNvSpPr txBox="1"/>
-          <p:nvPr/>
-        </p:nvSpPr>
-        <p:spPr>
-          <a:xfrm>
-            <a:off x="3529935" y="2104638"/>
-            <a:ext cx="2033313" cy="1938992"/>
-          </a:xfrm>
-          <a:prstGeom prst="rect">
-            <a:avLst/>
-          </a:prstGeom>
-          <a:noFill/>
-        </p:spPr>
-        <p:txBody>
-          <a:bodyPr wrap="none" rtlCol="0">
-            <a:spAutoFit/>
-          </a:bodyPr>
-          <a:lstStyle/>
-          <a:p>
-            <a:pPr algn="ctr"/>
-            <a:r>
-              <a:rPr lang="es-ES" sz="2000" dirty="0"/>
-              <a:t>Single ring</a:t>
-            </a:r>
-          </a:p>
-          <a:p>
-            <a:pPr algn="ctr"/>
-            <a:r>
-              <a:rPr lang="es-ES" sz="2000" dirty="0"/>
-              <a:t>transfer </a:t>
-            </a:r>
-            <a:r>
-              <a:rPr lang="es-ES" sz="2000" dirty="0" err="1"/>
-              <a:t>functions</a:t>
-            </a:r>
-            <a:endParaRPr lang="es-ES" sz="2000" dirty="0"/>
-          </a:p>
-          <a:p>
-            <a:pPr algn="ctr"/>
-            <a:endParaRPr lang="es-ES" sz="2000" dirty="0"/>
-          </a:p>
-          <a:p>
-            <a:pPr algn="ctr"/>
-            <a:r>
-              <a:rPr lang="es-ES" sz="2000" dirty="0"/>
-              <a:t>Linear </a:t>
-            </a:r>
-            <a:r>
-              <a:rPr lang="es-ES" sz="2000" dirty="0" err="1"/>
-              <a:t>units</a:t>
-            </a:r>
-            <a:endParaRPr lang="es-ES" sz="2000" dirty="0"/>
-          </a:p>
-          <a:p>
-            <a:pPr algn="ctr"/>
-            <a:endParaRPr lang="es-ES" sz="2000" dirty="0"/>
-          </a:p>
-          <a:p>
-            <a:pPr algn="ctr"/>
-            <a:r>
-              <a:rPr lang="es-ES" sz="2000" dirty="0"/>
-              <a:t>K=</a:t>
-            </a:r>
-            <a:endParaRPr lang="en-US" sz="2000" dirty="0"/>
-          </a:p>
-        </p:txBody>
-      </p:sp>
-      <p:sp>
-        <p:nvSpPr>
-          <p:cNvPr id="13" name="CuadroTexto 12">
-            <a:extLst>
-              <a:ext uri="{FF2B5EF4-FFF2-40B4-BE49-F238E27FC236}">
-                <a16:creationId xmlns:a16="http://schemas.microsoft.com/office/drawing/2014/main" id="{057C499E-829F-FB11-9128-843C937CB822}"/>
-              </a:ext>
-            </a:extLst>
-          </p:cNvPr>
-          <p:cNvSpPr txBox="1"/>
-          <p:nvPr/>
-        </p:nvSpPr>
-        <p:spPr>
-          <a:xfrm>
-            <a:off x="6195187" y="2101891"/>
-            <a:ext cx="2033313" cy="1938992"/>
-          </a:xfrm>
-          <a:prstGeom prst="rect">
-            <a:avLst/>
-          </a:prstGeom>
-          <a:noFill/>
-        </p:spPr>
-        <p:txBody>
-          <a:bodyPr wrap="none" rtlCol="0">
-            <a:spAutoFit/>
-          </a:bodyPr>
-          <a:lstStyle/>
-          <a:p>
-            <a:pPr algn="ctr"/>
-            <a:r>
-              <a:rPr lang="es-ES" sz="2000" dirty="0"/>
-              <a:t>Single ring</a:t>
-            </a:r>
-          </a:p>
-          <a:p>
-            <a:pPr algn="ctr"/>
-            <a:r>
-              <a:rPr lang="es-ES" sz="2000" dirty="0"/>
-              <a:t>transfer </a:t>
-            </a:r>
-            <a:r>
-              <a:rPr lang="es-ES" sz="2000" dirty="0" err="1"/>
-              <a:t>functions</a:t>
-            </a:r>
-            <a:endParaRPr lang="es-ES" sz="2000" dirty="0"/>
-          </a:p>
-          <a:p>
-            <a:pPr algn="ctr"/>
-            <a:endParaRPr lang="es-ES" sz="2000" dirty="0"/>
-          </a:p>
-          <a:p>
-            <a:pPr algn="ctr"/>
-            <a:r>
-              <a:rPr lang="es-ES" sz="2000" dirty="0"/>
-              <a:t>Linear </a:t>
-            </a:r>
-            <a:r>
-              <a:rPr lang="es-ES" sz="2000" dirty="0" err="1"/>
-              <a:t>units</a:t>
-            </a:r>
-            <a:endParaRPr lang="es-ES" sz="2000" dirty="0"/>
-          </a:p>
-          <a:p>
-            <a:pPr algn="ctr"/>
-            <a:endParaRPr lang="es-ES" sz="2000" dirty="0"/>
-          </a:p>
-          <a:p>
-            <a:pPr algn="ctr"/>
-            <a:r>
-              <a:rPr lang="es-ES" sz="2000" dirty="0"/>
-              <a:t>K=</a:t>
-            </a:r>
-            <a:endParaRPr lang="en-US" sz="2000" dirty="0"/>
-          </a:p>
-        </p:txBody>
-      </p:sp>
-      <p:sp>
-        <p:nvSpPr>
-          <p:cNvPr id="12" name="CuadroTexto 11">
-            <a:extLst>
-              <a:ext uri="{FF2B5EF4-FFF2-40B4-BE49-F238E27FC236}">
-                <a16:creationId xmlns:a16="http://schemas.microsoft.com/office/drawing/2014/main" id="{4E78CC89-1377-28A4-024D-1B017D551FC5}"/>
-              </a:ext>
-            </a:extLst>
-          </p:cNvPr>
-          <p:cNvSpPr txBox="1"/>
-          <p:nvPr/>
-        </p:nvSpPr>
-        <p:spPr>
-          <a:xfrm>
-            <a:off x="9869875" y="2871332"/>
-            <a:ext cx="360996" cy="400110"/>
-          </a:xfrm>
-          <a:prstGeom prst="rect">
-            <a:avLst/>
-          </a:prstGeom>
-          <a:noFill/>
-        </p:spPr>
-        <p:txBody>
-          <a:bodyPr wrap="none" rtlCol="0">
-            <a:spAutoFit/>
-          </a:bodyPr>
-          <a:lstStyle/>
-          <a:p>
-            <a:pPr algn="ctr"/>
-            <a:r>
-              <a:rPr lang="es-ES" sz="2000" dirty="0"/>
-              <a:t>…</a:t>
-            </a:r>
-            <a:endParaRPr lang="en-US" sz="2000" dirty="0"/>
-          </a:p>
-        </p:txBody>
-      </p:sp>
-      <p:pic>
-        <p:nvPicPr>
-          <p:cNvPr id="3" name="Gráfico 2">
-            <a:extLst>
-              <a:ext uri="{FF2B5EF4-FFF2-40B4-BE49-F238E27FC236}">
-                <a16:creationId xmlns:a16="http://schemas.microsoft.com/office/drawing/2014/main" id="{0B245A9E-6C9A-F3A8-E4B7-661580126414}"/>
-              </a:ext>
-            </a:extLst>
-          </p:cNvPr>
-          <p:cNvPicPr>
-            <a:picLocks noChangeAspect="1"/>
-          </p:cNvPicPr>
-          <p:nvPr/>
-        </p:nvPicPr>
-        <p:blipFill>
-          <a:blip>
-            <a:extLst>
-              <a:ext uri="{96DAC541-7B7A-43D3-8B79-37D633B846F1}">
-                <asvg:svgBlip xmlns:asvg="http://schemas.microsoft.com/office/drawing/2016/SVG/main" r:embed="rId2"/>
-              </a:ext>
-            </a:extLst>
-          </a:blip>
-          <a:stretch>
-            <a:fillRect/>
-          </a:stretch>
-        </p:blipFill>
-        <p:spPr>
-          <a:xfrm>
-            <a:off x="5045006" y="6356057"/>
-            <a:ext cx="6409575" cy="363174"/>
-          </a:xfrm>
-          <a:prstGeom prst="rect">
-            <a:avLst/>
-          </a:prstGeom>
-        </p:spPr>
-      </p:pic>
-      <p:sp>
-        <p:nvSpPr>
           <p:cNvPr id="16" name="object 16">
             <a:extLst>
               <a:ext uri="{FF2B5EF4-FFF2-40B4-BE49-F238E27FC236}">
@@ -9182,8 +7408,8 @@
         </p:nvSpPr>
         <p:spPr>
           <a:xfrm>
-            <a:off x="685800" y="408883"/>
-            <a:ext cx="10994410" cy="718145"/>
+            <a:off x="38100" y="-4763"/>
+            <a:ext cx="10994410" cy="397545"/>
           </a:xfrm>
           <a:prstGeom prst="rect">
             <a:avLst/>
@@ -9213,15 +7439,8 @@
             </a:pPr>
             <a:r>
               <a:rPr lang="en-US" sz="2500" kern="0" dirty="0"/>
-              <a:t>Learning outcome #6a – Effect of K </a:t>
-            </a:r>
-          </a:p>
-          <a:p>
-            <a:pPr marL="12700">
-              <a:spcBef>
-                <a:spcPts val="100"/>
-              </a:spcBef>
-            </a:pPr>
+              <a:t>Learning outcome #6a – Effect of K  </a:t>
+            </a:r>
             <a:r>
               <a:rPr lang="en-US" b="0" kern="0" spc="-5" dirty="0">
                 <a:latin typeface="+mj-lt"/>
@@ -9232,6 +7451,72 @@
           </a:p>
         </p:txBody>
       </p:sp>
+      <p:sp>
+        <p:nvSpPr>
+          <p:cNvPr id="23" name="CasellaDiTesto 22">
+            <a:extLst>
+              <a:ext uri="{FF2B5EF4-FFF2-40B4-BE49-F238E27FC236}">
+                <a16:creationId xmlns:a16="http://schemas.microsoft.com/office/drawing/2014/main" id="{B6F935A7-5B41-FD18-1B57-72059AAE5863}"/>
+              </a:ext>
+            </a:extLst>
+          </p:cNvPr>
+          <p:cNvSpPr txBox="1"/>
+          <p:nvPr/>
+        </p:nvSpPr>
+        <p:spPr>
+          <a:xfrm>
+            <a:off x="6450892" y="1494020"/>
+            <a:ext cx="5737360" cy="3785652"/>
+          </a:xfrm>
+          <a:prstGeom prst="rect">
+            <a:avLst/>
+          </a:prstGeom>
+          <a:noFill/>
+        </p:spPr>
+        <p:txBody>
+          <a:bodyPr wrap="square" rtlCol="0">
+            <a:spAutoFit/>
+          </a:bodyPr>
+          <a:lstStyle/>
+          <a:p>
+            <a:r>
+              <a:rPr lang="en-US" sz="2400" dirty="0"/>
+              <a:t>As K goes from 0.1 to 0.9 the dips get wider and shallower. At K equal to 0.2 the dip reaches zero which means critical coupling, the point where the coupled power exactly matches the internal round trip loss. Below 0.2 the ring is under coupled and the dip does not reach zero. Above 0.2 it is over coupled and the dip rises back up. So K equal to 0.2 is the closest case to critical coupling in this sweep.</a:t>
+            </a:r>
+            <a:endParaRPr lang="it-IT" sz="2400" dirty="0"/>
+          </a:p>
+        </p:txBody>
+      </p:sp>
+      <p:pic>
+        <p:nvPicPr>
+          <p:cNvPr id="3" name="Immagine 2">
+            <a:extLst>
+              <a:ext uri="{FF2B5EF4-FFF2-40B4-BE49-F238E27FC236}">
+                <a16:creationId xmlns:a16="http://schemas.microsoft.com/office/drawing/2014/main" id="{489AF722-E212-3F13-9824-AFC6F5DD7760}"/>
+              </a:ext>
+            </a:extLst>
+          </p:cNvPr>
+          <p:cNvPicPr>
+            <a:picLocks noChangeAspect="1"/>
+          </p:cNvPicPr>
+          <p:nvPr/>
+        </p:nvPicPr>
+        <p:blipFill>
+          <a:blip r:embed="rId2"/>
+          <a:stretch>
+            <a:fillRect/>
+          </a:stretch>
+        </p:blipFill>
+        <p:spPr>
+          <a:xfrm>
+            <a:off x="102433" y="1524000"/>
+            <a:ext cx="6032500" cy="3810000"/>
+          </a:xfrm>
+          <a:prstGeom prst="rect">
+            <a:avLst/>
+          </a:prstGeom>
+        </p:spPr>
+      </p:pic>
     </p:spTree>
     <p:extLst>
       <p:ext uri="{BB962C8B-B14F-4D97-AF65-F5344CB8AC3E}">

--- a/LabBook_30.pptx
+++ b/LabBook_30.pptx
@@ -2760,18 +2760,11 @@
               </a:spcBef>
             </a:pPr>
             <a:r>
-              <a:rPr lang="es-ES" spc="165" dirty="0" err="1">
-                <a:latin typeface="Arial"/>
-                <a:cs typeface="Arial"/>
-              </a:rPr>
-              <a:t>Student</a:t>
-            </a:r>
-            <a:r>
               <a:rPr lang="es-ES" spc="165" dirty="0">
                 <a:latin typeface="Arial"/>
                 <a:cs typeface="Arial"/>
               </a:rPr>
-              <a:t>: </a:t>
+              <a:t>Student: Candela Molinos Rodriguez-Murcia, Giorgio Andreoli</a:t>
             </a:r>
             <a:endParaRPr sz="1800" dirty="0">
               <a:latin typeface="Arial"/>
@@ -5122,8 +5115,8 @@
           </a:p>
         </p:txBody>
       </p:sp>
-      <mc:AlternateContent xmlns:mc="http://schemas.openxmlformats.org/markup-compatibility/2006">
-        <mc:Choice xmlns:a14="http://schemas.microsoft.com/office/drawing/2010/main" Requires="a14">
+      <mc:AlternateContent xmlns:mc="http://schemas.openxmlformats.org/markup-compatibility/2006" xmlns:a14="http://schemas.microsoft.com/office/drawing/2010/main">
+        <mc:Choice Requires="a14">
           <p:sp>
             <p:nvSpPr>
               <p:cNvPr id="17" name="CasellaDiTesto 16">
@@ -5271,7 +5264,7 @@
             </p:txBody>
           </p:sp>
         </mc:Choice>
-        <mc:Fallback>
+        <mc:Fallback xmlns="">
           <p:sp>
             <p:nvSpPr>
               <p:cNvPr id="17" name="CasellaDiTesto 16">
@@ -5316,8 +5309,8 @@
           </p:sp>
         </mc:Fallback>
       </mc:AlternateContent>
-      <mc:AlternateContent xmlns:mc="http://schemas.openxmlformats.org/markup-compatibility/2006">
-        <mc:Choice xmlns:a14="http://schemas.microsoft.com/office/drawing/2010/main" Requires="a14">
+      <mc:AlternateContent xmlns:mc="http://schemas.openxmlformats.org/markup-compatibility/2006" xmlns:a14="http://schemas.microsoft.com/office/drawing/2010/main">
+        <mc:Choice Requires="a14">
           <p:sp>
             <p:nvSpPr>
               <p:cNvPr id="19" name="CasellaDiTesto 18">
@@ -5431,13 +5424,7 @@
                             <a:rPr lang="en-US" b="0" i="1" smtClean="0">
                               <a:latin typeface="Cambria Math" panose="02040503050406030204" pitchFamily="18" charset="0"/>
                             </a:rPr>
-                            <m:t>2.0∗</m:t>
-                          </m:r>
-                          <m:r>
-                            <a:rPr lang="en-US" b="0" i="1" smtClean="0">
-                              <a:latin typeface="Cambria Math" panose="02040503050406030204" pitchFamily="18" charset="0"/>
-                            </a:rPr>
-                            <m:t>4.2</m:t>
+                            <m:t>2.0∗4.2</m:t>
                           </m:r>
                           <m:r>
                             <a:rPr lang="it-IT" i="1" smtClean="0">
@@ -5480,7 +5467,7 @@
             </p:txBody>
           </p:sp>
         </mc:Choice>
-        <mc:Fallback>
+        <mc:Fallback xmlns="">
           <p:sp>
             <p:nvSpPr>
               <p:cNvPr id="19" name="CasellaDiTesto 18">
@@ -5525,8 +5512,8 @@
           </p:sp>
         </mc:Fallback>
       </mc:AlternateContent>
-      <mc:AlternateContent xmlns:mc="http://schemas.openxmlformats.org/markup-compatibility/2006">
-        <mc:Choice xmlns:a14="http://schemas.microsoft.com/office/drawing/2010/main" Requires="a14">
+      <mc:AlternateContent xmlns:mc="http://schemas.openxmlformats.org/markup-compatibility/2006" xmlns:a14="http://schemas.microsoft.com/office/drawing/2010/main">
+        <mc:Choice Requires="a14">
           <p:sp>
             <p:nvSpPr>
               <p:cNvPr id="21" name="CasellaDiTesto 20">
@@ -5572,13 +5559,7 @@
                         <a:rPr lang="en-US" b="0" i="1" smtClean="0">
                           <a:latin typeface="Cambria Math" panose="02040503050406030204" pitchFamily="18" charset="0"/>
                         </a:rPr>
-                        <m:t>286</m:t>
-                      </m:r>
-                      <m:r>
-                        <a:rPr lang="en-US" b="0" i="1" smtClean="0">
-                          <a:latin typeface="Cambria Math" panose="02040503050406030204" pitchFamily="18" charset="0"/>
-                        </a:rPr>
-                        <m:t>.25 </m:t>
+                        <m:t>286.25 </m:t>
                       </m:r>
                       <m:r>
                         <a:rPr lang="en-US" b="0" i="1" smtClean="0">
@@ -5594,7 +5575,7 @@
             </p:txBody>
           </p:sp>
         </mc:Choice>
-        <mc:Fallback>
+        <mc:Fallback xmlns="">
           <p:sp>
             <p:nvSpPr>
               <p:cNvPr id="21" name="CasellaDiTesto 20">
@@ -6920,8 +6901,8 @@
           </a:p>
         </p:txBody>
       </p:sp>
-      <mc:AlternateContent xmlns:mc="http://schemas.openxmlformats.org/markup-compatibility/2006">
-        <mc:Choice xmlns:a14="http://schemas.microsoft.com/office/drawing/2010/main" Requires="a14">
+      <mc:AlternateContent xmlns:mc="http://schemas.openxmlformats.org/markup-compatibility/2006" xmlns:a14="http://schemas.microsoft.com/office/drawing/2010/main">
+        <mc:Choice Requires="a14">
           <p:sp>
             <p:nvSpPr>
               <p:cNvPr id="9" name="CasellaDiTesto 8">
@@ -7170,13 +7151,7 @@
                           <a:rPr lang="en-US" b="0" i="1" smtClean="0">
                             <a:latin typeface="Cambria Math" panose="02040503050406030204" pitchFamily="18" charset="0"/>
                           </a:rPr>
-                          <m:t> </m:t>
-                        </m:r>
-                        <m:r>
-                          <a:rPr lang="en-US" b="0" i="1" smtClean="0">
-                            <a:latin typeface="Cambria Math" panose="02040503050406030204" pitchFamily="18" charset="0"/>
-                          </a:rPr>
-                          <m:t>2.0</m:t>
+                          <m:t> 2.0</m:t>
                         </m:r>
                         <m:r>
                           <a:rPr lang="en-US" i="1">
@@ -7238,7 +7213,7 @@
             </p:txBody>
           </p:sp>
         </mc:Choice>
-        <mc:Fallback>
+        <mc:Fallback xmlns="">
           <p:sp>
             <p:nvSpPr>
               <p:cNvPr id="9" name="CasellaDiTesto 8">
